--- a/MVS_bootleg_convert/Chip_Analysis_and_schemes.pptx
+++ b/MVS_bootleg_convert/Chip_Analysis_and_schemes.pptx
@@ -9,16 +9,11 @@
     <p:sldId id="258" r:id="rId3"/>
     <p:sldId id="259" r:id="rId4"/>
     <p:sldId id="257" r:id="rId5"/>
-    <p:sldId id="261" r:id="rId6"/>
-    <p:sldId id="260" r:id="rId7"/>
-    <p:sldId id="262" r:id="rId8"/>
-    <p:sldId id="263" r:id="rId9"/>
-    <p:sldId id="264" r:id="rId10"/>
-    <p:sldId id="265" r:id="rId11"/>
-    <p:sldId id="266" r:id="rId12"/>
-    <p:sldId id="267" r:id="rId13"/>
-    <p:sldId id="268" r:id="rId14"/>
-    <p:sldId id="269" r:id="rId15"/>
+    <p:sldId id="265" r:id="rId6"/>
+    <p:sldId id="266" r:id="rId7"/>
+    <p:sldId id="267" r:id="rId8"/>
+    <p:sldId id="268" r:id="rId9"/>
+    <p:sldId id="269" r:id="rId10"/>
   </p:sldIdLst>
   <p:sldSz cx="12192000" cy="6858000"/>
   <p:notesSz cx="6858000" cy="9144000"/>
@@ -119,7 +114,7 @@
   </p:defaultTextStyle>
   <p:extLst>
     <p:ext uri="{EFAFB233-063F-42B5-8137-9DF3F51BA10A}">
-      <p15:sldGuideLst xmlns="" xmlns:p15="http://schemas.microsoft.com/office/powerpoint/2012/main">
+      <p15:sldGuideLst xmlns:p15="http://schemas.microsoft.com/office/powerpoint/2012/main">
         <p15:guide id="1" orient="horz" pos="2160">
           <p15:clr>
             <a:srgbClr val="A4A3A4"/>
@@ -141,7 +136,7 @@
   <p:cmAuthor id="1" name="boichot" initials="b" lastIdx="1" clrIdx="0">
     <p:extLst>
       <p:ext uri="{19B8F6BF-5375-455C-9EA6-DF929625EA0E}">
-        <p15:presenceInfo xmlns="" xmlns:p15="http://schemas.microsoft.com/office/powerpoint/2012/main" userId="boichot" providerId="None"/>
+        <p15:presenceInfo xmlns:p15="http://schemas.microsoft.com/office/powerpoint/2012/main" userId="boichot" providerId="None"/>
       </p:ext>
     </p:extLst>
   </p:cmAuthor>
@@ -280,7 +275,7 @@
             <a:fld id="{4EA84CA3-116E-4ABF-8AA6-EBE32C84C16F}" type="datetimeFigureOut">
               <a:rPr lang="fr-FR" smtClean="0"/>
               <a:pPr/>
-              <a:t>12/09/2026</a:t>
+              <a:t>14/09/2026</a:t>
             </a:fld>
             <a:endParaRPr lang="fr-FR"/>
           </a:p>
@@ -332,7 +327,7 @@
     </p:spTree>
     <p:extLst>
       <p:ext uri="{BB962C8B-B14F-4D97-AF65-F5344CB8AC3E}">
-        <p14:creationId xmlns="" xmlns:p14="http://schemas.microsoft.com/office/powerpoint/2010/main" val="2003778223"/>
+        <p14:creationId xmlns:p14="http://schemas.microsoft.com/office/powerpoint/2010/main" val="2003778223"/>
       </p:ext>
     </p:extLst>
   </p:cSld>
@@ -452,7 +447,7 @@
             <a:fld id="{4EA84CA3-116E-4ABF-8AA6-EBE32C84C16F}" type="datetimeFigureOut">
               <a:rPr lang="fr-FR" smtClean="0"/>
               <a:pPr/>
-              <a:t>12/09/2026</a:t>
+              <a:t>14/09/2026</a:t>
             </a:fld>
             <a:endParaRPr lang="fr-FR"/>
           </a:p>
@@ -504,7 +499,7 @@
     </p:spTree>
     <p:extLst>
       <p:ext uri="{BB962C8B-B14F-4D97-AF65-F5344CB8AC3E}">
-        <p14:creationId xmlns="" xmlns:p14="http://schemas.microsoft.com/office/powerpoint/2010/main" val="3709322164"/>
+        <p14:creationId xmlns:p14="http://schemas.microsoft.com/office/powerpoint/2010/main" val="3709322164"/>
       </p:ext>
     </p:extLst>
   </p:cSld>
@@ -634,7 +629,7 @@
             <a:fld id="{4EA84CA3-116E-4ABF-8AA6-EBE32C84C16F}" type="datetimeFigureOut">
               <a:rPr lang="fr-FR" smtClean="0"/>
               <a:pPr/>
-              <a:t>12/09/2026</a:t>
+              <a:t>14/09/2026</a:t>
             </a:fld>
             <a:endParaRPr lang="fr-FR"/>
           </a:p>
@@ -686,7 +681,7 @@
     </p:spTree>
     <p:extLst>
       <p:ext uri="{BB962C8B-B14F-4D97-AF65-F5344CB8AC3E}">
-        <p14:creationId xmlns="" xmlns:p14="http://schemas.microsoft.com/office/powerpoint/2010/main" val="1419434073"/>
+        <p14:creationId xmlns:p14="http://schemas.microsoft.com/office/powerpoint/2010/main" val="1419434073"/>
       </p:ext>
     </p:extLst>
   </p:cSld>
@@ -806,7 +801,7 @@
             <a:fld id="{4EA84CA3-116E-4ABF-8AA6-EBE32C84C16F}" type="datetimeFigureOut">
               <a:rPr lang="fr-FR" smtClean="0"/>
               <a:pPr/>
-              <a:t>12/09/2026</a:t>
+              <a:t>14/09/2026</a:t>
             </a:fld>
             <a:endParaRPr lang="fr-FR"/>
           </a:p>
@@ -858,7 +853,7 @@
     </p:spTree>
     <p:extLst>
       <p:ext uri="{BB962C8B-B14F-4D97-AF65-F5344CB8AC3E}">
-        <p14:creationId xmlns="" xmlns:p14="http://schemas.microsoft.com/office/powerpoint/2010/main" val="1102157496"/>
+        <p14:creationId xmlns:p14="http://schemas.microsoft.com/office/powerpoint/2010/main" val="1102157496"/>
       </p:ext>
     </p:extLst>
   </p:cSld>
@@ -1054,7 +1049,7 @@
             <a:fld id="{4EA84CA3-116E-4ABF-8AA6-EBE32C84C16F}" type="datetimeFigureOut">
               <a:rPr lang="fr-FR" smtClean="0"/>
               <a:pPr/>
-              <a:t>12/09/2026</a:t>
+              <a:t>14/09/2026</a:t>
             </a:fld>
             <a:endParaRPr lang="fr-FR"/>
           </a:p>
@@ -1106,7 +1101,7 @@
     </p:spTree>
     <p:extLst>
       <p:ext uri="{BB962C8B-B14F-4D97-AF65-F5344CB8AC3E}">
-        <p14:creationId xmlns="" xmlns:p14="http://schemas.microsoft.com/office/powerpoint/2010/main" val="660080195"/>
+        <p14:creationId xmlns:p14="http://schemas.microsoft.com/office/powerpoint/2010/main" val="660080195"/>
       </p:ext>
     </p:extLst>
   </p:cSld>
@@ -1288,7 +1283,7 @@
             <a:fld id="{4EA84CA3-116E-4ABF-8AA6-EBE32C84C16F}" type="datetimeFigureOut">
               <a:rPr lang="fr-FR" smtClean="0"/>
               <a:pPr/>
-              <a:t>12/09/2026</a:t>
+              <a:t>14/09/2026</a:t>
             </a:fld>
             <a:endParaRPr lang="fr-FR"/>
           </a:p>
@@ -1340,7 +1335,7 @@
     </p:spTree>
     <p:extLst>
       <p:ext uri="{BB962C8B-B14F-4D97-AF65-F5344CB8AC3E}">
-        <p14:creationId xmlns="" xmlns:p14="http://schemas.microsoft.com/office/powerpoint/2010/main" val="2283449542"/>
+        <p14:creationId xmlns:p14="http://schemas.microsoft.com/office/powerpoint/2010/main" val="2283449542"/>
       </p:ext>
     </p:extLst>
   </p:cSld>
@@ -1657,7 +1652,7 @@
             <a:fld id="{4EA84CA3-116E-4ABF-8AA6-EBE32C84C16F}" type="datetimeFigureOut">
               <a:rPr lang="fr-FR" smtClean="0"/>
               <a:pPr/>
-              <a:t>12/09/2026</a:t>
+              <a:t>14/09/2026</a:t>
             </a:fld>
             <a:endParaRPr lang="fr-FR"/>
           </a:p>
@@ -1709,7 +1704,7 @@
     </p:spTree>
     <p:extLst>
       <p:ext uri="{BB962C8B-B14F-4D97-AF65-F5344CB8AC3E}">
-        <p14:creationId xmlns="" xmlns:p14="http://schemas.microsoft.com/office/powerpoint/2010/main" val="2663865323"/>
+        <p14:creationId xmlns:p14="http://schemas.microsoft.com/office/powerpoint/2010/main" val="2663865323"/>
       </p:ext>
     </p:extLst>
   </p:cSld>
@@ -1777,7 +1772,7 @@
             <a:fld id="{4EA84CA3-116E-4ABF-8AA6-EBE32C84C16F}" type="datetimeFigureOut">
               <a:rPr lang="fr-FR" smtClean="0"/>
               <a:pPr/>
-              <a:t>12/09/2026</a:t>
+              <a:t>14/09/2026</a:t>
             </a:fld>
             <a:endParaRPr lang="fr-FR"/>
           </a:p>
@@ -1829,7 +1824,7 @@
     </p:spTree>
     <p:extLst>
       <p:ext uri="{BB962C8B-B14F-4D97-AF65-F5344CB8AC3E}">
-        <p14:creationId xmlns="" xmlns:p14="http://schemas.microsoft.com/office/powerpoint/2010/main" val="376323583"/>
+        <p14:creationId xmlns:p14="http://schemas.microsoft.com/office/powerpoint/2010/main" val="376323583"/>
       </p:ext>
     </p:extLst>
   </p:cSld>
@@ -1874,7 +1869,7 @@
             <a:fld id="{4EA84CA3-116E-4ABF-8AA6-EBE32C84C16F}" type="datetimeFigureOut">
               <a:rPr lang="fr-FR" smtClean="0"/>
               <a:pPr/>
-              <a:t>12/09/2026</a:t>
+              <a:t>14/09/2026</a:t>
             </a:fld>
             <a:endParaRPr lang="fr-FR"/>
           </a:p>
@@ -1926,7 +1921,7 @@
     </p:spTree>
     <p:extLst>
       <p:ext uri="{BB962C8B-B14F-4D97-AF65-F5344CB8AC3E}">
-        <p14:creationId xmlns="" xmlns:p14="http://schemas.microsoft.com/office/powerpoint/2010/main" val="3989902220"/>
+        <p14:creationId xmlns:p14="http://schemas.microsoft.com/office/powerpoint/2010/main" val="3989902220"/>
       </p:ext>
     </p:extLst>
   </p:cSld>
@@ -2153,7 +2148,7 @@
             <a:fld id="{4EA84CA3-116E-4ABF-8AA6-EBE32C84C16F}" type="datetimeFigureOut">
               <a:rPr lang="fr-FR" smtClean="0"/>
               <a:pPr/>
-              <a:t>12/09/2026</a:t>
+              <a:t>14/09/2026</a:t>
             </a:fld>
             <a:endParaRPr lang="fr-FR"/>
           </a:p>
@@ -2205,7 +2200,7 @@
     </p:spTree>
     <p:extLst>
       <p:ext uri="{BB962C8B-B14F-4D97-AF65-F5344CB8AC3E}">
-        <p14:creationId xmlns="" xmlns:p14="http://schemas.microsoft.com/office/powerpoint/2010/main" val="1997102884"/>
+        <p14:creationId xmlns:p14="http://schemas.microsoft.com/office/powerpoint/2010/main" val="1997102884"/>
       </p:ext>
     </p:extLst>
   </p:cSld>
@@ -2408,7 +2403,7 @@
             <a:fld id="{4EA84CA3-116E-4ABF-8AA6-EBE32C84C16F}" type="datetimeFigureOut">
               <a:rPr lang="fr-FR" smtClean="0"/>
               <a:pPr/>
-              <a:t>12/09/2026</a:t>
+              <a:t>14/09/2026</a:t>
             </a:fld>
             <a:endParaRPr lang="fr-FR"/>
           </a:p>
@@ -2460,7 +2455,7 @@
     </p:spTree>
     <p:extLst>
       <p:ext uri="{BB962C8B-B14F-4D97-AF65-F5344CB8AC3E}">
-        <p14:creationId xmlns="" xmlns:p14="http://schemas.microsoft.com/office/powerpoint/2010/main" val="3738991770"/>
+        <p14:creationId xmlns:p14="http://schemas.microsoft.com/office/powerpoint/2010/main" val="3738991770"/>
       </p:ext>
     </p:extLst>
   </p:cSld>
@@ -2623,7 +2618,7 @@
             <a:fld id="{4EA84CA3-116E-4ABF-8AA6-EBE32C84C16F}" type="datetimeFigureOut">
               <a:rPr lang="fr-FR" smtClean="0"/>
               <a:pPr/>
-              <a:t>12/09/2026</a:t>
+              <a:t>14/09/2026</a:t>
             </a:fld>
             <a:endParaRPr lang="fr-FR"/>
           </a:p>
@@ -2711,7 +2706,7 @@
     </p:spTree>
     <p:extLst>
       <p:ext uri="{BB962C8B-B14F-4D97-AF65-F5344CB8AC3E}">
-        <p14:creationId xmlns="" xmlns:p14="http://schemas.microsoft.com/office/powerpoint/2010/main" val="4265157320"/>
+        <p14:creationId xmlns:p14="http://schemas.microsoft.com/office/powerpoint/2010/main" val="4265157320"/>
       </p:ext>
     </p:extLst>
   </p:cSld>
@@ -3814,4041 +3809,9 @@
     </p:spTree>
     <p:extLst>
       <p:ext uri="{BB962C8B-B14F-4D97-AF65-F5344CB8AC3E}">
-        <p14:creationId xmlns="" xmlns:p14="http://schemas.microsoft.com/office/powerpoint/2010/main" val="3760226372"/>
+        <p14:creationId xmlns:p14="http://schemas.microsoft.com/office/powerpoint/2010/main" val="3760226372"/>
       </p:ext>
     </p:extLst>
-  </p:cSld>
-  <p:clrMapOvr>
-    <a:masterClrMapping/>
-  </p:clrMapOvr>
-  <p:timing>
-    <p:tnLst>
-      <p:par>
-        <p:cTn id="1" dur="indefinite" restart="never" nodeType="tmRoot"/>
-      </p:par>
-    </p:tnLst>
-  </p:timing>
-</p:sld>
-</file>
-
-<file path=ppt/slides/slide10.xml><?xml version="1.0" encoding="utf-8"?>
-<p:sld xmlns:a="http://schemas.openxmlformats.org/drawingml/2006/main" xmlns:r="http://schemas.openxmlformats.org/officeDocument/2006/relationships" xmlns:p="http://schemas.openxmlformats.org/presentationml/2006/main">
-  <p:cSld>
-    <p:spTree>
-      <p:nvGrpSpPr>
-        <p:cNvPr id="1" name=""/>
-        <p:cNvGrpSpPr/>
-        <p:nvPr/>
-      </p:nvGrpSpPr>
-      <p:grpSpPr>
-        <a:xfrm>
-          <a:off x="0" y="0"/>
-          <a:ext cx="0" cy="0"/>
-          <a:chOff x="0" y="0"/>
-          <a:chExt cx="0" cy="0"/>
-        </a:xfrm>
-      </p:grpSpPr>
-      <p:pic>
-        <p:nvPicPr>
-          <p:cNvPr id="1026" name="Picture 2"/>
-          <p:cNvPicPr>
-            <a:picLocks noChangeAspect="1" noChangeArrowheads="1"/>
-          </p:cNvPicPr>
-          <p:nvPr/>
-        </p:nvPicPr>
-        <p:blipFill>
-          <a:blip r:embed="rId2" cstate="print"/>
-          <a:srcRect/>
-          <a:stretch>
-            <a:fillRect/>
-          </a:stretch>
-        </p:blipFill>
-        <p:spPr bwMode="auto">
-          <a:xfrm>
-            <a:off x="3921162" y="227207"/>
-            <a:ext cx="3812704" cy="6452374"/>
-          </a:xfrm>
-          <a:prstGeom prst="rect">
-            <a:avLst/>
-          </a:prstGeom>
-          <a:noFill/>
-          <a:ln w="9525">
-            <a:noFill/>
-            <a:miter lim="800000"/>
-            <a:headEnd/>
-            <a:tailEnd/>
-          </a:ln>
-          <a:effectLst/>
-        </p:spPr>
-      </p:pic>
-      <p:sp>
-        <p:nvSpPr>
-          <p:cNvPr id="6" name="ZoneTexte 5"/>
-          <p:cNvSpPr txBox="1"/>
-          <p:nvPr/>
-        </p:nvSpPr>
-        <p:spPr>
-          <a:xfrm>
-            <a:off x="3222667" y="3111190"/>
-            <a:ext cx="546410" cy="369332"/>
-          </a:xfrm>
-          <a:prstGeom prst="rect">
-            <a:avLst/>
-          </a:prstGeom>
-          <a:noFill/>
-        </p:spPr>
-        <p:txBody>
-          <a:bodyPr wrap="square" rtlCol="0">
-            <a:spAutoFit/>
-          </a:bodyPr>
-          <a:lstStyle/>
-          <a:p>
-            <a:r>
-              <a:rPr lang="fr-FR" dirty="0" smtClean="0">
-                <a:solidFill>
-                  <a:srgbClr val="FF0000"/>
-                </a:solidFill>
-              </a:rPr>
-              <a:t>A0</a:t>
-            </a:r>
-            <a:endParaRPr lang="fr-FR" dirty="0">
-              <a:solidFill>
-                <a:srgbClr val="FF0000"/>
-              </a:solidFill>
-            </a:endParaRPr>
-          </a:p>
-        </p:txBody>
-      </p:sp>
-      <p:sp>
-        <p:nvSpPr>
-          <p:cNvPr id="7" name="ZoneTexte 6"/>
-          <p:cNvSpPr txBox="1"/>
-          <p:nvPr/>
-        </p:nvSpPr>
-        <p:spPr>
-          <a:xfrm>
-            <a:off x="3230103" y="2828693"/>
-            <a:ext cx="546410" cy="369332"/>
-          </a:xfrm>
-          <a:prstGeom prst="rect">
-            <a:avLst/>
-          </a:prstGeom>
-          <a:noFill/>
-        </p:spPr>
-        <p:txBody>
-          <a:bodyPr wrap="square" rtlCol="0">
-            <a:spAutoFit/>
-          </a:bodyPr>
-          <a:lstStyle/>
-          <a:p>
-            <a:r>
-              <a:rPr lang="fr-FR" dirty="0" smtClean="0">
-                <a:solidFill>
-                  <a:srgbClr val="FF0000"/>
-                </a:solidFill>
-              </a:rPr>
-              <a:t>A1</a:t>
-            </a:r>
-            <a:endParaRPr lang="fr-FR" dirty="0">
-              <a:solidFill>
-                <a:srgbClr val="FF0000"/>
-              </a:solidFill>
-            </a:endParaRPr>
-          </a:p>
-        </p:txBody>
-      </p:sp>
-      <p:sp>
-        <p:nvSpPr>
-          <p:cNvPr id="8" name="ZoneTexte 7"/>
-          <p:cNvSpPr txBox="1"/>
-          <p:nvPr/>
-        </p:nvSpPr>
-        <p:spPr>
-          <a:xfrm>
-            <a:off x="3230102" y="2538762"/>
-            <a:ext cx="546410" cy="369332"/>
-          </a:xfrm>
-          <a:prstGeom prst="rect">
-            <a:avLst/>
-          </a:prstGeom>
-          <a:noFill/>
-        </p:spPr>
-        <p:txBody>
-          <a:bodyPr wrap="square" rtlCol="0">
-            <a:spAutoFit/>
-          </a:bodyPr>
-          <a:lstStyle/>
-          <a:p>
-            <a:r>
-              <a:rPr lang="fr-FR" dirty="0" smtClean="0">
-                <a:solidFill>
-                  <a:srgbClr val="FF0000"/>
-                </a:solidFill>
-              </a:rPr>
-              <a:t>A2</a:t>
-            </a:r>
-          </a:p>
-        </p:txBody>
-      </p:sp>
-      <p:sp>
-        <p:nvSpPr>
-          <p:cNvPr id="9" name="ZoneTexte 8"/>
-          <p:cNvSpPr txBox="1"/>
-          <p:nvPr/>
-        </p:nvSpPr>
-        <p:spPr>
-          <a:xfrm>
-            <a:off x="3230102" y="2293434"/>
-            <a:ext cx="546410" cy="369332"/>
-          </a:xfrm>
-          <a:prstGeom prst="rect">
-            <a:avLst/>
-          </a:prstGeom>
-          <a:noFill/>
-        </p:spPr>
-        <p:txBody>
-          <a:bodyPr wrap="square" rtlCol="0">
-            <a:spAutoFit/>
-          </a:bodyPr>
-          <a:lstStyle/>
-          <a:p>
-            <a:r>
-              <a:rPr lang="fr-FR" dirty="0" smtClean="0">
-                <a:solidFill>
-                  <a:srgbClr val="FF0000"/>
-                </a:solidFill>
-              </a:rPr>
-              <a:t>A3</a:t>
-            </a:r>
-            <a:endParaRPr lang="fr-FR" dirty="0">
-              <a:solidFill>
-                <a:srgbClr val="FF0000"/>
-              </a:solidFill>
-            </a:endParaRPr>
-          </a:p>
-        </p:txBody>
-      </p:sp>
-      <p:sp>
-        <p:nvSpPr>
-          <p:cNvPr id="10" name="ZoneTexte 9"/>
-          <p:cNvSpPr txBox="1"/>
-          <p:nvPr/>
-        </p:nvSpPr>
-        <p:spPr>
-          <a:xfrm>
-            <a:off x="3230100" y="1992351"/>
-            <a:ext cx="546410" cy="369332"/>
-          </a:xfrm>
-          <a:prstGeom prst="rect">
-            <a:avLst/>
-          </a:prstGeom>
-          <a:noFill/>
-        </p:spPr>
-        <p:txBody>
-          <a:bodyPr wrap="square" rtlCol="0">
-            <a:spAutoFit/>
-          </a:bodyPr>
-          <a:lstStyle/>
-          <a:p>
-            <a:r>
-              <a:rPr lang="fr-FR" dirty="0" smtClean="0">
-                <a:solidFill>
-                  <a:srgbClr val="FF0000"/>
-                </a:solidFill>
-              </a:rPr>
-              <a:t>A4</a:t>
-            </a:r>
-            <a:endParaRPr lang="fr-FR" dirty="0">
-              <a:solidFill>
-                <a:srgbClr val="FF0000"/>
-              </a:solidFill>
-            </a:endParaRPr>
-          </a:p>
-        </p:txBody>
-      </p:sp>
-      <p:sp>
-        <p:nvSpPr>
-          <p:cNvPr id="11" name="ZoneTexte 10"/>
-          <p:cNvSpPr txBox="1"/>
-          <p:nvPr/>
-        </p:nvSpPr>
-        <p:spPr>
-          <a:xfrm>
-            <a:off x="3230101" y="1724721"/>
-            <a:ext cx="546410" cy="369332"/>
-          </a:xfrm>
-          <a:prstGeom prst="rect">
-            <a:avLst/>
-          </a:prstGeom>
-          <a:noFill/>
-        </p:spPr>
-        <p:txBody>
-          <a:bodyPr wrap="square" rtlCol="0">
-            <a:spAutoFit/>
-          </a:bodyPr>
-          <a:lstStyle/>
-          <a:p>
-            <a:r>
-              <a:rPr lang="fr-FR" dirty="0" smtClean="0">
-                <a:solidFill>
-                  <a:srgbClr val="FF0000"/>
-                </a:solidFill>
-              </a:rPr>
-              <a:t>A5</a:t>
-            </a:r>
-            <a:endParaRPr lang="fr-FR" dirty="0">
-              <a:solidFill>
-                <a:srgbClr val="FF0000"/>
-              </a:solidFill>
-            </a:endParaRPr>
-          </a:p>
-        </p:txBody>
-      </p:sp>
-      <p:sp>
-        <p:nvSpPr>
-          <p:cNvPr id="12" name="ZoneTexte 11"/>
-          <p:cNvSpPr txBox="1"/>
-          <p:nvPr/>
-        </p:nvSpPr>
-        <p:spPr>
-          <a:xfrm>
-            <a:off x="3226384" y="1464525"/>
-            <a:ext cx="546410" cy="369332"/>
-          </a:xfrm>
-          <a:prstGeom prst="rect">
-            <a:avLst/>
-          </a:prstGeom>
-          <a:noFill/>
-        </p:spPr>
-        <p:txBody>
-          <a:bodyPr wrap="square" rtlCol="0">
-            <a:spAutoFit/>
-          </a:bodyPr>
-          <a:lstStyle/>
-          <a:p>
-            <a:r>
-              <a:rPr lang="fr-FR" dirty="0" smtClean="0">
-                <a:solidFill>
-                  <a:srgbClr val="FF0000"/>
-                </a:solidFill>
-              </a:rPr>
-              <a:t>A6</a:t>
-            </a:r>
-            <a:endParaRPr lang="fr-FR" dirty="0">
-              <a:solidFill>
-                <a:srgbClr val="FF0000"/>
-              </a:solidFill>
-            </a:endParaRPr>
-          </a:p>
-        </p:txBody>
-      </p:sp>
-      <p:sp>
-        <p:nvSpPr>
-          <p:cNvPr id="13" name="ZoneTexte 12"/>
-          <p:cNvSpPr txBox="1"/>
-          <p:nvPr/>
-        </p:nvSpPr>
-        <p:spPr>
-          <a:xfrm>
-            <a:off x="3237536" y="1196898"/>
-            <a:ext cx="546410" cy="369332"/>
-          </a:xfrm>
-          <a:prstGeom prst="rect">
-            <a:avLst/>
-          </a:prstGeom>
-          <a:noFill/>
-        </p:spPr>
-        <p:txBody>
-          <a:bodyPr wrap="square" rtlCol="0">
-            <a:spAutoFit/>
-          </a:bodyPr>
-          <a:lstStyle/>
-          <a:p>
-            <a:r>
-              <a:rPr lang="fr-FR" dirty="0" smtClean="0">
-                <a:solidFill>
-                  <a:srgbClr val="FF0000"/>
-                </a:solidFill>
-              </a:rPr>
-              <a:t>A7</a:t>
-            </a:r>
-            <a:endParaRPr lang="fr-FR" dirty="0">
-              <a:solidFill>
-                <a:srgbClr val="FF0000"/>
-              </a:solidFill>
-            </a:endParaRPr>
-          </a:p>
-        </p:txBody>
-      </p:sp>
-      <p:sp>
-        <p:nvSpPr>
-          <p:cNvPr id="14" name="ZoneTexte 13"/>
-          <p:cNvSpPr txBox="1"/>
-          <p:nvPr/>
-        </p:nvSpPr>
-        <p:spPr>
-          <a:xfrm>
-            <a:off x="7764919" y="840057"/>
-            <a:ext cx="546410" cy="369332"/>
-          </a:xfrm>
-          <a:prstGeom prst="rect">
-            <a:avLst/>
-          </a:prstGeom>
-          <a:noFill/>
-        </p:spPr>
-        <p:txBody>
-          <a:bodyPr wrap="square" rtlCol="0">
-            <a:spAutoFit/>
-          </a:bodyPr>
-          <a:lstStyle/>
-          <a:p>
-            <a:r>
-              <a:rPr lang="fr-FR" dirty="0" smtClean="0">
-                <a:solidFill>
-                  <a:srgbClr val="FF0000"/>
-                </a:solidFill>
-              </a:rPr>
-              <a:t>A8</a:t>
-            </a:r>
-            <a:endParaRPr lang="fr-FR" dirty="0">
-              <a:solidFill>
-                <a:srgbClr val="FF0000"/>
-              </a:solidFill>
-            </a:endParaRPr>
-          </a:p>
-        </p:txBody>
-      </p:sp>
-      <p:sp>
-        <p:nvSpPr>
-          <p:cNvPr id="16" name="ZoneTexte 15"/>
-          <p:cNvSpPr txBox="1"/>
-          <p:nvPr/>
-        </p:nvSpPr>
-        <p:spPr>
-          <a:xfrm>
-            <a:off x="7772356" y="1115122"/>
-            <a:ext cx="546410" cy="369332"/>
-          </a:xfrm>
-          <a:prstGeom prst="rect">
-            <a:avLst/>
-          </a:prstGeom>
-          <a:noFill/>
-        </p:spPr>
-        <p:txBody>
-          <a:bodyPr wrap="square" rtlCol="0">
-            <a:spAutoFit/>
-          </a:bodyPr>
-          <a:lstStyle/>
-          <a:p>
-            <a:r>
-              <a:rPr lang="fr-FR" dirty="0" smtClean="0">
-                <a:solidFill>
-                  <a:srgbClr val="FF0000"/>
-                </a:solidFill>
-              </a:rPr>
-              <a:t>A9</a:t>
-            </a:r>
-            <a:endParaRPr lang="fr-FR" dirty="0">
-              <a:solidFill>
-                <a:srgbClr val="FF0000"/>
-              </a:solidFill>
-            </a:endParaRPr>
-          </a:p>
-        </p:txBody>
-      </p:sp>
-      <p:sp>
-        <p:nvSpPr>
-          <p:cNvPr id="17" name="ZoneTexte 16"/>
-          <p:cNvSpPr txBox="1"/>
-          <p:nvPr/>
-        </p:nvSpPr>
-        <p:spPr>
-          <a:xfrm>
-            <a:off x="7761203" y="1393902"/>
-            <a:ext cx="747130" cy="369332"/>
-          </a:xfrm>
-          <a:prstGeom prst="rect">
-            <a:avLst/>
-          </a:prstGeom>
-          <a:noFill/>
-        </p:spPr>
-        <p:txBody>
-          <a:bodyPr wrap="square" rtlCol="0">
-            <a:spAutoFit/>
-          </a:bodyPr>
-          <a:lstStyle/>
-          <a:p>
-            <a:r>
-              <a:rPr lang="fr-FR" dirty="0" smtClean="0">
-                <a:solidFill>
-                  <a:srgbClr val="FF0000"/>
-                </a:solidFill>
-              </a:rPr>
-              <a:t>A10</a:t>
-            </a:r>
-          </a:p>
-        </p:txBody>
-      </p:sp>
-      <p:sp>
-        <p:nvSpPr>
-          <p:cNvPr id="18" name="ZoneTexte 17"/>
-          <p:cNvSpPr txBox="1"/>
-          <p:nvPr/>
-        </p:nvSpPr>
-        <p:spPr>
-          <a:xfrm>
-            <a:off x="7757485" y="1680115"/>
-            <a:ext cx="747130" cy="369332"/>
-          </a:xfrm>
-          <a:prstGeom prst="rect">
-            <a:avLst/>
-          </a:prstGeom>
-          <a:noFill/>
-        </p:spPr>
-        <p:txBody>
-          <a:bodyPr wrap="square" rtlCol="0">
-            <a:spAutoFit/>
-          </a:bodyPr>
-          <a:lstStyle/>
-          <a:p>
-            <a:r>
-              <a:rPr lang="fr-FR" dirty="0" smtClean="0">
-                <a:solidFill>
-                  <a:srgbClr val="FF0000"/>
-                </a:solidFill>
-              </a:rPr>
-              <a:t>A11</a:t>
-            </a:r>
-          </a:p>
-        </p:txBody>
-      </p:sp>
-      <p:sp>
-        <p:nvSpPr>
-          <p:cNvPr id="19" name="ZoneTexte 18"/>
-          <p:cNvSpPr txBox="1"/>
-          <p:nvPr/>
-        </p:nvSpPr>
-        <p:spPr>
-          <a:xfrm>
-            <a:off x="7757486" y="1958895"/>
-            <a:ext cx="747130" cy="369332"/>
-          </a:xfrm>
-          <a:prstGeom prst="rect">
-            <a:avLst/>
-          </a:prstGeom>
-          <a:noFill/>
-        </p:spPr>
-        <p:txBody>
-          <a:bodyPr wrap="square" rtlCol="0">
-            <a:spAutoFit/>
-          </a:bodyPr>
-          <a:lstStyle/>
-          <a:p>
-            <a:r>
-              <a:rPr lang="fr-FR" dirty="0" smtClean="0">
-                <a:solidFill>
-                  <a:srgbClr val="FF0000"/>
-                </a:solidFill>
-              </a:rPr>
-              <a:t>A12</a:t>
-            </a:r>
-          </a:p>
-        </p:txBody>
-      </p:sp>
-      <p:sp>
-        <p:nvSpPr>
-          <p:cNvPr id="20" name="ZoneTexte 19"/>
-          <p:cNvSpPr txBox="1"/>
-          <p:nvPr/>
-        </p:nvSpPr>
-        <p:spPr>
-          <a:xfrm>
-            <a:off x="7746335" y="2215375"/>
-            <a:ext cx="747130" cy="369332"/>
-          </a:xfrm>
-          <a:prstGeom prst="rect">
-            <a:avLst/>
-          </a:prstGeom>
-          <a:noFill/>
-        </p:spPr>
-        <p:txBody>
-          <a:bodyPr wrap="square" rtlCol="0">
-            <a:spAutoFit/>
-          </a:bodyPr>
-          <a:lstStyle/>
-          <a:p>
-            <a:r>
-              <a:rPr lang="fr-FR" dirty="0" smtClean="0">
-                <a:solidFill>
-                  <a:srgbClr val="FF0000"/>
-                </a:solidFill>
-              </a:rPr>
-              <a:t>A13</a:t>
-            </a:r>
-          </a:p>
-        </p:txBody>
-      </p:sp>
-      <p:sp>
-        <p:nvSpPr>
-          <p:cNvPr id="21" name="ZoneTexte 20"/>
-          <p:cNvSpPr txBox="1"/>
-          <p:nvPr/>
-        </p:nvSpPr>
-        <p:spPr>
-          <a:xfrm>
-            <a:off x="7746333" y="2516457"/>
-            <a:ext cx="747130" cy="369332"/>
-          </a:xfrm>
-          <a:prstGeom prst="rect">
-            <a:avLst/>
-          </a:prstGeom>
-          <a:noFill/>
-        </p:spPr>
-        <p:txBody>
-          <a:bodyPr wrap="square" rtlCol="0">
-            <a:spAutoFit/>
-          </a:bodyPr>
-          <a:lstStyle/>
-          <a:p>
-            <a:r>
-              <a:rPr lang="fr-FR" dirty="0" smtClean="0">
-                <a:solidFill>
-                  <a:srgbClr val="FF0000"/>
-                </a:solidFill>
-              </a:rPr>
-              <a:t>A14</a:t>
-            </a:r>
-          </a:p>
-        </p:txBody>
-      </p:sp>
-      <p:sp>
-        <p:nvSpPr>
-          <p:cNvPr id="22" name="ZoneTexte 21"/>
-          <p:cNvSpPr txBox="1"/>
-          <p:nvPr/>
-        </p:nvSpPr>
-        <p:spPr>
-          <a:xfrm>
-            <a:off x="7746335" y="2772935"/>
-            <a:ext cx="747130" cy="369332"/>
-          </a:xfrm>
-          <a:prstGeom prst="rect">
-            <a:avLst/>
-          </a:prstGeom>
-          <a:noFill/>
-        </p:spPr>
-        <p:txBody>
-          <a:bodyPr wrap="square" rtlCol="0">
-            <a:spAutoFit/>
-          </a:bodyPr>
-          <a:lstStyle/>
-          <a:p>
-            <a:r>
-              <a:rPr lang="fr-FR" dirty="0" smtClean="0">
-                <a:solidFill>
-                  <a:srgbClr val="FF0000"/>
-                </a:solidFill>
-              </a:rPr>
-              <a:t>A15</a:t>
-            </a:r>
-          </a:p>
-        </p:txBody>
-      </p:sp>
-      <p:sp>
-        <p:nvSpPr>
-          <p:cNvPr id="23" name="ZoneTexte 22"/>
-          <p:cNvSpPr txBox="1"/>
-          <p:nvPr/>
-        </p:nvSpPr>
-        <p:spPr>
-          <a:xfrm>
-            <a:off x="7731468" y="3047998"/>
-            <a:ext cx="747130" cy="369332"/>
-          </a:xfrm>
-          <a:prstGeom prst="rect">
-            <a:avLst/>
-          </a:prstGeom>
-          <a:noFill/>
-        </p:spPr>
-        <p:txBody>
-          <a:bodyPr wrap="square" rtlCol="0">
-            <a:spAutoFit/>
-          </a:bodyPr>
-          <a:lstStyle/>
-          <a:p>
-            <a:r>
-              <a:rPr lang="fr-FR" dirty="0" smtClean="0">
-                <a:solidFill>
-                  <a:srgbClr val="FF0000"/>
-                </a:solidFill>
-              </a:rPr>
-              <a:t>D49</a:t>
-            </a:r>
-          </a:p>
-        </p:txBody>
-      </p:sp>
-      <p:sp>
-        <p:nvSpPr>
-          <p:cNvPr id="24" name="ZoneTexte 23"/>
-          <p:cNvSpPr txBox="1"/>
-          <p:nvPr/>
-        </p:nvSpPr>
-        <p:spPr>
-          <a:xfrm>
-            <a:off x="3233814" y="925548"/>
-            <a:ext cx="669076" cy="369332"/>
-          </a:xfrm>
-          <a:prstGeom prst="rect">
-            <a:avLst/>
-          </a:prstGeom>
-          <a:noFill/>
-        </p:spPr>
-        <p:txBody>
-          <a:bodyPr wrap="square" rtlCol="0">
-            <a:spAutoFit/>
-          </a:bodyPr>
-          <a:lstStyle/>
-          <a:p>
-            <a:r>
-              <a:rPr lang="fr-FR" dirty="0" smtClean="0">
-                <a:solidFill>
-                  <a:srgbClr val="FF0000"/>
-                </a:solidFill>
-              </a:rPr>
-              <a:t>D48</a:t>
-            </a:r>
-          </a:p>
-        </p:txBody>
-      </p:sp>
-      <p:sp>
-        <p:nvSpPr>
-          <p:cNvPr id="25" name="ZoneTexte 24"/>
-          <p:cNvSpPr txBox="1"/>
-          <p:nvPr/>
-        </p:nvSpPr>
-        <p:spPr>
-          <a:xfrm>
-            <a:off x="3241248" y="620749"/>
-            <a:ext cx="669076" cy="369332"/>
-          </a:xfrm>
-          <a:prstGeom prst="rect">
-            <a:avLst/>
-          </a:prstGeom>
-          <a:noFill/>
-        </p:spPr>
-        <p:txBody>
-          <a:bodyPr wrap="square" rtlCol="0">
-            <a:spAutoFit/>
-          </a:bodyPr>
-          <a:lstStyle/>
-          <a:p>
-            <a:r>
-              <a:rPr lang="fr-FR" dirty="0" smtClean="0">
-                <a:solidFill>
-                  <a:srgbClr val="FF0000"/>
-                </a:solidFill>
-              </a:rPr>
-              <a:t>D47</a:t>
-            </a:r>
-          </a:p>
-        </p:txBody>
-      </p:sp>
-      <p:sp>
-        <p:nvSpPr>
-          <p:cNvPr id="26" name="ZoneTexte 25"/>
-          <p:cNvSpPr txBox="1"/>
-          <p:nvPr/>
-        </p:nvSpPr>
-        <p:spPr>
-          <a:xfrm>
-            <a:off x="7753771" y="572426"/>
-            <a:ext cx="669076" cy="369332"/>
-          </a:xfrm>
-          <a:prstGeom prst="rect">
-            <a:avLst/>
-          </a:prstGeom>
-          <a:noFill/>
-        </p:spPr>
-        <p:txBody>
-          <a:bodyPr wrap="square" rtlCol="0">
-            <a:spAutoFit/>
-          </a:bodyPr>
-          <a:lstStyle/>
-          <a:p>
-            <a:r>
-              <a:rPr lang="fr-FR" dirty="0" smtClean="0">
-                <a:solidFill>
-                  <a:srgbClr val="FF0000"/>
-                </a:solidFill>
-              </a:rPr>
-              <a:t>D46</a:t>
-            </a:r>
-          </a:p>
-        </p:txBody>
-      </p:sp>
-      <p:sp>
-        <p:nvSpPr>
-          <p:cNvPr id="27" name="ZoneTexte 26"/>
-          <p:cNvSpPr txBox="1"/>
-          <p:nvPr/>
-        </p:nvSpPr>
-        <p:spPr>
-          <a:xfrm>
-            <a:off x="7761206" y="301080"/>
-            <a:ext cx="669076" cy="369332"/>
-          </a:xfrm>
-          <a:prstGeom prst="rect">
-            <a:avLst/>
-          </a:prstGeom>
-          <a:noFill/>
-        </p:spPr>
-        <p:txBody>
-          <a:bodyPr wrap="square" rtlCol="0">
-            <a:spAutoFit/>
-          </a:bodyPr>
-          <a:lstStyle/>
-          <a:p>
-            <a:r>
-              <a:rPr lang="fr-FR" dirty="0" smtClean="0">
-                <a:solidFill>
-                  <a:srgbClr val="FF0000"/>
-                </a:solidFill>
-              </a:rPr>
-              <a:t>D45</a:t>
-            </a:r>
-          </a:p>
-        </p:txBody>
-      </p:sp>
-      <p:sp>
-        <p:nvSpPr>
-          <p:cNvPr id="28" name="ZoneTexte 27"/>
-          <p:cNvSpPr txBox="1"/>
-          <p:nvPr/>
-        </p:nvSpPr>
-        <p:spPr>
-          <a:xfrm>
-            <a:off x="7731472" y="3326778"/>
-            <a:ext cx="1055648" cy="369332"/>
-          </a:xfrm>
-          <a:prstGeom prst="rect">
-            <a:avLst/>
-          </a:prstGeom>
-          <a:noFill/>
-        </p:spPr>
-        <p:txBody>
-          <a:bodyPr wrap="square" rtlCol="0">
-            <a:spAutoFit/>
-          </a:bodyPr>
-          <a:lstStyle/>
-          <a:p>
-            <a:r>
-              <a:rPr lang="fr-FR" dirty="0" smtClean="0">
-                <a:solidFill>
-                  <a:srgbClr val="FF0000"/>
-                </a:solidFill>
-              </a:rPr>
-              <a:t>D6</a:t>
-            </a:r>
-          </a:p>
-        </p:txBody>
-      </p:sp>
-      <p:sp>
-        <p:nvSpPr>
-          <p:cNvPr id="29" name="ZoneTexte 28"/>
-          <p:cNvSpPr txBox="1"/>
-          <p:nvPr/>
-        </p:nvSpPr>
-        <p:spPr>
-          <a:xfrm>
-            <a:off x="3256117" y="323382"/>
-            <a:ext cx="557560" cy="369332"/>
-          </a:xfrm>
-          <a:prstGeom prst="rect">
-            <a:avLst/>
-          </a:prstGeom>
-          <a:noFill/>
-        </p:spPr>
-        <p:txBody>
-          <a:bodyPr wrap="square" rtlCol="0">
-            <a:spAutoFit/>
-          </a:bodyPr>
-          <a:lstStyle/>
-          <a:p>
-            <a:r>
-              <a:rPr lang="fr-FR" dirty="0" smtClean="0">
-                <a:solidFill>
-                  <a:srgbClr val="FF0000"/>
-                </a:solidFill>
-              </a:rPr>
-              <a:t>D7</a:t>
-            </a:r>
-          </a:p>
-        </p:txBody>
-      </p:sp>
-      <p:sp>
-        <p:nvSpPr>
-          <p:cNvPr id="30" name="ZoneTexte 29"/>
-          <p:cNvSpPr txBox="1"/>
-          <p:nvPr/>
-        </p:nvSpPr>
-        <p:spPr>
-          <a:xfrm>
-            <a:off x="3207796" y="3375100"/>
-            <a:ext cx="557560" cy="369332"/>
-          </a:xfrm>
-          <a:prstGeom prst="rect">
-            <a:avLst/>
-          </a:prstGeom>
-          <a:noFill/>
-        </p:spPr>
-        <p:txBody>
-          <a:bodyPr wrap="square" rtlCol="0">
-            <a:spAutoFit/>
-          </a:bodyPr>
-          <a:lstStyle/>
-          <a:p>
-            <a:r>
-              <a:rPr lang="fr-FR" dirty="0" smtClean="0">
-                <a:solidFill>
-                  <a:srgbClr val="FF0000"/>
-                </a:solidFill>
-              </a:rPr>
-              <a:t>D9</a:t>
-            </a:r>
-          </a:p>
-        </p:txBody>
-      </p:sp>
-      <p:sp>
-        <p:nvSpPr>
-          <p:cNvPr id="31" name="ZoneTexte 30"/>
-          <p:cNvSpPr txBox="1"/>
-          <p:nvPr/>
-        </p:nvSpPr>
-        <p:spPr>
-          <a:xfrm>
-            <a:off x="3215231" y="3917793"/>
-            <a:ext cx="557560" cy="369332"/>
-          </a:xfrm>
-          <a:prstGeom prst="rect">
-            <a:avLst/>
-          </a:prstGeom>
-          <a:noFill/>
-        </p:spPr>
-        <p:txBody>
-          <a:bodyPr wrap="square" rtlCol="0">
-            <a:spAutoFit/>
-          </a:bodyPr>
-          <a:lstStyle/>
-          <a:p>
-            <a:r>
-              <a:rPr lang="fr-FR" dirty="0" smtClean="0">
-                <a:solidFill>
-                  <a:srgbClr val="FF0000"/>
-                </a:solidFill>
-              </a:rPr>
-              <a:t>D16</a:t>
-            </a:r>
-          </a:p>
-        </p:txBody>
-      </p:sp>
-      <p:sp>
-        <p:nvSpPr>
-          <p:cNvPr id="32" name="ZoneTexte 31"/>
-          <p:cNvSpPr txBox="1"/>
-          <p:nvPr/>
-        </p:nvSpPr>
-        <p:spPr>
-          <a:xfrm>
-            <a:off x="3192929" y="3650164"/>
-            <a:ext cx="709958" cy="369332"/>
-          </a:xfrm>
-          <a:prstGeom prst="rect">
-            <a:avLst/>
-          </a:prstGeom>
-          <a:noFill/>
-        </p:spPr>
-        <p:txBody>
-          <a:bodyPr wrap="square" rtlCol="0">
-            <a:spAutoFit/>
-          </a:bodyPr>
-          <a:lstStyle/>
-          <a:p>
-            <a:r>
-              <a:rPr lang="fr-FR" dirty="0" smtClean="0">
-                <a:solidFill>
-                  <a:srgbClr val="FF0000"/>
-                </a:solidFill>
-              </a:rPr>
-              <a:t>GND</a:t>
-            </a:r>
-          </a:p>
-        </p:txBody>
-      </p:sp>
-      <p:sp>
-        <p:nvSpPr>
-          <p:cNvPr id="33" name="ZoneTexte 32"/>
-          <p:cNvSpPr txBox="1"/>
-          <p:nvPr/>
-        </p:nvSpPr>
-        <p:spPr>
-          <a:xfrm>
-            <a:off x="7727758" y="3590691"/>
-            <a:ext cx="709958" cy="369332"/>
-          </a:xfrm>
-          <a:prstGeom prst="rect">
-            <a:avLst/>
-          </a:prstGeom>
-          <a:noFill/>
-        </p:spPr>
-        <p:txBody>
-          <a:bodyPr wrap="square" rtlCol="0">
-            <a:spAutoFit/>
-          </a:bodyPr>
-          <a:lstStyle/>
-          <a:p>
-            <a:r>
-              <a:rPr lang="fr-FR" dirty="0" smtClean="0">
-                <a:solidFill>
-                  <a:srgbClr val="FF0000"/>
-                </a:solidFill>
-              </a:rPr>
-              <a:t>GND</a:t>
-            </a:r>
-          </a:p>
-        </p:txBody>
-      </p:sp>
-      <p:sp>
-        <p:nvSpPr>
-          <p:cNvPr id="34" name="ZoneTexte 33"/>
-          <p:cNvSpPr txBox="1"/>
-          <p:nvPr/>
-        </p:nvSpPr>
-        <p:spPr>
-          <a:xfrm>
-            <a:off x="7761212" y="3880622"/>
-            <a:ext cx="709958" cy="369332"/>
-          </a:xfrm>
-          <a:prstGeom prst="rect">
-            <a:avLst/>
-          </a:prstGeom>
-          <a:noFill/>
-        </p:spPr>
-        <p:txBody>
-          <a:bodyPr wrap="square" rtlCol="0">
-            <a:spAutoFit/>
-          </a:bodyPr>
-          <a:lstStyle/>
-          <a:p>
-            <a:r>
-              <a:rPr lang="fr-FR" dirty="0" smtClean="0">
-                <a:solidFill>
-                  <a:srgbClr val="FF0000"/>
-                </a:solidFill>
-              </a:rPr>
-              <a:t>D29</a:t>
-            </a:r>
-          </a:p>
-        </p:txBody>
-      </p:sp>
-      <p:sp>
-        <p:nvSpPr>
-          <p:cNvPr id="35" name="ZoneTexte 34"/>
-          <p:cNvSpPr txBox="1"/>
-          <p:nvPr/>
-        </p:nvSpPr>
-        <p:spPr>
-          <a:xfrm>
-            <a:off x="7768646" y="4401013"/>
-            <a:ext cx="709958" cy="369332"/>
-          </a:xfrm>
-          <a:prstGeom prst="rect">
-            <a:avLst/>
-          </a:prstGeom>
-          <a:noFill/>
-        </p:spPr>
-        <p:txBody>
-          <a:bodyPr wrap="square" rtlCol="0">
-            <a:spAutoFit/>
-          </a:bodyPr>
-          <a:lstStyle/>
-          <a:p>
-            <a:r>
-              <a:rPr lang="fr-FR" dirty="0" smtClean="0">
-                <a:solidFill>
-                  <a:srgbClr val="FF0000"/>
-                </a:solidFill>
-              </a:rPr>
-              <a:t>D28</a:t>
-            </a:r>
-          </a:p>
-        </p:txBody>
-      </p:sp>
-      <p:sp>
-        <p:nvSpPr>
-          <p:cNvPr id="36" name="ZoneTexte 35"/>
-          <p:cNvSpPr txBox="1"/>
-          <p:nvPr/>
-        </p:nvSpPr>
-        <p:spPr>
-          <a:xfrm>
-            <a:off x="7779800" y="4947422"/>
-            <a:ext cx="709958" cy="369332"/>
-          </a:xfrm>
-          <a:prstGeom prst="rect">
-            <a:avLst/>
-          </a:prstGeom>
-          <a:noFill/>
-        </p:spPr>
-        <p:txBody>
-          <a:bodyPr wrap="square" rtlCol="0">
-            <a:spAutoFit/>
-          </a:bodyPr>
-          <a:lstStyle/>
-          <a:p>
-            <a:r>
-              <a:rPr lang="fr-FR" dirty="0" smtClean="0">
-                <a:solidFill>
-                  <a:srgbClr val="FF0000"/>
-                </a:solidFill>
-              </a:rPr>
-              <a:t>D27</a:t>
-            </a:r>
-          </a:p>
-        </p:txBody>
-      </p:sp>
-      <p:sp>
-        <p:nvSpPr>
-          <p:cNvPr id="37" name="ZoneTexte 36"/>
-          <p:cNvSpPr txBox="1"/>
-          <p:nvPr/>
-        </p:nvSpPr>
-        <p:spPr>
-          <a:xfrm>
-            <a:off x="7776084" y="5545871"/>
-            <a:ext cx="709958" cy="369332"/>
-          </a:xfrm>
-          <a:prstGeom prst="rect">
-            <a:avLst/>
-          </a:prstGeom>
-          <a:noFill/>
-        </p:spPr>
-        <p:txBody>
-          <a:bodyPr wrap="square" rtlCol="0">
-            <a:spAutoFit/>
-          </a:bodyPr>
-          <a:lstStyle/>
-          <a:p>
-            <a:r>
-              <a:rPr lang="fr-FR" dirty="0" smtClean="0">
-                <a:solidFill>
-                  <a:srgbClr val="FF0000"/>
-                </a:solidFill>
-              </a:rPr>
-              <a:t>D26</a:t>
-            </a:r>
-          </a:p>
-        </p:txBody>
-      </p:sp>
-      <p:sp>
-        <p:nvSpPr>
-          <p:cNvPr id="38" name="ZoneTexte 37"/>
-          <p:cNvSpPr txBox="1"/>
-          <p:nvPr/>
-        </p:nvSpPr>
-        <p:spPr>
-          <a:xfrm>
-            <a:off x="3226383" y="6114583"/>
-            <a:ext cx="709958" cy="369332"/>
-          </a:xfrm>
-          <a:prstGeom prst="rect">
-            <a:avLst/>
-          </a:prstGeom>
-          <a:noFill/>
-        </p:spPr>
-        <p:txBody>
-          <a:bodyPr wrap="square" rtlCol="0">
-            <a:spAutoFit/>
-          </a:bodyPr>
-          <a:lstStyle/>
-          <a:p>
-            <a:r>
-              <a:rPr lang="fr-FR" dirty="0" smtClean="0">
-                <a:solidFill>
-                  <a:srgbClr val="FF0000"/>
-                </a:solidFill>
-              </a:rPr>
-              <a:t>D25</a:t>
-            </a:r>
-          </a:p>
-        </p:txBody>
-      </p:sp>
-      <p:sp>
-        <p:nvSpPr>
-          <p:cNvPr id="39" name="ZoneTexte 38"/>
-          <p:cNvSpPr txBox="1"/>
-          <p:nvPr/>
-        </p:nvSpPr>
-        <p:spPr>
-          <a:xfrm>
-            <a:off x="3233818" y="5564456"/>
-            <a:ext cx="709958" cy="369332"/>
-          </a:xfrm>
-          <a:prstGeom prst="rect">
-            <a:avLst/>
-          </a:prstGeom>
-          <a:noFill/>
-        </p:spPr>
-        <p:txBody>
-          <a:bodyPr wrap="square" rtlCol="0">
-            <a:spAutoFit/>
-          </a:bodyPr>
-          <a:lstStyle/>
-          <a:p>
-            <a:r>
-              <a:rPr lang="fr-FR" dirty="0" smtClean="0">
-                <a:solidFill>
-                  <a:srgbClr val="FF0000"/>
-                </a:solidFill>
-              </a:rPr>
-              <a:t>D24</a:t>
-            </a:r>
-          </a:p>
-        </p:txBody>
-      </p:sp>
-      <p:sp>
-        <p:nvSpPr>
-          <p:cNvPr id="40" name="ZoneTexte 39"/>
-          <p:cNvSpPr txBox="1"/>
-          <p:nvPr/>
-        </p:nvSpPr>
-        <p:spPr>
-          <a:xfrm>
-            <a:off x="3244969" y="5040348"/>
-            <a:ext cx="709958" cy="369332"/>
-          </a:xfrm>
-          <a:prstGeom prst="rect">
-            <a:avLst/>
-          </a:prstGeom>
-          <a:noFill/>
-        </p:spPr>
-        <p:txBody>
-          <a:bodyPr wrap="square" rtlCol="0">
-            <a:spAutoFit/>
-          </a:bodyPr>
-          <a:lstStyle/>
-          <a:p>
-            <a:r>
-              <a:rPr lang="fr-FR" dirty="0" smtClean="0">
-                <a:solidFill>
-                  <a:srgbClr val="FF0000"/>
-                </a:solidFill>
-              </a:rPr>
-              <a:t>D23</a:t>
-            </a:r>
-          </a:p>
-        </p:txBody>
-      </p:sp>
-      <p:sp>
-        <p:nvSpPr>
-          <p:cNvPr id="41" name="ZoneTexte 40"/>
-          <p:cNvSpPr txBox="1"/>
-          <p:nvPr/>
-        </p:nvSpPr>
-        <p:spPr>
-          <a:xfrm>
-            <a:off x="3237535" y="4508805"/>
-            <a:ext cx="709958" cy="369332"/>
-          </a:xfrm>
-          <a:prstGeom prst="rect">
-            <a:avLst/>
-          </a:prstGeom>
-          <a:noFill/>
-        </p:spPr>
-        <p:txBody>
-          <a:bodyPr wrap="square" rtlCol="0">
-            <a:spAutoFit/>
-          </a:bodyPr>
-          <a:lstStyle/>
-          <a:p>
-            <a:r>
-              <a:rPr lang="fr-FR" dirty="0" smtClean="0">
-                <a:solidFill>
-                  <a:srgbClr val="FF0000"/>
-                </a:solidFill>
-              </a:rPr>
-              <a:t>D22</a:t>
-            </a:r>
-          </a:p>
-        </p:txBody>
-      </p:sp>
-      <p:sp>
-        <p:nvSpPr>
-          <p:cNvPr id="42" name="ZoneTexte 41"/>
-          <p:cNvSpPr txBox="1"/>
-          <p:nvPr/>
-        </p:nvSpPr>
-        <p:spPr>
-          <a:xfrm>
-            <a:off x="7753779" y="4163121"/>
-            <a:ext cx="709958" cy="369332"/>
-          </a:xfrm>
-          <a:prstGeom prst="rect">
-            <a:avLst/>
-          </a:prstGeom>
-          <a:noFill/>
-        </p:spPr>
-        <p:txBody>
-          <a:bodyPr wrap="square" rtlCol="0">
-            <a:spAutoFit/>
-          </a:bodyPr>
-          <a:lstStyle/>
-          <a:p>
-            <a:r>
-              <a:rPr lang="fr-FR" dirty="0" smtClean="0">
-                <a:solidFill>
-                  <a:srgbClr val="FF0000"/>
-                </a:solidFill>
-              </a:rPr>
-              <a:t>D30</a:t>
-            </a:r>
-          </a:p>
-        </p:txBody>
-      </p:sp>
-      <p:sp>
-        <p:nvSpPr>
-          <p:cNvPr id="43" name="ZoneTexte 42"/>
-          <p:cNvSpPr txBox="1"/>
-          <p:nvPr/>
-        </p:nvSpPr>
-        <p:spPr>
-          <a:xfrm>
-            <a:off x="7772365" y="4672359"/>
-            <a:ext cx="709958" cy="369332"/>
-          </a:xfrm>
-          <a:prstGeom prst="rect">
-            <a:avLst/>
-          </a:prstGeom>
-          <a:noFill/>
-        </p:spPr>
-        <p:txBody>
-          <a:bodyPr wrap="square" rtlCol="0">
-            <a:spAutoFit/>
-          </a:bodyPr>
-          <a:lstStyle/>
-          <a:p>
-            <a:r>
-              <a:rPr lang="fr-FR" dirty="0" smtClean="0">
-                <a:solidFill>
-                  <a:srgbClr val="FF0000"/>
-                </a:solidFill>
-              </a:rPr>
-              <a:t>D31</a:t>
-            </a:r>
-          </a:p>
-        </p:txBody>
-      </p:sp>
-      <p:sp>
-        <p:nvSpPr>
-          <p:cNvPr id="44" name="ZoneTexte 43"/>
-          <p:cNvSpPr txBox="1"/>
-          <p:nvPr/>
-        </p:nvSpPr>
-        <p:spPr>
-          <a:xfrm>
-            <a:off x="7772366" y="5263374"/>
-            <a:ext cx="709958" cy="369332"/>
-          </a:xfrm>
-          <a:prstGeom prst="rect">
-            <a:avLst/>
-          </a:prstGeom>
-          <a:noFill/>
-        </p:spPr>
-        <p:txBody>
-          <a:bodyPr wrap="square" rtlCol="0">
-            <a:spAutoFit/>
-          </a:bodyPr>
-          <a:lstStyle/>
-          <a:p>
-            <a:r>
-              <a:rPr lang="fr-FR" dirty="0" smtClean="0">
-                <a:solidFill>
-                  <a:srgbClr val="FF0000"/>
-                </a:solidFill>
-              </a:rPr>
-              <a:t>D32</a:t>
-            </a:r>
-          </a:p>
-        </p:txBody>
-      </p:sp>
-      <p:sp>
-        <p:nvSpPr>
-          <p:cNvPr id="45" name="ZoneTexte 44"/>
-          <p:cNvSpPr txBox="1"/>
-          <p:nvPr/>
-        </p:nvSpPr>
-        <p:spPr>
-          <a:xfrm>
-            <a:off x="7779801" y="5817218"/>
-            <a:ext cx="709958" cy="369332"/>
-          </a:xfrm>
-          <a:prstGeom prst="rect">
-            <a:avLst/>
-          </a:prstGeom>
-          <a:noFill/>
-        </p:spPr>
-        <p:txBody>
-          <a:bodyPr wrap="square" rtlCol="0">
-            <a:spAutoFit/>
-          </a:bodyPr>
-          <a:lstStyle/>
-          <a:p>
-            <a:r>
-              <a:rPr lang="fr-FR" dirty="0" smtClean="0">
-                <a:solidFill>
-                  <a:srgbClr val="FF0000"/>
-                </a:solidFill>
-              </a:rPr>
-              <a:t>D33</a:t>
-            </a:r>
-          </a:p>
-        </p:txBody>
-      </p:sp>
-      <p:sp>
-        <p:nvSpPr>
-          <p:cNvPr id="46" name="ZoneTexte 45"/>
-          <p:cNvSpPr txBox="1"/>
-          <p:nvPr/>
-        </p:nvSpPr>
-        <p:spPr>
-          <a:xfrm>
-            <a:off x="3226386" y="5846955"/>
-            <a:ext cx="709958" cy="369332"/>
-          </a:xfrm>
-          <a:prstGeom prst="rect">
-            <a:avLst/>
-          </a:prstGeom>
-          <a:noFill/>
-        </p:spPr>
-        <p:txBody>
-          <a:bodyPr wrap="square" rtlCol="0">
-            <a:spAutoFit/>
-          </a:bodyPr>
-          <a:lstStyle/>
-          <a:p>
-            <a:r>
-              <a:rPr lang="fr-FR" dirty="0" smtClean="0">
-                <a:solidFill>
-                  <a:srgbClr val="FF0000"/>
-                </a:solidFill>
-              </a:rPr>
-              <a:t>D34</a:t>
-            </a:r>
-          </a:p>
-        </p:txBody>
-      </p:sp>
-      <p:sp>
-        <p:nvSpPr>
-          <p:cNvPr id="47" name="ZoneTexte 46"/>
-          <p:cNvSpPr txBox="1"/>
-          <p:nvPr/>
-        </p:nvSpPr>
-        <p:spPr>
-          <a:xfrm>
-            <a:off x="3244971" y="5296829"/>
-            <a:ext cx="709958" cy="369332"/>
-          </a:xfrm>
-          <a:prstGeom prst="rect">
-            <a:avLst/>
-          </a:prstGeom>
-          <a:noFill/>
-        </p:spPr>
-        <p:txBody>
-          <a:bodyPr wrap="square" rtlCol="0">
-            <a:spAutoFit/>
-          </a:bodyPr>
-          <a:lstStyle/>
-          <a:p>
-            <a:r>
-              <a:rPr lang="fr-FR" dirty="0" smtClean="0">
-                <a:solidFill>
-                  <a:srgbClr val="FF0000"/>
-                </a:solidFill>
-              </a:rPr>
-              <a:t>D35</a:t>
-            </a:r>
-          </a:p>
-        </p:txBody>
-      </p:sp>
-      <p:sp>
-        <p:nvSpPr>
-          <p:cNvPr id="48" name="ZoneTexte 47"/>
-          <p:cNvSpPr txBox="1"/>
-          <p:nvPr/>
-        </p:nvSpPr>
-        <p:spPr>
-          <a:xfrm>
-            <a:off x="3244971" y="4772721"/>
-            <a:ext cx="709958" cy="369332"/>
-          </a:xfrm>
-          <a:prstGeom prst="rect">
-            <a:avLst/>
-          </a:prstGeom>
-          <a:noFill/>
-        </p:spPr>
-        <p:txBody>
-          <a:bodyPr wrap="square" rtlCol="0">
-            <a:spAutoFit/>
-          </a:bodyPr>
-          <a:lstStyle/>
-          <a:p>
-            <a:r>
-              <a:rPr lang="fr-FR" dirty="0" smtClean="0">
-                <a:solidFill>
-                  <a:srgbClr val="FF0000"/>
-                </a:solidFill>
-              </a:rPr>
-              <a:t>D36</a:t>
-            </a:r>
-          </a:p>
-        </p:txBody>
-      </p:sp>
-      <p:sp>
-        <p:nvSpPr>
-          <p:cNvPr id="49" name="ZoneTexte 48"/>
-          <p:cNvSpPr txBox="1"/>
-          <p:nvPr/>
-        </p:nvSpPr>
-        <p:spPr>
-          <a:xfrm>
-            <a:off x="3244972" y="4226312"/>
-            <a:ext cx="709958" cy="369332"/>
-          </a:xfrm>
-          <a:prstGeom prst="rect">
-            <a:avLst/>
-          </a:prstGeom>
-          <a:noFill/>
-        </p:spPr>
-        <p:txBody>
-          <a:bodyPr wrap="square" rtlCol="0">
-            <a:spAutoFit/>
-          </a:bodyPr>
-          <a:lstStyle/>
-          <a:p>
-            <a:r>
-              <a:rPr lang="fr-FR" dirty="0" smtClean="0">
-                <a:solidFill>
-                  <a:srgbClr val="FF0000"/>
-                </a:solidFill>
-              </a:rPr>
-              <a:t>D37</a:t>
-            </a:r>
-          </a:p>
-        </p:txBody>
-      </p:sp>
-      <p:sp>
-        <p:nvSpPr>
-          <p:cNvPr id="50" name="ZoneTexte 49"/>
-          <p:cNvSpPr txBox="1"/>
-          <p:nvPr/>
-        </p:nvSpPr>
-        <p:spPr>
-          <a:xfrm>
-            <a:off x="7783513" y="6088565"/>
-            <a:ext cx="709958" cy="369332"/>
-          </a:xfrm>
-          <a:prstGeom prst="rect">
-            <a:avLst/>
-          </a:prstGeom>
-          <a:noFill/>
-        </p:spPr>
-        <p:txBody>
-          <a:bodyPr wrap="square" rtlCol="0">
-            <a:spAutoFit/>
-          </a:bodyPr>
-          <a:lstStyle/>
-          <a:p>
-            <a:r>
-              <a:rPr lang="fr-FR" dirty="0" smtClean="0">
-                <a:solidFill>
-                  <a:srgbClr val="FF0000"/>
-                </a:solidFill>
-              </a:rPr>
-              <a:t>VCC</a:t>
-            </a:r>
-          </a:p>
-        </p:txBody>
-      </p:sp>
-      <p:sp>
-        <p:nvSpPr>
-          <p:cNvPr id="51" name="Rectangle 50"/>
-          <p:cNvSpPr/>
-          <p:nvPr/>
-        </p:nvSpPr>
-        <p:spPr>
-          <a:xfrm rot="16200000">
-            <a:off x="1988282" y="4482119"/>
-            <a:ext cx="2120645" cy="461665"/>
-          </a:xfrm>
-          <a:prstGeom prst="rect">
-            <a:avLst/>
-          </a:prstGeom>
-        </p:spPr>
-        <p:txBody>
-          <a:bodyPr wrap="none">
-            <a:spAutoFit/>
-          </a:bodyPr>
-          <a:lstStyle/>
-          <a:p>
-            <a:r>
-              <a:rPr lang="fr-FR" sz="2400" b="1" dirty="0" smtClean="0">
-                <a:solidFill>
-                  <a:srgbClr val="FF0000"/>
-                </a:solidFill>
-              </a:rPr>
-              <a:t>Mega2560 Pins</a:t>
-            </a:r>
-            <a:endParaRPr lang="fr-FR" sz="2400" dirty="0">
-              <a:solidFill>
-                <a:srgbClr val="FF0000"/>
-              </a:solidFill>
-            </a:endParaRPr>
-          </a:p>
-        </p:txBody>
-      </p:sp>
-      <p:sp>
-        <p:nvSpPr>
-          <p:cNvPr id="52" name="Rectangle 51"/>
-          <p:cNvSpPr/>
-          <p:nvPr/>
-        </p:nvSpPr>
-        <p:spPr>
-          <a:xfrm rot="5400000">
-            <a:off x="7415209" y="1935923"/>
-            <a:ext cx="2120645" cy="461665"/>
-          </a:xfrm>
-          <a:prstGeom prst="rect">
-            <a:avLst/>
-          </a:prstGeom>
-        </p:spPr>
-        <p:txBody>
-          <a:bodyPr wrap="none">
-            <a:spAutoFit/>
-          </a:bodyPr>
-          <a:lstStyle/>
-          <a:p>
-            <a:r>
-              <a:rPr lang="fr-FR" sz="2400" b="1" dirty="0" smtClean="0">
-                <a:solidFill>
-                  <a:srgbClr val="FF0000"/>
-                </a:solidFill>
-              </a:rPr>
-              <a:t>Mega2560 Pins</a:t>
-            </a:r>
-            <a:endParaRPr lang="fr-FR" sz="2400" dirty="0">
-              <a:solidFill>
-                <a:srgbClr val="FF0000"/>
-              </a:solidFill>
-            </a:endParaRPr>
-          </a:p>
-        </p:txBody>
-      </p:sp>
-    </p:spTree>
-  </p:cSld>
-  <p:clrMapOvr>
-    <a:masterClrMapping/>
-  </p:clrMapOvr>
-  <p:timing>
-    <p:tnLst>
-      <p:par>
-        <p:cTn id="1" dur="indefinite" restart="never" nodeType="tmRoot"/>
-      </p:par>
-    </p:tnLst>
-  </p:timing>
-</p:sld>
-</file>
-
-<file path=ppt/slides/slide11.xml><?xml version="1.0" encoding="utf-8"?>
-<p:sld xmlns:a="http://schemas.openxmlformats.org/drawingml/2006/main" xmlns:r="http://schemas.openxmlformats.org/officeDocument/2006/relationships" xmlns:p="http://schemas.openxmlformats.org/presentationml/2006/main">
-  <p:cSld>
-    <p:spTree>
-      <p:nvGrpSpPr>
-        <p:cNvPr id="1" name=""/>
-        <p:cNvGrpSpPr/>
-        <p:nvPr/>
-      </p:nvGrpSpPr>
-      <p:grpSpPr>
-        <a:xfrm>
-          <a:off x="0" y="0"/>
-          <a:ext cx="0" cy="0"/>
-          <a:chOff x="0" y="0"/>
-          <a:chExt cx="0" cy="0"/>
-        </a:xfrm>
-      </p:grpSpPr>
-      <p:pic>
-        <p:nvPicPr>
-          <p:cNvPr id="1026" name="Picture 2"/>
-          <p:cNvPicPr>
-            <a:picLocks noChangeAspect="1" noChangeArrowheads="1"/>
-          </p:cNvPicPr>
-          <p:nvPr/>
-        </p:nvPicPr>
-        <p:blipFill>
-          <a:blip r:embed="rId2" cstate="print"/>
-          <a:srcRect/>
-          <a:stretch>
-            <a:fillRect/>
-          </a:stretch>
-        </p:blipFill>
-        <p:spPr bwMode="auto">
-          <a:xfrm>
-            <a:off x="3930687" y="227207"/>
-            <a:ext cx="3812704" cy="6452374"/>
-          </a:xfrm>
-          <a:prstGeom prst="rect">
-            <a:avLst/>
-          </a:prstGeom>
-          <a:noFill/>
-          <a:ln w="9525">
-            <a:noFill/>
-            <a:miter lim="800000"/>
-            <a:headEnd/>
-            <a:tailEnd/>
-          </a:ln>
-          <a:effectLst/>
-        </p:spPr>
-      </p:pic>
-      <p:sp>
-        <p:nvSpPr>
-          <p:cNvPr id="2" name="Rectangle 1"/>
-          <p:cNvSpPr/>
-          <p:nvPr/>
-        </p:nvSpPr>
-        <p:spPr>
-          <a:xfrm rot="16200000">
-            <a:off x="3795715" y="3100388"/>
-            <a:ext cx="3705225" cy="628650"/>
-          </a:xfrm>
-          <a:prstGeom prst="rect">
-            <a:avLst/>
-          </a:prstGeom>
-          <a:solidFill>
-            <a:schemeClr val="bg1"/>
-          </a:solidFill>
-          <a:ln>
-            <a:solidFill>
-              <a:schemeClr val="bg1"/>
-            </a:solidFill>
-          </a:ln>
-        </p:spPr>
-        <p:style>
-          <a:lnRef idx="2">
-            <a:schemeClr val="accent1">
-              <a:shade val="50000"/>
-            </a:schemeClr>
-          </a:lnRef>
-          <a:fillRef idx="1">
-            <a:schemeClr val="accent1"/>
-          </a:fillRef>
-          <a:effectRef idx="0">
-            <a:schemeClr val="accent1"/>
-          </a:effectRef>
-          <a:fontRef idx="minor">
-            <a:schemeClr val="lt1"/>
-          </a:fontRef>
-        </p:style>
-        <p:txBody>
-          <a:bodyPr rtlCol="0" anchor="ctr"/>
-          <a:lstStyle/>
-          <a:p>
-            <a:pPr algn="ctr"/>
-            <a:r>
-              <a:rPr lang="fr-FR" sz="3600" dirty="0" smtClean="0">
-                <a:solidFill>
-                  <a:schemeClr val="tx1"/>
-                </a:solidFill>
-              </a:rPr>
-              <a:t>TSOP 44 adapter</a:t>
-            </a:r>
-            <a:endParaRPr lang="fr-FR" sz="3600" dirty="0">
-              <a:solidFill>
-                <a:schemeClr val="tx1"/>
-              </a:solidFill>
-            </a:endParaRPr>
-          </a:p>
-        </p:txBody>
-      </p:sp>
-      <p:sp>
-        <p:nvSpPr>
-          <p:cNvPr id="53" name="Rectangle 52"/>
-          <p:cNvSpPr/>
-          <p:nvPr/>
-        </p:nvSpPr>
-        <p:spPr>
-          <a:xfrm rot="16200000">
-            <a:off x="1143000" y="3143250"/>
-            <a:ext cx="6134100" cy="571500"/>
-          </a:xfrm>
-          <a:prstGeom prst="rect">
-            <a:avLst/>
-          </a:prstGeom>
-          <a:solidFill>
-            <a:schemeClr val="bg1"/>
-          </a:solidFill>
-          <a:ln>
-            <a:solidFill>
-              <a:schemeClr val="bg1"/>
-            </a:solidFill>
-          </a:ln>
-        </p:spPr>
-        <p:style>
-          <a:lnRef idx="2">
-            <a:schemeClr val="accent1">
-              <a:shade val="50000"/>
-            </a:schemeClr>
-          </a:lnRef>
-          <a:fillRef idx="1">
-            <a:schemeClr val="accent1"/>
-          </a:fillRef>
-          <a:effectRef idx="0">
-            <a:schemeClr val="accent1"/>
-          </a:effectRef>
-          <a:fontRef idx="minor">
-            <a:schemeClr val="lt1"/>
-          </a:fontRef>
-        </p:style>
-        <p:txBody>
-          <a:bodyPr rtlCol="0" anchor="ctr"/>
-          <a:lstStyle/>
-          <a:p>
-            <a:pPr algn="ctr"/>
-            <a:endParaRPr lang="fr-FR" sz="3600" dirty="0">
-              <a:solidFill>
-                <a:schemeClr val="tx1"/>
-              </a:solidFill>
-            </a:endParaRPr>
-          </a:p>
-        </p:txBody>
-      </p:sp>
-      <p:sp>
-        <p:nvSpPr>
-          <p:cNvPr id="54" name="Rectangle 53"/>
-          <p:cNvSpPr/>
-          <p:nvPr/>
-        </p:nvSpPr>
-        <p:spPr>
-          <a:xfrm rot="16200000">
-            <a:off x="4210050" y="3048000"/>
-            <a:ext cx="6134100" cy="762000"/>
-          </a:xfrm>
-          <a:prstGeom prst="rect">
-            <a:avLst/>
-          </a:prstGeom>
-          <a:solidFill>
-            <a:schemeClr val="bg1"/>
-          </a:solidFill>
-          <a:ln>
-            <a:solidFill>
-              <a:schemeClr val="bg1"/>
-            </a:solidFill>
-          </a:ln>
-        </p:spPr>
-        <p:style>
-          <a:lnRef idx="2">
-            <a:schemeClr val="accent1">
-              <a:shade val="50000"/>
-            </a:schemeClr>
-          </a:lnRef>
-          <a:fillRef idx="1">
-            <a:schemeClr val="accent1"/>
-          </a:fillRef>
-          <a:effectRef idx="0">
-            <a:schemeClr val="accent1"/>
-          </a:effectRef>
-          <a:fontRef idx="minor">
-            <a:schemeClr val="lt1"/>
-          </a:fontRef>
-        </p:style>
-        <p:txBody>
-          <a:bodyPr rtlCol="0" anchor="ctr"/>
-          <a:lstStyle/>
-          <a:p>
-            <a:pPr algn="ctr"/>
-            <a:endParaRPr lang="fr-FR" sz="3600" dirty="0">
-              <a:solidFill>
-                <a:schemeClr val="tx1"/>
-              </a:solidFill>
-            </a:endParaRPr>
-          </a:p>
-        </p:txBody>
-      </p:sp>
-      <p:sp>
-        <p:nvSpPr>
-          <p:cNvPr id="14" name="ZoneTexte 13"/>
-          <p:cNvSpPr txBox="1"/>
-          <p:nvPr/>
-        </p:nvSpPr>
-        <p:spPr>
-          <a:xfrm>
-            <a:off x="6879094" y="868632"/>
-            <a:ext cx="546410" cy="369332"/>
-          </a:xfrm>
-          <a:prstGeom prst="rect">
-            <a:avLst/>
-          </a:prstGeom>
-          <a:noFill/>
-        </p:spPr>
-        <p:txBody>
-          <a:bodyPr wrap="square" rtlCol="0">
-            <a:spAutoFit/>
-          </a:bodyPr>
-          <a:lstStyle/>
-          <a:p>
-            <a:r>
-              <a:rPr lang="fr-FR" dirty="0" smtClean="0">
-                <a:solidFill>
-                  <a:srgbClr val="FF0000"/>
-                </a:solidFill>
-              </a:rPr>
-              <a:t>A8</a:t>
-            </a:r>
-            <a:endParaRPr lang="fr-FR" dirty="0">
-              <a:solidFill>
-                <a:srgbClr val="FF0000"/>
-              </a:solidFill>
-            </a:endParaRPr>
-          </a:p>
-        </p:txBody>
-      </p:sp>
-      <p:sp>
-        <p:nvSpPr>
-          <p:cNvPr id="16" name="ZoneTexte 15"/>
-          <p:cNvSpPr txBox="1"/>
-          <p:nvPr/>
-        </p:nvSpPr>
-        <p:spPr>
-          <a:xfrm>
-            <a:off x="6886531" y="1143697"/>
-            <a:ext cx="546410" cy="369332"/>
-          </a:xfrm>
-          <a:prstGeom prst="rect">
-            <a:avLst/>
-          </a:prstGeom>
-          <a:noFill/>
-        </p:spPr>
-        <p:txBody>
-          <a:bodyPr wrap="square" rtlCol="0">
-            <a:spAutoFit/>
-          </a:bodyPr>
-          <a:lstStyle/>
-          <a:p>
-            <a:r>
-              <a:rPr lang="fr-FR" dirty="0" smtClean="0">
-                <a:solidFill>
-                  <a:srgbClr val="FF0000"/>
-                </a:solidFill>
-              </a:rPr>
-              <a:t>A9</a:t>
-            </a:r>
-            <a:endParaRPr lang="fr-FR" dirty="0">
-              <a:solidFill>
-                <a:srgbClr val="FF0000"/>
-              </a:solidFill>
-            </a:endParaRPr>
-          </a:p>
-        </p:txBody>
-      </p:sp>
-      <p:sp>
-        <p:nvSpPr>
-          <p:cNvPr id="17" name="ZoneTexte 16"/>
-          <p:cNvSpPr txBox="1"/>
-          <p:nvPr/>
-        </p:nvSpPr>
-        <p:spPr>
-          <a:xfrm>
-            <a:off x="6875378" y="1422477"/>
-            <a:ext cx="747130" cy="369332"/>
-          </a:xfrm>
-          <a:prstGeom prst="rect">
-            <a:avLst/>
-          </a:prstGeom>
-          <a:noFill/>
-        </p:spPr>
-        <p:txBody>
-          <a:bodyPr wrap="square" rtlCol="0">
-            <a:spAutoFit/>
-          </a:bodyPr>
-          <a:lstStyle/>
-          <a:p>
-            <a:r>
-              <a:rPr lang="fr-FR" dirty="0" smtClean="0">
-                <a:solidFill>
-                  <a:srgbClr val="FF0000"/>
-                </a:solidFill>
-              </a:rPr>
-              <a:t>A10</a:t>
-            </a:r>
-          </a:p>
-        </p:txBody>
-      </p:sp>
-      <p:sp>
-        <p:nvSpPr>
-          <p:cNvPr id="18" name="ZoneTexte 17"/>
-          <p:cNvSpPr txBox="1"/>
-          <p:nvPr/>
-        </p:nvSpPr>
-        <p:spPr>
-          <a:xfrm>
-            <a:off x="6871660" y="1708690"/>
-            <a:ext cx="747130" cy="369332"/>
-          </a:xfrm>
-          <a:prstGeom prst="rect">
-            <a:avLst/>
-          </a:prstGeom>
-          <a:noFill/>
-        </p:spPr>
-        <p:txBody>
-          <a:bodyPr wrap="square" rtlCol="0">
-            <a:spAutoFit/>
-          </a:bodyPr>
-          <a:lstStyle/>
-          <a:p>
-            <a:r>
-              <a:rPr lang="fr-FR" dirty="0" smtClean="0">
-                <a:solidFill>
-                  <a:srgbClr val="FF0000"/>
-                </a:solidFill>
-              </a:rPr>
-              <a:t>A11</a:t>
-            </a:r>
-          </a:p>
-        </p:txBody>
-      </p:sp>
-      <p:sp>
-        <p:nvSpPr>
-          <p:cNvPr id="19" name="ZoneTexte 18"/>
-          <p:cNvSpPr txBox="1"/>
-          <p:nvPr/>
-        </p:nvSpPr>
-        <p:spPr>
-          <a:xfrm>
-            <a:off x="6871661" y="1987470"/>
-            <a:ext cx="747130" cy="369332"/>
-          </a:xfrm>
-          <a:prstGeom prst="rect">
-            <a:avLst/>
-          </a:prstGeom>
-          <a:noFill/>
-        </p:spPr>
-        <p:txBody>
-          <a:bodyPr wrap="square" rtlCol="0">
-            <a:spAutoFit/>
-          </a:bodyPr>
-          <a:lstStyle/>
-          <a:p>
-            <a:r>
-              <a:rPr lang="fr-FR" dirty="0" smtClean="0">
-                <a:solidFill>
-                  <a:srgbClr val="FF0000"/>
-                </a:solidFill>
-              </a:rPr>
-              <a:t>A12</a:t>
-            </a:r>
-          </a:p>
-        </p:txBody>
-      </p:sp>
-      <p:sp>
-        <p:nvSpPr>
-          <p:cNvPr id="20" name="ZoneTexte 19"/>
-          <p:cNvSpPr txBox="1"/>
-          <p:nvPr/>
-        </p:nvSpPr>
-        <p:spPr>
-          <a:xfrm>
-            <a:off x="6860510" y="2243950"/>
-            <a:ext cx="747130" cy="369332"/>
-          </a:xfrm>
-          <a:prstGeom prst="rect">
-            <a:avLst/>
-          </a:prstGeom>
-          <a:noFill/>
-        </p:spPr>
-        <p:txBody>
-          <a:bodyPr wrap="square" rtlCol="0">
-            <a:spAutoFit/>
-          </a:bodyPr>
-          <a:lstStyle/>
-          <a:p>
-            <a:r>
-              <a:rPr lang="fr-FR" dirty="0" smtClean="0">
-                <a:solidFill>
-                  <a:srgbClr val="FF0000"/>
-                </a:solidFill>
-              </a:rPr>
-              <a:t>A13</a:t>
-            </a:r>
-          </a:p>
-        </p:txBody>
-      </p:sp>
-      <p:sp>
-        <p:nvSpPr>
-          <p:cNvPr id="21" name="ZoneTexte 20"/>
-          <p:cNvSpPr txBox="1"/>
-          <p:nvPr/>
-        </p:nvSpPr>
-        <p:spPr>
-          <a:xfrm>
-            <a:off x="6860508" y="2545032"/>
-            <a:ext cx="747130" cy="369332"/>
-          </a:xfrm>
-          <a:prstGeom prst="rect">
-            <a:avLst/>
-          </a:prstGeom>
-          <a:noFill/>
-        </p:spPr>
-        <p:txBody>
-          <a:bodyPr wrap="square" rtlCol="0">
-            <a:spAutoFit/>
-          </a:bodyPr>
-          <a:lstStyle/>
-          <a:p>
-            <a:r>
-              <a:rPr lang="fr-FR" dirty="0" smtClean="0">
-                <a:solidFill>
-                  <a:srgbClr val="FF0000"/>
-                </a:solidFill>
-              </a:rPr>
-              <a:t>A14</a:t>
-            </a:r>
-          </a:p>
-        </p:txBody>
-      </p:sp>
-      <p:sp>
-        <p:nvSpPr>
-          <p:cNvPr id="22" name="ZoneTexte 21"/>
-          <p:cNvSpPr txBox="1"/>
-          <p:nvPr/>
-        </p:nvSpPr>
-        <p:spPr>
-          <a:xfrm>
-            <a:off x="6860510" y="2801510"/>
-            <a:ext cx="747130" cy="369332"/>
-          </a:xfrm>
-          <a:prstGeom prst="rect">
-            <a:avLst/>
-          </a:prstGeom>
-          <a:noFill/>
-        </p:spPr>
-        <p:txBody>
-          <a:bodyPr wrap="square" rtlCol="0">
-            <a:spAutoFit/>
-          </a:bodyPr>
-          <a:lstStyle/>
-          <a:p>
-            <a:r>
-              <a:rPr lang="fr-FR" dirty="0" smtClean="0">
-                <a:solidFill>
-                  <a:srgbClr val="FF0000"/>
-                </a:solidFill>
-              </a:rPr>
-              <a:t>A15</a:t>
-            </a:r>
-          </a:p>
-        </p:txBody>
-      </p:sp>
-      <p:sp>
-        <p:nvSpPr>
-          <p:cNvPr id="23" name="ZoneTexte 22"/>
-          <p:cNvSpPr txBox="1"/>
-          <p:nvPr/>
-        </p:nvSpPr>
-        <p:spPr>
-          <a:xfrm>
-            <a:off x="6864693" y="3076573"/>
-            <a:ext cx="747130" cy="369332"/>
-          </a:xfrm>
-          <a:prstGeom prst="rect">
-            <a:avLst/>
-          </a:prstGeom>
-          <a:noFill/>
-        </p:spPr>
-        <p:txBody>
-          <a:bodyPr wrap="square" rtlCol="0">
-            <a:spAutoFit/>
-          </a:bodyPr>
-          <a:lstStyle/>
-          <a:p>
-            <a:r>
-              <a:rPr lang="fr-FR" dirty="0" smtClean="0">
-                <a:solidFill>
-                  <a:srgbClr val="FF0000"/>
-                </a:solidFill>
-              </a:rPr>
-              <a:t>D49</a:t>
-            </a:r>
-          </a:p>
-        </p:txBody>
-      </p:sp>
-      <p:sp>
-        <p:nvSpPr>
-          <p:cNvPr id="26" name="ZoneTexte 25"/>
-          <p:cNvSpPr txBox="1"/>
-          <p:nvPr/>
-        </p:nvSpPr>
-        <p:spPr>
-          <a:xfrm>
-            <a:off x="6867946" y="601001"/>
-            <a:ext cx="669076" cy="369332"/>
-          </a:xfrm>
-          <a:prstGeom prst="rect">
-            <a:avLst/>
-          </a:prstGeom>
-          <a:noFill/>
-        </p:spPr>
-        <p:txBody>
-          <a:bodyPr wrap="square" rtlCol="0">
-            <a:spAutoFit/>
-          </a:bodyPr>
-          <a:lstStyle/>
-          <a:p>
-            <a:r>
-              <a:rPr lang="fr-FR" dirty="0" smtClean="0">
-                <a:solidFill>
-                  <a:srgbClr val="FF0000"/>
-                </a:solidFill>
-              </a:rPr>
-              <a:t>D46</a:t>
-            </a:r>
-          </a:p>
-        </p:txBody>
-      </p:sp>
-      <p:sp>
-        <p:nvSpPr>
-          <p:cNvPr id="27" name="ZoneTexte 26"/>
-          <p:cNvSpPr txBox="1"/>
-          <p:nvPr/>
-        </p:nvSpPr>
-        <p:spPr>
-          <a:xfrm>
-            <a:off x="6875381" y="329655"/>
-            <a:ext cx="669076" cy="369332"/>
-          </a:xfrm>
-          <a:prstGeom prst="rect">
-            <a:avLst/>
-          </a:prstGeom>
-          <a:noFill/>
-        </p:spPr>
-        <p:txBody>
-          <a:bodyPr wrap="square" rtlCol="0">
-            <a:spAutoFit/>
-          </a:bodyPr>
-          <a:lstStyle/>
-          <a:p>
-            <a:r>
-              <a:rPr lang="fr-FR" dirty="0" smtClean="0">
-                <a:solidFill>
-                  <a:srgbClr val="FF0000"/>
-                </a:solidFill>
-              </a:rPr>
-              <a:t>D45</a:t>
-            </a:r>
-          </a:p>
-        </p:txBody>
-      </p:sp>
-      <p:sp>
-        <p:nvSpPr>
-          <p:cNvPr id="28" name="ZoneTexte 27"/>
-          <p:cNvSpPr txBox="1"/>
-          <p:nvPr/>
-        </p:nvSpPr>
-        <p:spPr>
-          <a:xfrm>
-            <a:off x="6864697" y="3355353"/>
-            <a:ext cx="1055648" cy="369332"/>
-          </a:xfrm>
-          <a:prstGeom prst="rect">
-            <a:avLst/>
-          </a:prstGeom>
-          <a:noFill/>
-        </p:spPr>
-        <p:txBody>
-          <a:bodyPr wrap="square" rtlCol="0">
-            <a:spAutoFit/>
-          </a:bodyPr>
-          <a:lstStyle/>
-          <a:p>
-            <a:r>
-              <a:rPr lang="fr-FR" dirty="0" smtClean="0">
-                <a:solidFill>
-                  <a:srgbClr val="FF0000"/>
-                </a:solidFill>
-              </a:rPr>
-              <a:t>D6</a:t>
-            </a:r>
-          </a:p>
-        </p:txBody>
-      </p:sp>
-      <p:sp>
-        <p:nvSpPr>
-          <p:cNvPr id="33" name="ZoneTexte 32"/>
-          <p:cNvSpPr txBox="1"/>
-          <p:nvPr/>
-        </p:nvSpPr>
-        <p:spPr>
-          <a:xfrm>
-            <a:off x="6860983" y="3619266"/>
-            <a:ext cx="709958" cy="369332"/>
-          </a:xfrm>
-          <a:prstGeom prst="rect">
-            <a:avLst/>
-          </a:prstGeom>
-          <a:noFill/>
-        </p:spPr>
-        <p:txBody>
-          <a:bodyPr wrap="square" rtlCol="0">
-            <a:spAutoFit/>
-          </a:bodyPr>
-          <a:lstStyle/>
-          <a:p>
-            <a:r>
-              <a:rPr lang="fr-FR" dirty="0" smtClean="0">
-                <a:solidFill>
-                  <a:srgbClr val="FF0000"/>
-                </a:solidFill>
-              </a:rPr>
-              <a:t>GND</a:t>
-            </a:r>
-          </a:p>
-        </p:txBody>
-      </p:sp>
-      <p:sp>
-        <p:nvSpPr>
-          <p:cNvPr id="34" name="ZoneTexte 33"/>
-          <p:cNvSpPr txBox="1"/>
-          <p:nvPr/>
-        </p:nvSpPr>
-        <p:spPr>
-          <a:xfrm>
-            <a:off x="6875387" y="3909197"/>
-            <a:ext cx="709958" cy="369332"/>
-          </a:xfrm>
-          <a:prstGeom prst="rect">
-            <a:avLst/>
-          </a:prstGeom>
-          <a:noFill/>
-        </p:spPr>
-        <p:txBody>
-          <a:bodyPr wrap="square" rtlCol="0">
-            <a:spAutoFit/>
-          </a:bodyPr>
-          <a:lstStyle/>
-          <a:p>
-            <a:r>
-              <a:rPr lang="fr-FR" dirty="0" smtClean="0">
-                <a:solidFill>
-                  <a:srgbClr val="FF0000"/>
-                </a:solidFill>
-              </a:rPr>
-              <a:t>D29</a:t>
-            </a:r>
-          </a:p>
-        </p:txBody>
-      </p:sp>
-      <p:sp>
-        <p:nvSpPr>
-          <p:cNvPr id="35" name="ZoneTexte 34"/>
-          <p:cNvSpPr txBox="1"/>
-          <p:nvPr/>
-        </p:nvSpPr>
-        <p:spPr>
-          <a:xfrm>
-            <a:off x="6882821" y="4429588"/>
-            <a:ext cx="709958" cy="369332"/>
-          </a:xfrm>
-          <a:prstGeom prst="rect">
-            <a:avLst/>
-          </a:prstGeom>
-          <a:noFill/>
-        </p:spPr>
-        <p:txBody>
-          <a:bodyPr wrap="square" rtlCol="0">
-            <a:spAutoFit/>
-          </a:bodyPr>
-          <a:lstStyle/>
-          <a:p>
-            <a:r>
-              <a:rPr lang="fr-FR" dirty="0" smtClean="0">
-                <a:solidFill>
-                  <a:srgbClr val="FF0000"/>
-                </a:solidFill>
-              </a:rPr>
-              <a:t>D28</a:t>
-            </a:r>
-          </a:p>
-        </p:txBody>
-      </p:sp>
-      <p:sp>
-        <p:nvSpPr>
-          <p:cNvPr id="36" name="ZoneTexte 35"/>
-          <p:cNvSpPr txBox="1"/>
-          <p:nvPr/>
-        </p:nvSpPr>
-        <p:spPr>
-          <a:xfrm>
-            <a:off x="6893975" y="4975997"/>
-            <a:ext cx="709958" cy="369332"/>
-          </a:xfrm>
-          <a:prstGeom prst="rect">
-            <a:avLst/>
-          </a:prstGeom>
-          <a:noFill/>
-        </p:spPr>
-        <p:txBody>
-          <a:bodyPr wrap="square" rtlCol="0">
-            <a:spAutoFit/>
-          </a:bodyPr>
-          <a:lstStyle/>
-          <a:p>
-            <a:r>
-              <a:rPr lang="fr-FR" dirty="0" smtClean="0">
-                <a:solidFill>
-                  <a:srgbClr val="FF0000"/>
-                </a:solidFill>
-              </a:rPr>
-              <a:t>D27</a:t>
-            </a:r>
-          </a:p>
-        </p:txBody>
-      </p:sp>
-      <p:sp>
-        <p:nvSpPr>
-          <p:cNvPr id="37" name="ZoneTexte 36"/>
-          <p:cNvSpPr txBox="1"/>
-          <p:nvPr/>
-        </p:nvSpPr>
-        <p:spPr>
-          <a:xfrm>
-            <a:off x="6890259" y="5574446"/>
-            <a:ext cx="709958" cy="369332"/>
-          </a:xfrm>
-          <a:prstGeom prst="rect">
-            <a:avLst/>
-          </a:prstGeom>
-          <a:noFill/>
-        </p:spPr>
-        <p:txBody>
-          <a:bodyPr wrap="square" rtlCol="0">
-            <a:spAutoFit/>
-          </a:bodyPr>
-          <a:lstStyle/>
-          <a:p>
-            <a:r>
-              <a:rPr lang="fr-FR" dirty="0" smtClean="0">
-                <a:solidFill>
-                  <a:srgbClr val="FF0000"/>
-                </a:solidFill>
-              </a:rPr>
-              <a:t>D26</a:t>
-            </a:r>
-          </a:p>
-        </p:txBody>
-      </p:sp>
-      <p:sp>
-        <p:nvSpPr>
-          <p:cNvPr id="42" name="ZoneTexte 41"/>
-          <p:cNvSpPr txBox="1"/>
-          <p:nvPr/>
-        </p:nvSpPr>
-        <p:spPr>
-          <a:xfrm>
-            <a:off x="6867954" y="4191696"/>
-            <a:ext cx="709958" cy="369332"/>
-          </a:xfrm>
-          <a:prstGeom prst="rect">
-            <a:avLst/>
-          </a:prstGeom>
-          <a:noFill/>
-        </p:spPr>
-        <p:txBody>
-          <a:bodyPr wrap="square" rtlCol="0">
-            <a:spAutoFit/>
-          </a:bodyPr>
-          <a:lstStyle/>
-          <a:p>
-            <a:r>
-              <a:rPr lang="fr-FR" dirty="0" smtClean="0">
-                <a:solidFill>
-                  <a:srgbClr val="FF0000"/>
-                </a:solidFill>
-              </a:rPr>
-              <a:t>D30</a:t>
-            </a:r>
-          </a:p>
-        </p:txBody>
-      </p:sp>
-      <p:sp>
-        <p:nvSpPr>
-          <p:cNvPr id="43" name="ZoneTexte 42"/>
-          <p:cNvSpPr txBox="1"/>
-          <p:nvPr/>
-        </p:nvSpPr>
-        <p:spPr>
-          <a:xfrm>
-            <a:off x="6886540" y="4700934"/>
-            <a:ext cx="709958" cy="369332"/>
-          </a:xfrm>
-          <a:prstGeom prst="rect">
-            <a:avLst/>
-          </a:prstGeom>
-          <a:noFill/>
-        </p:spPr>
-        <p:txBody>
-          <a:bodyPr wrap="square" rtlCol="0">
-            <a:spAutoFit/>
-          </a:bodyPr>
-          <a:lstStyle/>
-          <a:p>
-            <a:r>
-              <a:rPr lang="fr-FR" dirty="0" smtClean="0">
-                <a:solidFill>
-                  <a:srgbClr val="FF0000"/>
-                </a:solidFill>
-              </a:rPr>
-              <a:t>D31</a:t>
-            </a:r>
-          </a:p>
-        </p:txBody>
-      </p:sp>
-      <p:sp>
-        <p:nvSpPr>
-          <p:cNvPr id="44" name="ZoneTexte 43"/>
-          <p:cNvSpPr txBox="1"/>
-          <p:nvPr/>
-        </p:nvSpPr>
-        <p:spPr>
-          <a:xfrm>
-            <a:off x="6886541" y="5291949"/>
-            <a:ext cx="709958" cy="369332"/>
-          </a:xfrm>
-          <a:prstGeom prst="rect">
-            <a:avLst/>
-          </a:prstGeom>
-          <a:noFill/>
-        </p:spPr>
-        <p:txBody>
-          <a:bodyPr wrap="square" rtlCol="0">
-            <a:spAutoFit/>
-          </a:bodyPr>
-          <a:lstStyle/>
-          <a:p>
-            <a:r>
-              <a:rPr lang="fr-FR" dirty="0" smtClean="0">
-                <a:solidFill>
-                  <a:srgbClr val="FF0000"/>
-                </a:solidFill>
-              </a:rPr>
-              <a:t>D32</a:t>
-            </a:r>
-          </a:p>
-        </p:txBody>
-      </p:sp>
-      <p:sp>
-        <p:nvSpPr>
-          <p:cNvPr id="45" name="ZoneTexte 44"/>
-          <p:cNvSpPr txBox="1"/>
-          <p:nvPr/>
-        </p:nvSpPr>
-        <p:spPr>
-          <a:xfrm>
-            <a:off x="6893976" y="5845793"/>
-            <a:ext cx="709958" cy="369332"/>
-          </a:xfrm>
-          <a:prstGeom prst="rect">
-            <a:avLst/>
-          </a:prstGeom>
-          <a:noFill/>
-        </p:spPr>
-        <p:txBody>
-          <a:bodyPr wrap="square" rtlCol="0">
-            <a:spAutoFit/>
-          </a:bodyPr>
-          <a:lstStyle/>
-          <a:p>
-            <a:r>
-              <a:rPr lang="fr-FR" dirty="0" smtClean="0">
-                <a:solidFill>
-                  <a:srgbClr val="FF0000"/>
-                </a:solidFill>
-              </a:rPr>
-              <a:t>D33</a:t>
-            </a:r>
-          </a:p>
-        </p:txBody>
-      </p:sp>
-      <p:sp>
-        <p:nvSpPr>
-          <p:cNvPr id="50" name="ZoneTexte 49"/>
-          <p:cNvSpPr txBox="1"/>
-          <p:nvPr/>
-        </p:nvSpPr>
-        <p:spPr>
-          <a:xfrm>
-            <a:off x="6897688" y="6117140"/>
-            <a:ext cx="709958" cy="369332"/>
-          </a:xfrm>
-          <a:prstGeom prst="rect">
-            <a:avLst/>
-          </a:prstGeom>
-          <a:noFill/>
-        </p:spPr>
-        <p:txBody>
-          <a:bodyPr wrap="square" rtlCol="0">
-            <a:spAutoFit/>
-          </a:bodyPr>
-          <a:lstStyle/>
-          <a:p>
-            <a:r>
-              <a:rPr lang="fr-FR" dirty="0" smtClean="0">
-                <a:solidFill>
-                  <a:srgbClr val="FF0000"/>
-                </a:solidFill>
-              </a:rPr>
-              <a:t>VCC</a:t>
-            </a:r>
-          </a:p>
-        </p:txBody>
-      </p:sp>
-      <p:sp>
-        <p:nvSpPr>
-          <p:cNvPr id="38" name="ZoneTexte 37"/>
-          <p:cNvSpPr txBox="1"/>
-          <p:nvPr/>
-        </p:nvSpPr>
-        <p:spPr>
-          <a:xfrm>
-            <a:off x="3931233" y="6105058"/>
-            <a:ext cx="709958" cy="369332"/>
-          </a:xfrm>
-          <a:prstGeom prst="rect">
-            <a:avLst/>
-          </a:prstGeom>
-          <a:noFill/>
-        </p:spPr>
-        <p:txBody>
-          <a:bodyPr wrap="square" rtlCol="0">
-            <a:spAutoFit/>
-          </a:bodyPr>
-          <a:lstStyle/>
-          <a:p>
-            <a:r>
-              <a:rPr lang="fr-FR" dirty="0" smtClean="0">
-                <a:solidFill>
-                  <a:srgbClr val="FF0000"/>
-                </a:solidFill>
-              </a:rPr>
-              <a:t>D25</a:t>
-            </a:r>
-          </a:p>
-        </p:txBody>
-      </p:sp>
-      <p:sp>
-        <p:nvSpPr>
-          <p:cNvPr id="39" name="ZoneTexte 38"/>
-          <p:cNvSpPr txBox="1"/>
-          <p:nvPr/>
-        </p:nvSpPr>
-        <p:spPr>
-          <a:xfrm>
-            <a:off x="3929143" y="5554931"/>
-            <a:ext cx="709958" cy="369332"/>
-          </a:xfrm>
-          <a:prstGeom prst="rect">
-            <a:avLst/>
-          </a:prstGeom>
-          <a:noFill/>
-        </p:spPr>
-        <p:txBody>
-          <a:bodyPr wrap="square" rtlCol="0">
-            <a:spAutoFit/>
-          </a:bodyPr>
-          <a:lstStyle/>
-          <a:p>
-            <a:r>
-              <a:rPr lang="fr-FR" dirty="0" smtClean="0">
-                <a:solidFill>
-                  <a:srgbClr val="FF0000"/>
-                </a:solidFill>
-              </a:rPr>
-              <a:t>D24</a:t>
-            </a:r>
-          </a:p>
-        </p:txBody>
-      </p:sp>
-      <p:sp>
-        <p:nvSpPr>
-          <p:cNvPr id="40" name="ZoneTexte 39"/>
-          <p:cNvSpPr txBox="1"/>
-          <p:nvPr/>
-        </p:nvSpPr>
-        <p:spPr>
-          <a:xfrm>
-            <a:off x="3930769" y="5030823"/>
-            <a:ext cx="709958" cy="369332"/>
-          </a:xfrm>
-          <a:prstGeom prst="rect">
-            <a:avLst/>
-          </a:prstGeom>
-          <a:noFill/>
-        </p:spPr>
-        <p:txBody>
-          <a:bodyPr wrap="square" rtlCol="0">
-            <a:spAutoFit/>
-          </a:bodyPr>
-          <a:lstStyle/>
-          <a:p>
-            <a:r>
-              <a:rPr lang="fr-FR" dirty="0" smtClean="0">
-                <a:solidFill>
-                  <a:srgbClr val="FF0000"/>
-                </a:solidFill>
-              </a:rPr>
-              <a:t>D23</a:t>
-            </a:r>
-          </a:p>
-        </p:txBody>
-      </p:sp>
-      <p:sp>
-        <p:nvSpPr>
-          <p:cNvPr id="41" name="ZoneTexte 40"/>
-          <p:cNvSpPr txBox="1"/>
-          <p:nvPr/>
-        </p:nvSpPr>
-        <p:spPr>
-          <a:xfrm>
-            <a:off x="3932860" y="4499280"/>
-            <a:ext cx="709958" cy="369332"/>
-          </a:xfrm>
-          <a:prstGeom prst="rect">
-            <a:avLst/>
-          </a:prstGeom>
-          <a:noFill/>
-        </p:spPr>
-        <p:txBody>
-          <a:bodyPr wrap="square" rtlCol="0">
-            <a:spAutoFit/>
-          </a:bodyPr>
-          <a:lstStyle/>
-          <a:p>
-            <a:r>
-              <a:rPr lang="fr-FR" dirty="0" smtClean="0">
-                <a:solidFill>
-                  <a:srgbClr val="FF0000"/>
-                </a:solidFill>
-              </a:rPr>
-              <a:t>D22</a:t>
-            </a:r>
-          </a:p>
-        </p:txBody>
-      </p:sp>
-      <p:sp>
-        <p:nvSpPr>
-          <p:cNvPr id="46" name="ZoneTexte 45"/>
-          <p:cNvSpPr txBox="1"/>
-          <p:nvPr/>
-        </p:nvSpPr>
-        <p:spPr>
-          <a:xfrm>
-            <a:off x="3931236" y="5837430"/>
-            <a:ext cx="709958" cy="369332"/>
-          </a:xfrm>
-          <a:prstGeom prst="rect">
-            <a:avLst/>
-          </a:prstGeom>
-          <a:noFill/>
-        </p:spPr>
-        <p:txBody>
-          <a:bodyPr wrap="square" rtlCol="0">
-            <a:spAutoFit/>
-          </a:bodyPr>
-          <a:lstStyle/>
-          <a:p>
-            <a:r>
-              <a:rPr lang="fr-FR" dirty="0" smtClean="0">
-                <a:solidFill>
-                  <a:srgbClr val="FF0000"/>
-                </a:solidFill>
-              </a:rPr>
-              <a:t>D34</a:t>
-            </a:r>
-          </a:p>
-        </p:txBody>
-      </p:sp>
-      <p:sp>
-        <p:nvSpPr>
-          <p:cNvPr id="47" name="ZoneTexte 46"/>
-          <p:cNvSpPr txBox="1"/>
-          <p:nvPr/>
-        </p:nvSpPr>
-        <p:spPr>
-          <a:xfrm>
-            <a:off x="3930771" y="5287304"/>
-            <a:ext cx="709958" cy="369332"/>
-          </a:xfrm>
-          <a:prstGeom prst="rect">
-            <a:avLst/>
-          </a:prstGeom>
-          <a:noFill/>
-        </p:spPr>
-        <p:txBody>
-          <a:bodyPr wrap="square" rtlCol="0">
-            <a:spAutoFit/>
-          </a:bodyPr>
-          <a:lstStyle/>
-          <a:p>
-            <a:r>
-              <a:rPr lang="fr-FR" dirty="0" smtClean="0">
-                <a:solidFill>
-                  <a:srgbClr val="FF0000"/>
-                </a:solidFill>
-              </a:rPr>
-              <a:t>D35</a:t>
-            </a:r>
-          </a:p>
-        </p:txBody>
-      </p:sp>
-      <p:sp>
-        <p:nvSpPr>
-          <p:cNvPr id="48" name="ZoneTexte 47"/>
-          <p:cNvSpPr txBox="1"/>
-          <p:nvPr/>
-        </p:nvSpPr>
-        <p:spPr>
-          <a:xfrm>
-            <a:off x="3930771" y="4763196"/>
-            <a:ext cx="709958" cy="369332"/>
-          </a:xfrm>
-          <a:prstGeom prst="rect">
-            <a:avLst/>
-          </a:prstGeom>
-          <a:noFill/>
-        </p:spPr>
-        <p:txBody>
-          <a:bodyPr wrap="square" rtlCol="0">
-            <a:spAutoFit/>
-          </a:bodyPr>
-          <a:lstStyle/>
-          <a:p>
-            <a:r>
-              <a:rPr lang="fr-FR" dirty="0" smtClean="0">
-                <a:solidFill>
-                  <a:srgbClr val="FF0000"/>
-                </a:solidFill>
-              </a:rPr>
-              <a:t>D36</a:t>
-            </a:r>
-          </a:p>
-        </p:txBody>
-      </p:sp>
-      <p:sp>
-        <p:nvSpPr>
-          <p:cNvPr id="49" name="ZoneTexte 48"/>
-          <p:cNvSpPr txBox="1"/>
-          <p:nvPr/>
-        </p:nvSpPr>
-        <p:spPr>
-          <a:xfrm>
-            <a:off x="3940297" y="4216787"/>
-            <a:ext cx="709958" cy="369332"/>
-          </a:xfrm>
-          <a:prstGeom prst="rect">
-            <a:avLst/>
-          </a:prstGeom>
-          <a:noFill/>
-        </p:spPr>
-        <p:txBody>
-          <a:bodyPr wrap="square" rtlCol="0">
-            <a:spAutoFit/>
-          </a:bodyPr>
-          <a:lstStyle/>
-          <a:p>
-            <a:r>
-              <a:rPr lang="fr-FR" dirty="0" smtClean="0">
-                <a:solidFill>
-                  <a:srgbClr val="FF0000"/>
-                </a:solidFill>
-              </a:rPr>
-              <a:t>D37</a:t>
-            </a:r>
-          </a:p>
-        </p:txBody>
-      </p:sp>
-      <p:sp>
-        <p:nvSpPr>
-          <p:cNvPr id="6" name="ZoneTexte 5"/>
-          <p:cNvSpPr txBox="1"/>
-          <p:nvPr/>
-        </p:nvSpPr>
-        <p:spPr>
-          <a:xfrm>
-            <a:off x="3937042" y="3101665"/>
-            <a:ext cx="546410" cy="369332"/>
-          </a:xfrm>
-          <a:prstGeom prst="rect">
-            <a:avLst/>
-          </a:prstGeom>
-          <a:noFill/>
-        </p:spPr>
-        <p:txBody>
-          <a:bodyPr wrap="square" rtlCol="0">
-            <a:spAutoFit/>
-          </a:bodyPr>
-          <a:lstStyle/>
-          <a:p>
-            <a:r>
-              <a:rPr lang="fr-FR" dirty="0" smtClean="0">
-                <a:solidFill>
-                  <a:srgbClr val="FF0000"/>
-                </a:solidFill>
-              </a:rPr>
-              <a:t>A0</a:t>
-            </a:r>
-            <a:endParaRPr lang="fr-FR" dirty="0">
-              <a:solidFill>
-                <a:srgbClr val="FF0000"/>
-              </a:solidFill>
-            </a:endParaRPr>
-          </a:p>
-        </p:txBody>
-      </p:sp>
-      <p:sp>
-        <p:nvSpPr>
-          <p:cNvPr id="7" name="ZoneTexte 6"/>
-          <p:cNvSpPr txBox="1"/>
-          <p:nvPr/>
-        </p:nvSpPr>
-        <p:spPr>
-          <a:xfrm>
-            <a:off x="3944478" y="2819168"/>
-            <a:ext cx="546410" cy="369332"/>
-          </a:xfrm>
-          <a:prstGeom prst="rect">
-            <a:avLst/>
-          </a:prstGeom>
-          <a:noFill/>
-        </p:spPr>
-        <p:txBody>
-          <a:bodyPr wrap="square" rtlCol="0">
-            <a:spAutoFit/>
-          </a:bodyPr>
-          <a:lstStyle/>
-          <a:p>
-            <a:r>
-              <a:rPr lang="fr-FR" dirty="0" smtClean="0">
-                <a:solidFill>
-                  <a:srgbClr val="FF0000"/>
-                </a:solidFill>
-              </a:rPr>
-              <a:t>A1</a:t>
-            </a:r>
-            <a:endParaRPr lang="fr-FR" dirty="0">
-              <a:solidFill>
-                <a:srgbClr val="FF0000"/>
-              </a:solidFill>
-            </a:endParaRPr>
-          </a:p>
-        </p:txBody>
-      </p:sp>
-      <p:sp>
-        <p:nvSpPr>
-          <p:cNvPr id="8" name="ZoneTexte 7"/>
-          <p:cNvSpPr txBox="1"/>
-          <p:nvPr/>
-        </p:nvSpPr>
-        <p:spPr>
-          <a:xfrm>
-            <a:off x="3934952" y="2538762"/>
-            <a:ext cx="546410" cy="369332"/>
-          </a:xfrm>
-          <a:prstGeom prst="rect">
-            <a:avLst/>
-          </a:prstGeom>
-          <a:noFill/>
-        </p:spPr>
-        <p:txBody>
-          <a:bodyPr wrap="square" rtlCol="0">
-            <a:spAutoFit/>
-          </a:bodyPr>
-          <a:lstStyle/>
-          <a:p>
-            <a:r>
-              <a:rPr lang="fr-FR" dirty="0" smtClean="0">
-                <a:solidFill>
-                  <a:srgbClr val="FF0000"/>
-                </a:solidFill>
-              </a:rPr>
-              <a:t>A2</a:t>
-            </a:r>
-          </a:p>
-        </p:txBody>
-      </p:sp>
-      <p:sp>
-        <p:nvSpPr>
-          <p:cNvPr id="9" name="ZoneTexte 8"/>
-          <p:cNvSpPr txBox="1"/>
-          <p:nvPr/>
-        </p:nvSpPr>
-        <p:spPr>
-          <a:xfrm>
-            <a:off x="3934952" y="2245809"/>
-            <a:ext cx="546410" cy="369332"/>
-          </a:xfrm>
-          <a:prstGeom prst="rect">
-            <a:avLst/>
-          </a:prstGeom>
-          <a:noFill/>
-        </p:spPr>
-        <p:txBody>
-          <a:bodyPr wrap="square" rtlCol="0">
-            <a:spAutoFit/>
-          </a:bodyPr>
-          <a:lstStyle/>
-          <a:p>
-            <a:r>
-              <a:rPr lang="fr-FR" dirty="0" smtClean="0">
-                <a:solidFill>
-                  <a:srgbClr val="FF0000"/>
-                </a:solidFill>
-              </a:rPr>
-              <a:t>A3</a:t>
-            </a:r>
-            <a:endParaRPr lang="fr-FR" dirty="0">
-              <a:solidFill>
-                <a:srgbClr val="FF0000"/>
-              </a:solidFill>
-            </a:endParaRPr>
-          </a:p>
-        </p:txBody>
-      </p:sp>
-      <p:sp>
-        <p:nvSpPr>
-          <p:cNvPr id="10" name="ZoneTexte 9"/>
-          <p:cNvSpPr txBox="1"/>
-          <p:nvPr/>
-        </p:nvSpPr>
-        <p:spPr>
-          <a:xfrm>
-            <a:off x="3934950" y="1992351"/>
-            <a:ext cx="546410" cy="369332"/>
-          </a:xfrm>
-          <a:prstGeom prst="rect">
-            <a:avLst/>
-          </a:prstGeom>
-          <a:noFill/>
-        </p:spPr>
-        <p:txBody>
-          <a:bodyPr wrap="square" rtlCol="0">
-            <a:spAutoFit/>
-          </a:bodyPr>
-          <a:lstStyle/>
-          <a:p>
-            <a:r>
-              <a:rPr lang="fr-FR" dirty="0" smtClean="0">
-                <a:solidFill>
-                  <a:srgbClr val="FF0000"/>
-                </a:solidFill>
-              </a:rPr>
-              <a:t>A4</a:t>
-            </a:r>
-            <a:endParaRPr lang="fr-FR" dirty="0">
-              <a:solidFill>
-                <a:srgbClr val="FF0000"/>
-              </a:solidFill>
-            </a:endParaRPr>
-          </a:p>
-        </p:txBody>
-      </p:sp>
-      <p:sp>
-        <p:nvSpPr>
-          <p:cNvPr id="11" name="ZoneTexte 10"/>
-          <p:cNvSpPr txBox="1"/>
-          <p:nvPr/>
-        </p:nvSpPr>
-        <p:spPr>
-          <a:xfrm>
-            <a:off x="3934951" y="1715196"/>
-            <a:ext cx="546410" cy="369332"/>
-          </a:xfrm>
-          <a:prstGeom prst="rect">
-            <a:avLst/>
-          </a:prstGeom>
-          <a:noFill/>
-        </p:spPr>
-        <p:txBody>
-          <a:bodyPr wrap="square" rtlCol="0">
-            <a:spAutoFit/>
-          </a:bodyPr>
-          <a:lstStyle/>
-          <a:p>
-            <a:r>
-              <a:rPr lang="fr-FR" dirty="0" smtClean="0">
-                <a:solidFill>
-                  <a:srgbClr val="FF0000"/>
-                </a:solidFill>
-              </a:rPr>
-              <a:t>A5</a:t>
-            </a:r>
-            <a:endParaRPr lang="fr-FR" dirty="0">
-              <a:solidFill>
-                <a:srgbClr val="FF0000"/>
-              </a:solidFill>
-            </a:endParaRPr>
-          </a:p>
-        </p:txBody>
-      </p:sp>
-      <p:sp>
-        <p:nvSpPr>
-          <p:cNvPr id="12" name="ZoneTexte 11"/>
-          <p:cNvSpPr txBox="1"/>
-          <p:nvPr/>
-        </p:nvSpPr>
-        <p:spPr>
-          <a:xfrm>
-            <a:off x="3931234" y="1435950"/>
-            <a:ext cx="546410" cy="369332"/>
-          </a:xfrm>
-          <a:prstGeom prst="rect">
-            <a:avLst/>
-          </a:prstGeom>
-          <a:noFill/>
-        </p:spPr>
-        <p:txBody>
-          <a:bodyPr wrap="square" rtlCol="0">
-            <a:spAutoFit/>
-          </a:bodyPr>
-          <a:lstStyle/>
-          <a:p>
-            <a:r>
-              <a:rPr lang="fr-FR" dirty="0" smtClean="0">
-                <a:solidFill>
-                  <a:srgbClr val="FF0000"/>
-                </a:solidFill>
-              </a:rPr>
-              <a:t>A6</a:t>
-            </a:r>
-            <a:endParaRPr lang="fr-FR" dirty="0">
-              <a:solidFill>
-                <a:srgbClr val="FF0000"/>
-              </a:solidFill>
-            </a:endParaRPr>
-          </a:p>
-        </p:txBody>
-      </p:sp>
-      <p:sp>
-        <p:nvSpPr>
-          <p:cNvPr id="13" name="ZoneTexte 12"/>
-          <p:cNvSpPr txBox="1"/>
-          <p:nvPr/>
-        </p:nvSpPr>
-        <p:spPr>
-          <a:xfrm>
-            <a:off x="3942386" y="1187373"/>
-            <a:ext cx="546410" cy="369332"/>
-          </a:xfrm>
-          <a:prstGeom prst="rect">
-            <a:avLst/>
-          </a:prstGeom>
-          <a:noFill/>
-        </p:spPr>
-        <p:txBody>
-          <a:bodyPr wrap="square" rtlCol="0">
-            <a:spAutoFit/>
-          </a:bodyPr>
-          <a:lstStyle/>
-          <a:p>
-            <a:r>
-              <a:rPr lang="fr-FR" dirty="0" smtClean="0">
-                <a:solidFill>
-                  <a:srgbClr val="FF0000"/>
-                </a:solidFill>
-              </a:rPr>
-              <a:t>A7</a:t>
-            </a:r>
-            <a:endParaRPr lang="fr-FR" dirty="0">
-              <a:solidFill>
-                <a:srgbClr val="FF0000"/>
-              </a:solidFill>
-            </a:endParaRPr>
-          </a:p>
-        </p:txBody>
-      </p:sp>
-      <p:sp>
-        <p:nvSpPr>
-          <p:cNvPr id="24" name="ZoneTexte 23"/>
-          <p:cNvSpPr txBox="1"/>
-          <p:nvPr/>
-        </p:nvSpPr>
-        <p:spPr>
-          <a:xfrm>
-            <a:off x="3929139" y="906498"/>
-            <a:ext cx="669076" cy="369332"/>
-          </a:xfrm>
-          <a:prstGeom prst="rect">
-            <a:avLst/>
-          </a:prstGeom>
-          <a:noFill/>
-        </p:spPr>
-        <p:txBody>
-          <a:bodyPr wrap="square" rtlCol="0">
-            <a:spAutoFit/>
-          </a:bodyPr>
-          <a:lstStyle/>
-          <a:p>
-            <a:r>
-              <a:rPr lang="fr-FR" dirty="0" smtClean="0">
-                <a:solidFill>
-                  <a:srgbClr val="FF0000"/>
-                </a:solidFill>
-              </a:rPr>
-              <a:t>D48</a:t>
-            </a:r>
-          </a:p>
-        </p:txBody>
-      </p:sp>
-      <p:sp>
-        <p:nvSpPr>
-          <p:cNvPr id="25" name="ZoneTexte 24"/>
-          <p:cNvSpPr txBox="1"/>
-          <p:nvPr/>
-        </p:nvSpPr>
-        <p:spPr>
-          <a:xfrm>
-            <a:off x="3927048" y="611224"/>
-            <a:ext cx="669076" cy="369332"/>
-          </a:xfrm>
-          <a:prstGeom prst="rect">
-            <a:avLst/>
-          </a:prstGeom>
-          <a:noFill/>
-        </p:spPr>
-        <p:txBody>
-          <a:bodyPr wrap="square" rtlCol="0">
-            <a:spAutoFit/>
-          </a:bodyPr>
-          <a:lstStyle/>
-          <a:p>
-            <a:r>
-              <a:rPr lang="fr-FR" dirty="0" smtClean="0">
-                <a:solidFill>
-                  <a:srgbClr val="FF0000"/>
-                </a:solidFill>
-              </a:rPr>
-              <a:t>D47</a:t>
-            </a:r>
-          </a:p>
-        </p:txBody>
-      </p:sp>
-      <p:sp>
-        <p:nvSpPr>
-          <p:cNvPr id="29" name="ZoneTexte 28"/>
-          <p:cNvSpPr txBox="1"/>
-          <p:nvPr/>
-        </p:nvSpPr>
-        <p:spPr>
-          <a:xfrm>
-            <a:off x="3932392" y="313857"/>
-            <a:ext cx="557560" cy="369332"/>
-          </a:xfrm>
-          <a:prstGeom prst="rect">
-            <a:avLst/>
-          </a:prstGeom>
-          <a:noFill/>
-        </p:spPr>
-        <p:txBody>
-          <a:bodyPr wrap="square" rtlCol="0">
-            <a:spAutoFit/>
-          </a:bodyPr>
-          <a:lstStyle/>
-          <a:p>
-            <a:r>
-              <a:rPr lang="fr-FR" dirty="0" smtClean="0">
-                <a:solidFill>
-                  <a:srgbClr val="FF0000"/>
-                </a:solidFill>
-              </a:rPr>
-              <a:t>D7</a:t>
-            </a:r>
-          </a:p>
-        </p:txBody>
-      </p:sp>
-      <p:sp>
-        <p:nvSpPr>
-          <p:cNvPr id="30" name="ZoneTexte 29"/>
-          <p:cNvSpPr txBox="1"/>
-          <p:nvPr/>
-        </p:nvSpPr>
-        <p:spPr>
-          <a:xfrm>
-            <a:off x="3931696" y="3365575"/>
-            <a:ext cx="557560" cy="369332"/>
-          </a:xfrm>
-          <a:prstGeom prst="rect">
-            <a:avLst/>
-          </a:prstGeom>
-          <a:noFill/>
-        </p:spPr>
-        <p:txBody>
-          <a:bodyPr wrap="square" rtlCol="0">
-            <a:spAutoFit/>
-          </a:bodyPr>
-          <a:lstStyle/>
-          <a:p>
-            <a:r>
-              <a:rPr lang="fr-FR" dirty="0" smtClean="0">
-                <a:solidFill>
-                  <a:srgbClr val="FF0000"/>
-                </a:solidFill>
-              </a:rPr>
-              <a:t>D9</a:t>
-            </a:r>
-          </a:p>
-        </p:txBody>
-      </p:sp>
-      <p:sp>
-        <p:nvSpPr>
-          <p:cNvPr id="31" name="ZoneTexte 30"/>
-          <p:cNvSpPr txBox="1"/>
-          <p:nvPr/>
-        </p:nvSpPr>
-        <p:spPr>
-          <a:xfrm>
-            <a:off x="3939131" y="3908268"/>
-            <a:ext cx="557560" cy="369332"/>
-          </a:xfrm>
-          <a:prstGeom prst="rect">
-            <a:avLst/>
-          </a:prstGeom>
-          <a:noFill/>
-        </p:spPr>
-        <p:txBody>
-          <a:bodyPr wrap="square" rtlCol="0">
-            <a:spAutoFit/>
-          </a:bodyPr>
-          <a:lstStyle/>
-          <a:p>
-            <a:r>
-              <a:rPr lang="fr-FR" dirty="0" smtClean="0">
-                <a:solidFill>
-                  <a:srgbClr val="FF0000"/>
-                </a:solidFill>
-              </a:rPr>
-              <a:t>D16</a:t>
-            </a:r>
-          </a:p>
-        </p:txBody>
-      </p:sp>
-      <p:sp>
-        <p:nvSpPr>
-          <p:cNvPr id="32" name="ZoneTexte 31"/>
-          <p:cNvSpPr txBox="1"/>
-          <p:nvPr/>
-        </p:nvSpPr>
-        <p:spPr>
-          <a:xfrm>
-            <a:off x="3926354" y="3640639"/>
-            <a:ext cx="709958" cy="369332"/>
-          </a:xfrm>
-          <a:prstGeom prst="rect">
-            <a:avLst/>
-          </a:prstGeom>
-          <a:noFill/>
-        </p:spPr>
-        <p:txBody>
-          <a:bodyPr wrap="square" rtlCol="0">
-            <a:spAutoFit/>
-          </a:bodyPr>
-          <a:lstStyle/>
-          <a:p>
-            <a:r>
-              <a:rPr lang="fr-FR" dirty="0" smtClean="0">
-                <a:solidFill>
-                  <a:srgbClr val="FF0000"/>
-                </a:solidFill>
-              </a:rPr>
-              <a:t>GND</a:t>
-            </a:r>
-          </a:p>
-        </p:txBody>
-      </p:sp>
-      <p:sp>
-        <p:nvSpPr>
-          <p:cNvPr id="51" name="Rectangle 50"/>
-          <p:cNvSpPr/>
-          <p:nvPr/>
-        </p:nvSpPr>
-        <p:spPr>
-          <a:xfrm rot="16200000">
-            <a:off x="2053582" y="3053369"/>
-            <a:ext cx="3285451" cy="461665"/>
-          </a:xfrm>
-          <a:prstGeom prst="rect">
-            <a:avLst/>
-          </a:prstGeom>
-        </p:spPr>
-        <p:txBody>
-          <a:bodyPr wrap="none">
-            <a:spAutoFit/>
-          </a:bodyPr>
-          <a:lstStyle/>
-          <a:p>
-            <a:r>
-              <a:rPr lang="fr-FR" sz="2400" b="1" dirty="0" err="1" smtClean="0">
-                <a:solidFill>
-                  <a:srgbClr val="FF0000"/>
-                </a:solidFill>
-              </a:rPr>
-              <a:t>Arduino</a:t>
-            </a:r>
-            <a:r>
-              <a:rPr lang="fr-FR" sz="2400" b="1" dirty="0" smtClean="0">
-                <a:solidFill>
-                  <a:srgbClr val="FF0000"/>
-                </a:solidFill>
-              </a:rPr>
-              <a:t> </a:t>
-            </a:r>
-            <a:r>
-              <a:rPr lang="fr-FR" sz="2400" b="1" dirty="0" err="1" smtClean="0">
-                <a:solidFill>
-                  <a:srgbClr val="FF0000"/>
-                </a:solidFill>
-              </a:rPr>
-              <a:t>Mega</a:t>
-            </a:r>
-            <a:r>
-              <a:rPr lang="fr-FR" sz="2400" b="1" dirty="0" smtClean="0">
-                <a:solidFill>
-                  <a:srgbClr val="FF0000"/>
-                </a:solidFill>
-              </a:rPr>
-              <a:t> 2560 Pins</a:t>
-            </a:r>
-            <a:endParaRPr lang="fr-FR" sz="2400" dirty="0">
-              <a:solidFill>
-                <a:srgbClr val="FF0000"/>
-              </a:solidFill>
-            </a:endParaRPr>
-          </a:p>
-        </p:txBody>
-      </p:sp>
-    </p:spTree>
-    <p:extLst>
-      <p:ext uri="{BB962C8B-B14F-4D97-AF65-F5344CB8AC3E}">
-        <p14:creationId xmlns="" xmlns:p14="http://schemas.microsoft.com/office/powerpoint/2010/main" val="3182372557"/>
-      </p:ext>
-    </p:extLst>
-  </p:cSld>
-  <p:clrMapOvr>
-    <a:masterClrMapping/>
-  </p:clrMapOvr>
-  <p:timing>
-    <p:tnLst>
-      <p:par>
-        <p:cTn id="1" dur="indefinite" restart="never" nodeType="tmRoot"/>
-      </p:par>
-    </p:tnLst>
-  </p:timing>
-</p:sld>
-</file>
-
-<file path=ppt/slides/slide12.xml><?xml version="1.0" encoding="utf-8"?>
-<p:sld xmlns:a="http://schemas.openxmlformats.org/drawingml/2006/main" xmlns:r="http://schemas.openxmlformats.org/officeDocument/2006/relationships" xmlns:p="http://schemas.openxmlformats.org/presentationml/2006/main">
-  <p:cSld>
-    <p:spTree>
-      <p:nvGrpSpPr>
-        <p:cNvPr id="1" name=""/>
-        <p:cNvGrpSpPr/>
-        <p:nvPr/>
-      </p:nvGrpSpPr>
-      <p:grpSpPr>
-        <a:xfrm>
-          <a:off x="0" y="0"/>
-          <a:ext cx="0" cy="0"/>
-          <a:chOff x="0" y="0"/>
-          <a:chExt cx="0" cy="0"/>
-        </a:xfrm>
-      </p:grpSpPr>
-      <p:pic>
-        <p:nvPicPr>
-          <p:cNvPr id="1026" name="Picture 2" descr="C:\Users\BOICHOT\Downloads\Neo-Geo-Sengoku-2-Red-Blood-main\MVS_bootleg_convert\Detail_on_C1_C2.jpg"/>
-          <p:cNvPicPr>
-            <a:picLocks noChangeAspect="1" noChangeArrowheads="1"/>
-          </p:cNvPicPr>
-          <p:nvPr/>
-        </p:nvPicPr>
-        <p:blipFill>
-          <a:blip r:embed="rId2" cstate="print"/>
-          <a:srcRect/>
-          <a:stretch>
-            <a:fillRect/>
-          </a:stretch>
-        </p:blipFill>
-        <p:spPr bwMode="auto">
-          <a:xfrm>
-            <a:off x="1059366" y="0"/>
-            <a:ext cx="10275944" cy="6858000"/>
-          </a:xfrm>
-          <a:prstGeom prst="rect">
-            <a:avLst/>
-          </a:prstGeom>
-          <a:noFill/>
-        </p:spPr>
-      </p:pic>
-      <p:sp>
-        <p:nvSpPr>
-          <p:cNvPr id="5" name="ZoneTexte 4"/>
-          <p:cNvSpPr txBox="1"/>
-          <p:nvPr/>
-        </p:nvSpPr>
-        <p:spPr>
-          <a:xfrm>
-            <a:off x="7326352" y="5686220"/>
-            <a:ext cx="3523785" cy="646331"/>
-          </a:xfrm>
-          <a:prstGeom prst="rect">
-            <a:avLst/>
-          </a:prstGeom>
-          <a:noFill/>
-        </p:spPr>
-        <p:txBody>
-          <a:bodyPr wrap="square" rtlCol="0">
-            <a:spAutoFit/>
-          </a:bodyPr>
-          <a:lstStyle/>
-          <a:p>
-            <a:r>
-              <a:rPr lang="fr-FR" sz="3600" b="1" dirty="0" err="1" smtClean="0">
-                <a:solidFill>
-                  <a:srgbClr val="FFC000"/>
-                </a:solidFill>
-              </a:rPr>
-              <a:t>Cut</a:t>
-            </a:r>
-            <a:r>
-              <a:rPr lang="fr-FR" sz="3600" b="1" dirty="0" smtClean="0">
-                <a:solidFill>
-                  <a:srgbClr val="FFC000"/>
-                </a:solidFill>
-              </a:rPr>
-              <a:t> trace to A21</a:t>
-            </a:r>
-            <a:endParaRPr lang="fr-FR" sz="3600" b="1" dirty="0">
-              <a:solidFill>
-                <a:srgbClr val="FFC000"/>
-              </a:solidFill>
-            </a:endParaRPr>
-          </a:p>
-        </p:txBody>
-      </p:sp>
-      <p:cxnSp>
-        <p:nvCxnSpPr>
-          <p:cNvPr id="7" name="Connecteur droit avec flèche 6"/>
-          <p:cNvCxnSpPr/>
-          <p:nvPr/>
-        </p:nvCxnSpPr>
-        <p:spPr>
-          <a:xfrm flipH="1" flipV="1">
-            <a:off x="6768790" y="5620215"/>
-            <a:ext cx="591015" cy="356839"/>
-          </a:xfrm>
-          <a:prstGeom prst="straightConnector1">
-            <a:avLst/>
-          </a:prstGeom>
-          <a:ln w="53975">
-            <a:solidFill>
-              <a:srgbClr val="FFC000"/>
-            </a:solidFill>
-            <a:tailEnd type="arrow"/>
-          </a:ln>
-        </p:spPr>
-        <p:style>
-          <a:lnRef idx="1">
-            <a:schemeClr val="accent1"/>
-          </a:lnRef>
-          <a:fillRef idx="0">
-            <a:schemeClr val="accent1"/>
-          </a:fillRef>
-          <a:effectRef idx="0">
-            <a:schemeClr val="accent1"/>
-          </a:effectRef>
-          <a:fontRef idx="minor">
-            <a:schemeClr val="tx1"/>
-          </a:fontRef>
-        </p:style>
-      </p:cxnSp>
-      <p:sp>
-        <p:nvSpPr>
-          <p:cNvPr id="8" name="ZoneTexte 7"/>
-          <p:cNvSpPr txBox="1"/>
-          <p:nvPr/>
-        </p:nvSpPr>
-        <p:spPr>
-          <a:xfrm>
-            <a:off x="1390187" y="184951"/>
-            <a:ext cx="4676077" cy="646331"/>
-          </a:xfrm>
-          <a:prstGeom prst="rect">
-            <a:avLst/>
-          </a:prstGeom>
-          <a:noFill/>
-        </p:spPr>
-        <p:txBody>
-          <a:bodyPr wrap="square" rtlCol="0">
-            <a:spAutoFit/>
-          </a:bodyPr>
-          <a:lstStyle/>
-          <a:p>
-            <a:r>
-              <a:rPr lang="fr-FR" sz="3600" b="1" dirty="0" err="1" smtClean="0">
-                <a:solidFill>
-                  <a:srgbClr val="FFC000"/>
-                </a:solidFill>
-              </a:rPr>
-              <a:t>Connect</a:t>
-            </a:r>
-            <a:r>
-              <a:rPr lang="fr-FR" sz="3600" b="1" dirty="0" smtClean="0">
-                <a:solidFill>
-                  <a:srgbClr val="FFC000"/>
-                </a:solidFill>
-              </a:rPr>
-              <a:t> A21 to VCC</a:t>
-            </a:r>
-            <a:endParaRPr lang="fr-FR" sz="3600" b="1" dirty="0">
-              <a:solidFill>
-                <a:srgbClr val="FFC000"/>
-              </a:solidFill>
-            </a:endParaRPr>
-          </a:p>
-        </p:txBody>
-      </p:sp>
-      <p:cxnSp>
-        <p:nvCxnSpPr>
-          <p:cNvPr id="9" name="Connecteur droit avec flèche 8"/>
-          <p:cNvCxnSpPr/>
-          <p:nvPr/>
-        </p:nvCxnSpPr>
-        <p:spPr>
-          <a:xfrm flipH="1">
-            <a:off x="2252546" y="769434"/>
-            <a:ext cx="446049" cy="624468"/>
-          </a:xfrm>
-          <a:prstGeom prst="straightConnector1">
-            <a:avLst/>
-          </a:prstGeom>
-          <a:ln w="53975">
-            <a:solidFill>
-              <a:srgbClr val="FFC000"/>
-            </a:solidFill>
-            <a:tailEnd type="arrow"/>
-          </a:ln>
-        </p:spPr>
-        <p:style>
-          <a:lnRef idx="1">
-            <a:schemeClr val="accent1"/>
-          </a:lnRef>
-          <a:fillRef idx="0">
-            <a:schemeClr val="accent1"/>
-          </a:fillRef>
-          <a:effectRef idx="0">
-            <a:schemeClr val="accent1"/>
-          </a:effectRef>
-          <a:fontRef idx="minor">
-            <a:schemeClr val="tx1"/>
-          </a:fontRef>
-        </p:style>
-      </p:cxnSp>
-      <p:sp>
-        <p:nvSpPr>
-          <p:cNvPr id="12" name="ZoneTexte 11"/>
-          <p:cNvSpPr txBox="1"/>
-          <p:nvPr/>
-        </p:nvSpPr>
-        <p:spPr>
-          <a:xfrm rot="4319509">
-            <a:off x="2456987" y="2277662"/>
-            <a:ext cx="1367882" cy="646331"/>
-          </a:xfrm>
-          <a:prstGeom prst="rect">
-            <a:avLst/>
-          </a:prstGeom>
-          <a:noFill/>
-        </p:spPr>
-        <p:txBody>
-          <a:bodyPr wrap="square" rtlCol="0">
-            <a:spAutoFit/>
-          </a:bodyPr>
-          <a:lstStyle/>
-          <a:p>
-            <a:r>
-              <a:rPr lang="fr-FR" sz="3600" b="1" dirty="0" smtClean="0">
-                <a:solidFill>
-                  <a:srgbClr val="FFC000"/>
-                </a:solidFill>
-              </a:rPr>
-              <a:t>6.8k</a:t>
-            </a:r>
-            <a:r>
-              <a:rPr lang="el-GR" sz="3600" b="1" dirty="0" smtClean="0">
-                <a:solidFill>
-                  <a:srgbClr val="FFC000"/>
-                </a:solidFill>
-              </a:rPr>
-              <a:t>Ω</a:t>
-            </a:r>
-            <a:endParaRPr lang="fr-FR" sz="3600" b="1" dirty="0">
-              <a:solidFill>
-                <a:srgbClr val="FFC000"/>
-              </a:solidFill>
-            </a:endParaRPr>
-          </a:p>
-        </p:txBody>
-      </p:sp>
-      <p:cxnSp>
-        <p:nvCxnSpPr>
-          <p:cNvPr id="13" name="Connecteur droit avec flèche 12"/>
-          <p:cNvCxnSpPr/>
-          <p:nvPr/>
-        </p:nvCxnSpPr>
-        <p:spPr>
-          <a:xfrm flipH="1" flipV="1">
-            <a:off x="3854606" y="4624039"/>
-            <a:ext cx="427462" cy="561278"/>
-          </a:xfrm>
-          <a:prstGeom prst="straightConnector1">
-            <a:avLst/>
-          </a:prstGeom>
-          <a:ln w="53975">
-            <a:solidFill>
-              <a:srgbClr val="FFC000"/>
-            </a:solidFill>
-            <a:tailEnd type="arrow"/>
-          </a:ln>
-        </p:spPr>
-        <p:style>
-          <a:lnRef idx="1">
-            <a:schemeClr val="accent1"/>
-          </a:lnRef>
-          <a:fillRef idx="0">
-            <a:schemeClr val="accent1"/>
-          </a:fillRef>
-          <a:effectRef idx="0">
-            <a:schemeClr val="accent1"/>
-          </a:effectRef>
-          <a:fontRef idx="minor">
-            <a:schemeClr val="tx1"/>
-          </a:fontRef>
-        </p:style>
-      </p:cxnSp>
-      <p:sp>
-        <p:nvSpPr>
-          <p:cNvPr id="15" name="ZoneTexte 14"/>
-          <p:cNvSpPr txBox="1"/>
-          <p:nvPr/>
-        </p:nvSpPr>
-        <p:spPr>
-          <a:xfrm>
-            <a:off x="4018159" y="5121225"/>
-            <a:ext cx="1323276" cy="646331"/>
-          </a:xfrm>
-          <a:prstGeom prst="rect">
-            <a:avLst/>
-          </a:prstGeom>
-          <a:noFill/>
-        </p:spPr>
-        <p:txBody>
-          <a:bodyPr wrap="square" rtlCol="0">
-            <a:spAutoFit/>
-          </a:bodyPr>
-          <a:lstStyle/>
-          <a:p>
-            <a:r>
-              <a:rPr lang="fr-FR" sz="3600" b="1" dirty="0" smtClean="0">
-                <a:solidFill>
-                  <a:srgbClr val="FFC000"/>
-                </a:solidFill>
-              </a:rPr>
-              <a:t>VCC</a:t>
-            </a:r>
-            <a:endParaRPr lang="fr-FR" sz="3600" b="1" dirty="0">
-              <a:solidFill>
-                <a:srgbClr val="FFC000"/>
-              </a:solidFill>
-            </a:endParaRPr>
-          </a:p>
-        </p:txBody>
-      </p:sp>
-    </p:spTree>
-  </p:cSld>
-  <p:clrMapOvr>
-    <a:masterClrMapping/>
-  </p:clrMapOvr>
-  <p:timing>
-    <p:tnLst>
-      <p:par>
-        <p:cTn id="1" dur="indefinite" restart="never" nodeType="tmRoot"/>
-      </p:par>
-    </p:tnLst>
-  </p:timing>
-</p:sld>
-</file>
-
-<file path=ppt/slides/slide13.xml><?xml version="1.0" encoding="utf-8"?>
-<p:sld xmlns:a="http://schemas.openxmlformats.org/drawingml/2006/main" xmlns:r="http://schemas.openxmlformats.org/officeDocument/2006/relationships" xmlns:p="http://schemas.openxmlformats.org/presentationml/2006/main">
-  <p:cSld>
-    <p:spTree>
-      <p:nvGrpSpPr>
-        <p:cNvPr id="1" name=""/>
-        <p:cNvGrpSpPr/>
-        <p:nvPr/>
-      </p:nvGrpSpPr>
-      <p:grpSpPr>
-        <a:xfrm>
-          <a:off x="0" y="0"/>
-          <a:ext cx="0" cy="0"/>
-          <a:chOff x="0" y="0"/>
-          <a:chExt cx="0" cy="0"/>
-        </a:xfrm>
-      </p:grpSpPr>
-      <p:pic>
-        <p:nvPicPr>
-          <p:cNvPr id="2050" name="Picture 2" descr="C:\Users\BOICHOT\Downloads\Neo-Geo-Sengoku-2-Red-Blood-main\MVS_bootleg_convert\Detail_on_P1.jpg"/>
-          <p:cNvPicPr>
-            <a:picLocks noChangeAspect="1" noChangeArrowheads="1"/>
-          </p:cNvPicPr>
-          <p:nvPr/>
-        </p:nvPicPr>
-        <p:blipFill>
-          <a:blip r:embed="rId2" cstate="print"/>
-          <a:srcRect/>
-          <a:stretch>
-            <a:fillRect/>
-          </a:stretch>
-        </p:blipFill>
-        <p:spPr bwMode="auto">
-          <a:xfrm>
-            <a:off x="847492" y="0"/>
-            <a:ext cx="10275945" cy="6858000"/>
-          </a:xfrm>
-          <a:prstGeom prst="rect">
-            <a:avLst/>
-          </a:prstGeom>
-          <a:noFill/>
-        </p:spPr>
-      </p:pic>
-      <p:sp>
-        <p:nvSpPr>
-          <p:cNvPr id="5" name="ZoneTexte 4"/>
-          <p:cNvSpPr txBox="1"/>
-          <p:nvPr/>
-        </p:nvSpPr>
-        <p:spPr>
-          <a:xfrm>
-            <a:off x="3668752" y="4248615"/>
-            <a:ext cx="6579219" cy="1015663"/>
-          </a:xfrm>
-          <a:prstGeom prst="rect">
-            <a:avLst/>
-          </a:prstGeom>
-          <a:noFill/>
-        </p:spPr>
-        <p:txBody>
-          <a:bodyPr wrap="square" rtlCol="0">
-            <a:spAutoFit/>
-          </a:bodyPr>
-          <a:lstStyle/>
-          <a:p>
-            <a:r>
-              <a:rPr lang="fr-FR" sz="6000" b="1" dirty="0" smtClean="0">
-                <a:solidFill>
-                  <a:srgbClr val="FFC000"/>
-                </a:solidFill>
-              </a:rPr>
-              <a:t>Mount P1 on socket</a:t>
-            </a:r>
-            <a:endParaRPr lang="fr-FR" sz="6000" b="1" dirty="0">
-              <a:solidFill>
-                <a:srgbClr val="FFC000"/>
-              </a:solidFill>
-            </a:endParaRPr>
-          </a:p>
-        </p:txBody>
-      </p:sp>
-    </p:spTree>
-  </p:cSld>
-  <p:clrMapOvr>
-    <a:masterClrMapping/>
-  </p:clrMapOvr>
-  <p:timing>
-    <p:tnLst>
-      <p:par>
-        <p:cTn id="1" dur="indefinite" restart="never" nodeType="tmRoot"/>
-      </p:par>
-    </p:tnLst>
-  </p:timing>
-</p:sld>
-</file>
-
-<file path=ppt/slides/slide14.xml><?xml version="1.0" encoding="utf-8"?>
-<p:sld xmlns:a="http://schemas.openxmlformats.org/drawingml/2006/main" xmlns:r="http://schemas.openxmlformats.org/officeDocument/2006/relationships" xmlns:p="http://schemas.openxmlformats.org/presentationml/2006/main">
-  <p:cSld>
-    <p:spTree>
-      <p:nvGrpSpPr>
-        <p:cNvPr id="1" name=""/>
-        <p:cNvGrpSpPr/>
-        <p:nvPr/>
-      </p:nvGrpSpPr>
-      <p:grpSpPr>
-        <a:xfrm>
-          <a:off x="0" y="0"/>
-          <a:ext cx="0" cy="0"/>
-          <a:chOff x="0" y="0"/>
-          <a:chExt cx="0" cy="0"/>
-        </a:xfrm>
-      </p:grpSpPr>
-      <p:pic>
-        <p:nvPicPr>
-          <p:cNvPr id="1026" name="Picture 2" descr="C:\Users\BOICHOT\Downloads\Neo-Geo-Sengoku-2-Red-Blood-main\MVS_bootleg_convert\Harware_necessary.jpg"/>
-          <p:cNvPicPr>
-            <a:picLocks noChangeAspect="1" noChangeArrowheads="1"/>
-          </p:cNvPicPr>
-          <p:nvPr/>
-        </p:nvPicPr>
-        <p:blipFill>
-          <a:blip r:embed="rId2" cstate="print"/>
-          <a:srcRect/>
-          <a:stretch>
-            <a:fillRect/>
-          </a:stretch>
-        </p:blipFill>
-        <p:spPr bwMode="auto">
-          <a:xfrm>
-            <a:off x="0" y="278780"/>
-            <a:ext cx="12160588" cy="6266985"/>
-          </a:xfrm>
-          <a:prstGeom prst="rect">
-            <a:avLst/>
-          </a:prstGeom>
-          <a:noFill/>
-        </p:spPr>
-      </p:pic>
-      <p:sp>
-        <p:nvSpPr>
-          <p:cNvPr id="5" name="ZoneTexte 4"/>
-          <p:cNvSpPr txBox="1"/>
-          <p:nvPr/>
-        </p:nvSpPr>
-        <p:spPr>
-          <a:xfrm>
-            <a:off x="802887" y="5586761"/>
-            <a:ext cx="7738945" cy="707886"/>
-          </a:xfrm>
-          <a:prstGeom prst="rect">
-            <a:avLst/>
-          </a:prstGeom>
-          <a:noFill/>
-        </p:spPr>
-        <p:txBody>
-          <a:bodyPr wrap="square" rtlCol="0">
-            <a:spAutoFit/>
-          </a:bodyPr>
-          <a:lstStyle/>
-          <a:p>
-            <a:r>
-              <a:rPr lang="fr-FR" sz="4000" b="1" dirty="0" smtClean="0">
-                <a:solidFill>
-                  <a:srgbClr val="FFFF00"/>
-                </a:solidFill>
-              </a:rPr>
-              <a:t>GQ 4x4 </a:t>
-            </a:r>
-            <a:r>
-              <a:rPr lang="fr-FR" sz="4000" b="1" dirty="0" err="1" smtClean="0">
-                <a:solidFill>
-                  <a:srgbClr val="FFFF00"/>
-                </a:solidFill>
-              </a:rPr>
-              <a:t>with</a:t>
-            </a:r>
-            <a:r>
-              <a:rPr lang="fr-FR" sz="4000" b="1" dirty="0" smtClean="0">
-                <a:solidFill>
-                  <a:srgbClr val="FFFF00"/>
-                </a:solidFill>
-              </a:rPr>
-              <a:t> ADP-054 </a:t>
-            </a:r>
-            <a:r>
-              <a:rPr lang="fr-FR" sz="4000" b="1" dirty="0" err="1" smtClean="0">
-                <a:solidFill>
-                  <a:srgbClr val="FFFF00"/>
-                </a:solidFill>
-              </a:rPr>
-              <a:t>adapater</a:t>
-            </a:r>
-            <a:endParaRPr lang="fr-FR" sz="4000" b="1" dirty="0">
-              <a:solidFill>
-                <a:srgbClr val="FFFF00"/>
-              </a:solidFill>
-            </a:endParaRPr>
-          </a:p>
-        </p:txBody>
-      </p:sp>
-      <p:sp>
-        <p:nvSpPr>
-          <p:cNvPr id="6" name="ZoneTexte 5"/>
-          <p:cNvSpPr txBox="1"/>
-          <p:nvPr/>
-        </p:nvSpPr>
-        <p:spPr>
-          <a:xfrm>
-            <a:off x="8987883" y="1059366"/>
-            <a:ext cx="3204117" cy="707886"/>
-          </a:xfrm>
-          <a:prstGeom prst="rect">
-            <a:avLst/>
-          </a:prstGeom>
-          <a:noFill/>
-        </p:spPr>
-        <p:txBody>
-          <a:bodyPr wrap="square" rtlCol="0">
-            <a:spAutoFit/>
-          </a:bodyPr>
-          <a:lstStyle/>
-          <a:p>
-            <a:r>
-              <a:rPr lang="fr-FR" sz="4000" b="1" dirty="0" err="1" smtClean="0">
-                <a:solidFill>
-                  <a:srgbClr val="FFFF00"/>
-                </a:solidFill>
-              </a:rPr>
-              <a:t>Mega</a:t>
-            </a:r>
-            <a:r>
-              <a:rPr lang="fr-FR" sz="4000" b="1" dirty="0" smtClean="0">
-                <a:solidFill>
-                  <a:srgbClr val="FFFF00"/>
-                </a:solidFill>
-              </a:rPr>
-              <a:t> Burner</a:t>
-            </a:r>
-            <a:endParaRPr lang="fr-FR" sz="4000" b="1" dirty="0">
-              <a:solidFill>
-                <a:srgbClr val="FFFF00"/>
-              </a:solidFill>
-            </a:endParaRPr>
-          </a:p>
-        </p:txBody>
-      </p:sp>
-    </p:spTree>
   </p:cSld>
   <p:clrMapOvr>
     <a:masterClrMapping/>
@@ -8732,7 +4695,7 @@
     </p:spTree>
     <p:extLst>
       <p:ext uri="{BB962C8B-B14F-4D97-AF65-F5344CB8AC3E}">
-        <p14:creationId xmlns="" xmlns:p14="http://schemas.microsoft.com/office/powerpoint/2010/main" val="3760226372"/>
+        <p14:creationId xmlns:p14="http://schemas.microsoft.com/office/powerpoint/2010/main" val="3760226372"/>
       </p:ext>
     </p:extLst>
   </p:cSld>
@@ -8826,110 +4789,1620 @@
       </p:grpSpPr>
       <p:pic>
         <p:nvPicPr>
-          <p:cNvPr id="4" name="Image 3"/>
+          <p:cNvPr id="1026" name="Picture 2"/>
           <p:cNvPicPr>
-            <a:picLocks noChangeAspect="1"/>
+            <a:picLocks noChangeAspect="1" noChangeArrowheads="1"/>
           </p:cNvPicPr>
           <p:nvPr/>
         </p:nvPicPr>
         <p:blipFill>
           <a:blip r:embed="rId2" cstate="print"/>
+          <a:srcRect/>
           <a:stretch>
             <a:fillRect/>
           </a:stretch>
         </p:blipFill>
-        <p:spPr>
-          <a:xfrm>
-            <a:off x="124691" y="72870"/>
-            <a:ext cx="7198822" cy="3518227"/>
-          </a:xfrm>
-          <a:prstGeom prst="rect">
-            <a:avLst/>
-          </a:prstGeom>
+        <p:spPr bwMode="auto">
+          <a:xfrm>
+            <a:off x="3921162" y="227207"/>
+            <a:ext cx="3812704" cy="6452374"/>
+          </a:xfrm>
+          <a:prstGeom prst="rect">
+            <a:avLst/>
+          </a:prstGeom>
+          <a:noFill/>
+          <a:ln w="9525">
+            <a:noFill/>
+            <a:miter lim="800000"/>
+            <a:headEnd/>
+            <a:tailEnd/>
+          </a:ln>
+          <a:effectLst/>
         </p:spPr>
       </p:pic>
-      <p:pic>
-        <p:nvPicPr>
-          <p:cNvPr id="5" name="Image 4"/>
-          <p:cNvPicPr>
-            <a:picLocks noChangeAspect="1"/>
-          </p:cNvPicPr>
-          <p:nvPr/>
-        </p:nvPicPr>
-        <p:blipFill>
-          <a:blip r:embed="rId3" cstate="print"/>
-          <a:stretch>
-            <a:fillRect/>
-          </a:stretch>
-        </p:blipFill>
-        <p:spPr>
-          <a:xfrm>
-            <a:off x="7248699" y="360336"/>
-            <a:ext cx="4256116" cy="3112682"/>
-          </a:xfrm>
-          <a:prstGeom prst="rect">
-            <a:avLst/>
-          </a:prstGeom>
-        </p:spPr>
-      </p:pic>
-      <p:pic>
-        <p:nvPicPr>
-          <p:cNvPr id="9" name="Image 8"/>
-          <p:cNvPicPr>
-            <a:picLocks noChangeAspect="1"/>
-          </p:cNvPicPr>
-          <p:nvPr/>
-        </p:nvPicPr>
-        <p:blipFill>
-          <a:blip r:embed="rId4" cstate="print"/>
-          <a:stretch>
-            <a:fillRect/>
-          </a:stretch>
-        </p:blipFill>
-        <p:spPr>
-          <a:xfrm>
-            <a:off x="5187142" y="3483032"/>
-            <a:ext cx="6833062" cy="3374967"/>
-          </a:xfrm>
-          <a:prstGeom prst="rect">
-            <a:avLst/>
-          </a:prstGeom>
-        </p:spPr>
-      </p:pic>
-      <p:pic>
-        <p:nvPicPr>
-          <p:cNvPr id="10" name="Image 9"/>
-          <p:cNvPicPr>
-            <a:picLocks noChangeAspect="1"/>
-          </p:cNvPicPr>
-          <p:nvPr/>
-        </p:nvPicPr>
-        <p:blipFill>
-          <a:blip r:embed="rId5" cstate="print"/>
-          <a:stretch>
-            <a:fillRect/>
-          </a:stretch>
-        </p:blipFill>
-        <p:spPr>
-          <a:xfrm>
-            <a:off x="3017673" y="3453826"/>
-            <a:ext cx="1787083" cy="3329360"/>
-          </a:xfrm>
-          <a:prstGeom prst="rect">
-            <a:avLst/>
-          </a:prstGeom>
-        </p:spPr>
-      </p:pic>
+      <p:sp>
+        <p:nvSpPr>
+          <p:cNvPr id="6" name="ZoneTexte 5"/>
+          <p:cNvSpPr txBox="1"/>
+          <p:nvPr/>
+        </p:nvSpPr>
+        <p:spPr>
+          <a:xfrm>
+            <a:off x="3222667" y="3111190"/>
+            <a:ext cx="546410" cy="369332"/>
+          </a:xfrm>
+          <a:prstGeom prst="rect">
+            <a:avLst/>
+          </a:prstGeom>
+          <a:noFill/>
+        </p:spPr>
+        <p:txBody>
+          <a:bodyPr wrap="square" rtlCol="0">
+            <a:spAutoFit/>
+          </a:bodyPr>
+          <a:lstStyle/>
+          <a:p>
+            <a:r>
+              <a:rPr lang="fr-FR" dirty="0" smtClean="0">
+                <a:solidFill>
+                  <a:srgbClr val="FF0000"/>
+                </a:solidFill>
+              </a:rPr>
+              <a:t>A0</a:t>
+            </a:r>
+            <a:endParaRPr lang="fr-FR" dirty="0">
+              <a:solidFill>
+                <a:srgbClr val="FF0000"/>
+              </a:solidFill>
+            </a:endParaRPr>
+          </a:p>
+        </p:txBody>
+      </p:sp>
+      <p:sp>
+        <p:nvSpPr>
+          <p:cNvPr id="7" name="ZoneTexte 6"/>
+          <p:cNvSpPr txBox="1"/>
+          <p:nvPr/>
+        </p:nvSpPr>
+        <p:spPr>
+          <a:xfrm>
+            <a:off x="3230103" y="2828693"/>
+            <a:ext cx="546410" cy="369332"/>
+          </a:xfrm>
+          <a:prstGeom prst="rect">
+            <a:avLst/>
+          </a:prstGeom>
+          <a:noFill/>
+        </p:spPr>
+        <p:txBody>
+          <a:bodyPr wrap="square" rtlCol="0">
+            <a:spAutoFit/>
+          </a:bodyPr>
+          <a:lstStyle/>
+          <a:p>
+            <a:r>
+              <a:rPr lang="fr-FR" dirty="0" smtClean="0">
+                <a:solidFill>
+                  <a:srgbClr val="FF0000"/>
+                </a:solidFill>
+              </a:rPr>
+              <a:t>A1</a:t>
+            </a:r>
+            <a:endParaRPr lang="fr-FR" dirty="0">
+              <a:solidFill>
+                <a:srgbClr val="FF0000"/>
+              </a:solidFill>
+            </a:endParaRPr>
+          </a:p>
+        </p:txBody>
+      </p:sp>
+      <p:sp>
+        <p:nvSpPr>
+          <p:cNvPr id="8" name="ZoneTexte 7"/>
+          <p:cNvSpPr txBox="1"/>
+          <p:nvPr/>
+        </p:nvSpPr>
+        <p:spPr>
+          <a:xfrm>
+            <a:off x="3230102" y="2538762"/>
+            <a:ext cx="546410" cy="369332"/>
+          </a:xfrm>
+          <a:prstGeom prst="rect">
+            <a:avLst/>
+          </a:prstGeom>
+          <a:noFill/>
+        </p:spPr>
+        <p:txBody>
+          <a:bodyPr wrap="square" rtlCol="0">
+            <a:spAutoFit/>
+          </a:bodyPr>
+          <a:lstStyle/>
+          <a:p>
+            <a:r>
+              <a:rPr lang="fr-FR" dirty="0" smtClean="0">
+                <a:solidFill>
+                  <a:srgbClr val="FF0000"/>
+                </a:solidFill>
+              </a:rPr>
+              <a:t>A2</a:t>
+            </a:r>
+          </a:p>
+        </p:txBody>
+      </p:sp>
+      <p:sp>
+        <p:nvSpPr>
+          <p:cNvPr id="9" name="ZoneTexte 8"/>
+          <p:cNvSpPr txBox="1"/>
+          <p:nvPr/>
+        </p:nvSpPr>
+        <p:spPr>
+          <a:xfrm>
+            <a:off x="3230102" y="2293434"/>
+            <a:ext cx="546410" cy="369332"/>
+          </a:xfrm>
+          <a:prstGeom prst="rect">
+            <a:avLst/>
+          </a:prstGeom>
+          <a:noFill/>
+        </p:spPr>
+        <p:txBody>
+          <a:bodyPr wrap="square" rtlCol="0">
+            <a:spAutoFit/>
+          </a:bodyPr>
+          <a:lstStyle/>
+          <a:p>
+            <a:r>
+              <a:rPr lang="fr-FR" dirty="0" smtClean="0">
+                <a:solidFill>
+                  <a:srgbClr val="FF0000"/>
+                </a:solidFill>
+              </a:rPr>
+              <a:t>A3</a:t>
+            </a:r>
+            <a:endParaRPr lang="fr-FR" dirty="0">
+              <a:solidFill>
+                <a:srgbClr val="FF0000"/>
+              </a:solidFill>
+            </a:endParaRPr>
+          </a:p>
+        </p:txBody>
+      </p:sp>
+      <p:sp>
+        <p:nvSpPr>
+          <p:cNvPr id="10" name="ZoneTexte 9"/>
+          <p:cNvSpPr txBox="1"/>
+          <p:nvPr/>
+        </p:nvSpPr>
+        <p:spPr>
+          <a:xfrm>
+            <a:off x="3230100" y="1992351"/>
+            <a:ext cx="546410" cy="369332"/>
+          </a:xfrm>
+          <a:prstGeom prst="rect">
+            <a:avLst/>
+          </a:prstGeom>
+          <a:noFill/>
+        </p:spPr>
+        <p:txBody>
+          <a:bodyPr wrap="square" rtlCol="0">
+            <a:spAutoFit/>
+          </a:bodyPr>
+          <a:lstStyle/>
+          <a:p>
+            <a:r>
+              <a:rPr lang="fr-FR" dirty="0" smtClean="0">
+                <a:solidFill>
+                  <a:srgbClr val="FF0000"/>
+                </a:solidFill>
+              </a:rPr>
+              <a:t>A4</a:t>
+            </a:r>
+            <a:endParaRPr lang="fr-FR" dirty="0">
+              <a:solidFill>
+                <a:srgbClr val="FF0000"/>
+              </a:solidFill>
+            </a:endParaRPr>
+          </a:p>
+        </p:txBody>
+      </p:sp>
+      <p:sp>
+        <p:nvSpPr>
+          <p:cNvPr id="11" name="ZoneTexte 10"/>
+          <p:cNvSpPr txBox="1"/>
+          <p:nvPr/>
+        </p:nvSpPr>
+        <p:spPr>
+          <a:xfrm>
+            <a:off x="3230101" y="1724721"/>
+            <a:ext cx="546410" cy="369332"/>
+          </a:xfrm>
+          <a:prstGeom prst="rect">
+            <a:avLst/>
+          </a:prstGeom>
+          <a:noFill/>
+        </p:spPr>
+        <p:txBody>
+          <a:bodyPr wrap="square" rtlCol="0">
+            <a:spAutoFit/>
+          </a:bodyPr>
+          <a:lstStyle/>
+          <a:p>
+            <a:r>
+              <a:rPr lang="fr-FR" dirty="0" smtClean="0">
+                <a:solidFill>
+                  <a:srgbClr val="FF0000"/>
+                </a:solidFill>
+              </a:rPr>
+              <a:t>A5</a:t>
+            </a:r>
+            <a:endParaRPr lang="fr-FR" dirty="0">
+              <a:solidFill>
+                <a:srgbClr val="FF0000"/>
+              </a:solidFill>
+            </a:endParaRPr>
+          </a:p>
+        </p:txBody>
+      </p:sp>
+      <p:sp>
+        <p:nvSpPr>
+          <p:cNvPr id="12" name="ZoneTexte 11"/>
+          <p:cNvSpPr txBox="1"/>
+          <p:nvPr/>
+        </p:nvSpPr>
+        <p:spPr>
+          <a:xfrm>
+            <a:off x="3226384" y="1464525"/>
+            <a:ext cx="546410" cy="369332"/>
+          </a:xfrm>
+          <a:prstGeom prst="rect">
+            <a:avLst/>
+          </a:prstGeom>
+          <a:noFill/>
+        </p:spPr>
+        <p:txBody>
+          <a:bodyPr wrap="square" rtlCol="0">
+            <a:spAutoFit/>
+          </a:bodyPr>
+          <a:lstStyle/>
+          <a:p>
+            <a:r>
+              <a:rPr lang="fr-FR" dirty="0" smtClean="0">
+                <a:solidFill>
+                  <a:srgbClr val="FF0000"/>
+                </a:solidFill>
+              </a:rPr>
+              <a:t>A6</a:t>
+            </a:r>
+            <a:endParaRPr lang="fr-FR" dirty="0">
+              <a:solidFill>
+                <a:srgbClr val="FF0000"/>
+              </a:solidFill>
+            </a:endParaRPr>
+          </a:p>
+        </p:txBody>
+      </p:sp>
+      <p:sp>
+        <p:nvSpPr>
+          <p:cNvPr id="13" name="ZoneTexte 12"/>
+          <p:cNvSpPr txBox="1"/>
+          <p:nvPr/>
+        </p:nvSpPr>
+        <p:spPr>
+          <a:xfrm>
+            <a:off x="3237536" y="1196898"/>
+            <a:ext cx="546410" cy="369332"/>
+          </a:xfrm>
+          <a:prstGeom prst="rect">
+            <a:avLst/>
+          </a:prstGeom>
+          <a:noFill/>
+        </p:spPr>
+        <p:txBody>
+          <a:bodyPr wrap="square" rtlCol="0">
+            <a:spAutoFit/>
+          </a:bodyPr>
+          <a:lstStyle/>
+          <a:p>
+            <a:r>
+              <a:rPr lang="fr-FR" dirty="0" smtClean="0">
+                <a:solidFill>
+                  <a:srgbClr val="FF0000"/>
+                </a:solidFill>
+              </a:rPr>
+              <a:t>A7</a:t>
+            </a:r>
+            <a:endParaRPr lang="fr-FR" dirty="0">
+              <a:solidFill>
+                <a:srgbClr val="FF0000"/>
+              </a:solidFill>
+            </a:endParaRPr>
+          </a:p>
+        </p:txBody>
+      </p:sp>
+      <p:sp>
+        <p:nvSpPr>
+          <p:cNvPr id="14" name="ZoneTexte 13"/>
+          <p:cNvSpPr txBox="1"/>
+          <p:nvPr/>
+        </p:nvSpPr>
+        <p:spPr>
+          <a:xfrm>
+            <a:off x="7764919" y="840057"/>
+            <a:ext cx="546410" cy="369332"/>
+          </a:xfrm>
+          <a:prstGeom prst="rect">
+            <a:avLst/>
+          </a:prstGeom>
+          <a:noFill/>
+        </p:spPr>
+        <p:txBody>
+          <a:bodyPr wrap="square" rtlCol="0">
+            <a:spAutoFit/>
+          </a:bodyPr>
+          <a:lstStyle/>
+          <a:p>
+            <a:r>
+              <a:rPr lang="fr-FR" dirty="0" smtClean="0">
+                <a:solidFill>
+                  <a:srgbClr val="FF0000"/>
+                </a:solidFill>
+              </a:rPr>
+              <a:t>A8</a:t>
+            </a:r>
+            <a:endParaRPr lang="fr-FR" dirty="0">
+              <a:solidFill>
+                <a:srgbClr val="FF0000"/>
+              </a:solidFill>
+            </a:endParaRPr>
+          </a:p>
+        </p:txBody>
+      </p:sp>
+      <p:sp>
+        <p:nvSpPr>
+          <p:cNvPr id="16" name="ZoneTexte 15"/>
+          <p:cNvSpPr txBox="1"/>
+          <p:nvPr/>
+        </p:nvSpPr>
+        <p:spPr>
+          <a:xfrm>
+            <a:off x="7772356" y="1115122"/>
+            <a:ext cx="546410" cy="369332"/>
+          </a:xfrm>
+          <a:prstGeom prst="rect">
+            <a:avLst/>
+          </a:prstGeom>
+          <a:noFill/>
+        </p:spPr>
+        <p:txBody>
+          <a:bodyPr wrap="square" rtlCol="0">
+            <a:spAutoFit/>
+          </a:bodyPr>
+          <a:lstStyle/>
+          <a:p>
+            <a:r>
+              <a:rPr lang="fr-FR" dirty="0" smtClean="0">
+                <a:solidFill>
+                  <a:srgbClr val="FF0000"/>
+                </a:solidFill>
+              </a:rPr>
+              <a:t>A9</a:t>
+            </a:r>
+            <a:endParaRPr lang="fr-FR" dirty="0">
+              <a:solidFill>
+                <a:srgbClr val="FF0000"/>
+              </a:solidFill>
+            </a:endParaRPr>
+          </a:p>
+        </p:txBody>
+      </p:sp>
+      <p:sp>
+        <p:nvSpPr>
+          <p:cNvPr id="17" name="ZoneTexte 16"/>
+          <p:cNvSpPr txBox="1"/>
+          <p:nvPr/>
+        </p:nvSpPr>
+        <p:spPr>
+          <a:xfrm>
+            <a:off x="7761203" y="1393902"/>
+            <a:ext cx="747130" cy="369332"/>
+          </a:xfrm>
+          <a:prstGeom prst="rect">
+            <a:avLst/>
+          </a:prstGeom>
+          <a:noFill/>
+        </p:spPr>
+        <p:txBody>
+          <a:bodyPr wrap="square" rtlCol="0">
+            <a:spAutoFit/>
+          </a:bodyPr>
+          <a:lstStyle/>
+          <a:p>
+            <a:r>
+              <a:rPr lang="fr-FR" dirty="0" smtClean="0">
+                <a:solidFill>
+                  <a:srgbClr val="FF0000"/>
+                </a:solidFill>
+              </a:rPr>
+              <a:t>A10</a:t>
+            </a:r>
+          </a:p>
+        </p:txBody>
+      </p:sp>
+      <p:sp>
+        <p:nvSpPr>
+          <p:cNvPr id="18" name="ZoneTexte 17"/>
+          <p:cNvSpPr txBox="1"/>
+          <p:nvPr/>
+        </p:nvSpPr>
+        <p:spPr>
+          <a:xfrm>
+            <a:off x="7757485" y="1680115"/>
+            <a:ext cx="747130" cy="369332"/>
+          </a:xfrm>
+          <a:prstGeom prst="rect">
+            <a:avLst/>
+          </a:prstGeom>
+          <a:noFill/>
+        </p:spPr>
+        <p:txBody>
+          <a:bodyPr wrap="square" rtlCol="0">
+            <a:spAutoFit/>
+          </a:bodyPr>
+          <a:lstStyle/>
+          <a:p>
+            <a:r>
+              <a:rPr lang="fr-FR" dirty="0" smtClean="0">
+                <a:solidFill>
+                  <a:srgbClr val="FF0000"/>
+                </a:solidFill>
+              </a:rPr>
+              <a:t>A11</a:t>
+            </a:r>
+          </a:p>
+        </p:txBody>
+      </p:sp>
+      <p:sp>
+        <p:nvSpPr>
+          <p:cNvPr id="19" name="ZoneTexte 18"/>
+          <p:cNvSpPr txBox="1"/>
+          <p:nvPr/>
+        </p:nvSpPr>
+        <p:spPr>
+          <a:xfrm>
+            <a:off x="7757486" y="1958895"/>
+            <a:ext cx="747130" cy="369332"/>
+          </a:xfrm>
+          <a:prstGeom prst="rect">
+            <a:avLst/>
+          </a:prstGeom>
+          <a:noFill/>
+        </p:spPr>
+        <p:txBody>
+          <a:bodyPr wrap="square" rtlCol="0">
+            <a:spAutoFit/>
+          </a:bodyPr>
+          <a:lstStyle/>
+          <a:p>
+            <a:r>
+              <a:rPr lang="fr-FR" dirty="0" smtClean="0">
+                <a:solidFill>
+                  <a:srgbClr val="FF0000"/>
+                </a:solidFill>
+              </a:rPr>
+              <a:t>A12</a:t>
+            </a:r>
+          </a:p>
+        </p:txBody>
+      </p:sp>
+      <p:sp>
+        <p:nvSpPr>
+          <p:cNvPr id="20" name="ZoneTexte 19"/>
+          <p:cNvSpPr txBox="1"/>
+          <p:nvPr/>
+        </p:nvSpPr>
+        <p:spPr>
+          <a:xfrm>
+            <a:off x="7746335" y="2215375"/>
+            <a:ext cx="747130" cy="369332"/>
+          </a:xfrm>
+          <a:prstGeom prst="rect">
+            <a:avLst/>
+          </a:prstGeom>
+          <a:noFill/>
+        </p:spPr>
+        <p:txBody>
+          <a:bodyPr wrap="square" rtlCol="0">
+            <a:spAutoFit/>
+          </a:bodyPr>
+          <a:lstStyle/>
+          <a:p>
+            <a:r>
+              <a:rPr lang="fr-FR" dirty="0" smtClean="0">
+                <a:solidFill>
+                  <a:srgbClr val="FF0000"/>
+                </a:solidFill>
+              </a:rPr>
+              <a:t>A13</a:t>
+            </a:r>
+          </a:p>
+        </p:txBody>
+      </p:sp>
+      <p:sp>
+        <p:nvSpPr>
+          <p:cNvPr id="21" name="ZoneTexte 20"/>
+          <p:cNvSpPr txBox="1"/>
+          <p:nvPr/>
+        </p:nvSpPr>
+        <p:spPr>
+          <a:xfrm>
+            <a:off x="7746333" y="2516457"/>
+            <a:ext cx="747130" cy="369332"/>
+          </a:xfrm>
+          <a:prstGeom prst="rect">
+            <a:avLst/>
+          </a:prstGeom>
+          <a:noFill/>
+        </p:spPr>
+        <p:txBody>
+          <a:bodyPr wrap="square" rtlCol="0">
+            <a:spAutoFit/>
+          </a:bodyPr>
+          <a:lstStyle/>
+          <a:p>
+            <a:r>
+              <a:rPr lang="fr-FR" dirty="0" smtClean="0">
+                <a:solidFill>
+                  <a:srgbClr val="FF0000"/>
+                </a:solidFill>
+              </a:rPr>
+              <a:t>A14</a:t>
+            </a:r>
+          </a:p>
+        </p:txBody>
+      </p:sp>
+      <p:sp>
+        <p:nvSpPr>
+          <p:cNvPr id="22" name="ZoneTexte 21"/>
+          <p:cNvSpPr txBox="1"/>
+          <p:nvPr/>
+        </p:nvSpPr>
+        <p:spPr>
+          <a:xfrm>
+            <a:off x="7746335" y="2772935"/>
+            <a:ext cx="747130" cy="369332"/>
+          </a:xfrm>
+          <a:prstGeom prst="rect">
+            <a:avLst/>
+          </a:prstGeom>
+          <a:noFill/>
+        </p:spPr>
+        <p:txBody>
+          <a:bodyPr wrap="square" rtlCol="0">
+            <a:spAutoFit/>
+          </a:bodyPr>
+          <a:lstStyle/>
+          <a:p>
+            <a:r>
+              <a:rPr lang="fr-FR" dirty="0" smtClean="0">
+                <a:solidFill>
+                  <a:srgbClr val="FF0000"/>
+                </a:solidFill>
+              </a:rPr>
+              <a:t>A15</a:t>
+            </a:r>
+          </a:p>
+        </p:txBody>
+      </p:sp>
+      <p:sp>
+        <p:nvSpPr>
+          <p:cNvPr id="23" name="ZoneTexte 22"/>
+          <p:cNvSpPr txBox="1"/>
+          <p:nvPr/>
+        </p:nvSpPr>
+        <p:spPr>
+          <a:xfrm>
+            <a:off x="7731468" y="3047998"/>
+            <a:ext cx="747130" cy="369332"/>
+          </a:xfrm>
+          <a:prstGeom prst="rect">
+            <a:avLst/>
+          </a:prstGeom>
+          <a:noFill/>
+        </p:spPr>
+        <p:txBody>
+          <a:bodyPr wrap="square" rtlCol="0">
+            <a:spAutoFit/>
+          </a:bodyPr>
+          <a:lstStyle/>
+          <a:p>
+            <a:r>
+              <a:rPr lang="fr-FR" dirty="0" smtClean="0">
+                <a:solidFill>
+                  <a:srgbClr val="FF0000"/>
+                </a:solidFill>
+              </a:rPr>
+              <a:t>D49</a:t>
+            </a:r>
+          </a:p>
+        </p:txBody>
+      </p:sp>
+      <p:sp>
+        <p:nvSpPr>
+          <p:cNvPr id="24" name="ZoneTexte 23"/>
+          <p:cNvSpPr txBox="1"/>
+          <p:nvPr/>
+        </p:nvSpPr>
+        <p:spPr>
+          <a:xfrm>
+            <a:off x="3233814" y="925548"/>
+            <a:ext cx="669076" cy="369332"/>
+          </a:xfrm>
+          <a:prstGeom prst="rect">
+            <a:avLst/>
+          </a:prstGeom>
+          <a:noFill/>
+        </p:spPr>
+        <p:txBody>
+          <a:bodyPr wrap="square" rtlCol="0">
+            <a:spAutoFit/>
+          </a:bodyPr>
+          <a:lstStyle/>
+          <a:p>
+            <a:r>
+              <a:rPr lang="fr-FR" dirty="0" smtClean="0">
+                <a:solidFill>
+                  <a:srgbClr val="FF0000"/>
+                </a:solidFill>
+              </a:rPr>
+              <a:t>D48</a:t>
+            </a:r>
+          </a:p>
+        </p:txBody>
+      </p:sp>
+      <p:sp>
+        <p:nvSpPr>
+          <p:cNvPr id="25" name="ZoneTexte 24"/>
+          <p:cNvSpPr txBox="1"/>
+          <p:nvPr/>
+        </p:nvSpPr>
+        <p:spPr>
+          <a:xfrm>
+            <a:off x="3241248" y="620749"/>
+            <a:ext cx="669076" cy="369332"/>
+          </a:xfrm>
+          <a:prstGeom prst="rect">
+            <a:avLst/>
+          </a:prstGeom>
+          <a:noFill/>
+        </p:spPr>
+        <p:txBody>
+          <a:bodyPr wrap="square" rtlCol="0">
+            <a:spAutoFit/>
+          </a:bodyPr>
+          <a:lstStyle/>
+          <a:p>
+            <a:r>
+              <a:rPr lang="fr-FR" dirty="0" smtClean="0">
+                <a:solidFill>
+                  <a:srgbClr val="FF0000"/>
+                </a:solidFill>
+              </a:rPr>
+              <a:t>D47</a:t>
+            </a:r>
+          </a:p>
+        </p:txBody>
+      </p:sp>
+      <p:sp>
+        <p:nvSpPr>
+          <p:cNvPr id="26" name="ZoneTexte 25"/>
+          <p:cNvSpPr txBox="1"/>
+          <p:nvPr/>
+        </p:nvSpPr>
+        <p:spPr>
+          <a:xfrm>
+            <a:off x="7753771" y="572426"/>
+            <a:ext cx="669076" cy="369332"/>
+          </a:xfrm>
+          <a:prstGeom prst="rect">
+            <a:avLst/>
+          </a:prstGeom>
+          <a:noFill/>
+        </p:spPr>
+        <p:txBody>
+          <a:bodyPr wrap="square" rtlCol="0">
+            <a:spAutoFit/>
+          </a:bodyPr>
+          <a:lstStyle/>
+          <a:p>
+            <a:r>
+              <a:rPr lang="fr-FR" dirty="0" smtClean="0">
+                <a:solidFill>
+                  <a:srgbClr val="FF0000"/>
+                </a:solidFill>
+              </a:rPr>
+              <a:t>D46</a:t>
+            </a:r>
+          </a:p>
+        </p:txBody>
+      </p:sp>
+      <p:sp>
+        <p:nvSpPr>
+          <p:cNvPr id="27" name="ZoneTexte 26"/>
+          <p:cNvSpPr txBox="1"/>
+          <p:nvPr/>
+        </p:nvSpPr>
+        <p:spPr>
+          <a:xfrm>
+            <a:off x="7761206" y="301080"/>
+            <a:ext cx="669076" cy="369332"/>
+          </a:xfrm>
+          <a:prstGeom prst="rect">
+            <a:avLst/>
+          </a:prstGeom>
+          <a:noFill/>
+        </p:spPr>
+        <p:txBody>
+          <a:bodyPr wrap="square" rtlCol="0">
+            <a:spAutoFit/>
+          </a:bodyPr>
+          <a:lstStyle/>
+          <a:p>
+            <a:r>
+              <a:rPr lang="fr-FR" dirty="0" smtClean="0">
+                <a:solidFill>
+                  <a:srgbClr val="FF0000"/>
+                </a:solidFill>
+              </a:rPr>
+              <a:t>D45</a:t>
+            </a:r>
+          </a:p>
+        </p:txBody>
+      </p:sp>
+      <p:sp>
+        <p:nvSpPr>
+          <p:cNvPr id="28" name="ZoneTexte 27"/>
+          <p:cNvSpPr txBox="1"/>
+          <p:nvPr/>
+        </p:nvSpPr>
+        <p:spPr>
+          <a:xfrm>
+            <a:off x="7731472" y="3326778"/>
+            <a:ext cx="1055648" cy="369332"/>
+          </a:xfrm>
+          <a:prstGeom prst="rect">
+            <a:avLst/>
+          </a:prstGeom>
+          <a:noFill/>
+        </p:spPr>
+        <p:txBody>
+          <a:bodyPr wrap="square" rtlCol="0">
+            <a:spAutoFit/>
+          </a:bodyPr>
+          <a:lstStyle/>
+          <a:p>
+            <a:r>
+              <a:rPr lang="fr-FR" dirty="0" smtClean="0">
+                <a:solidFill>
+                  <a:srgbClr val="FF0000"/>
+                </a:solidFill>
+              </a:rPr>
+              <a:t>D6</a:t>
+            </a:r>
+          </a:p>
+        </p:txBody>
+      </p:sp>
+      <p:sp>
+        <p:nvSpPr>
+          <p:cNvPr id="29" name="ZoneTexte 28"/>
+          <p:cNvSpPr txBox="1"/>
+          <p:nvPr/>
+        </p:nvSpPr>
+        <p:spPr>
+          <a:xfrm>
+            <a:off x="3256117" y="323382"/>
+            <a:ext cx="557560" cy="369332"/>
+          </a:xfrm>
+          <a:prstGeom prst="rect">
+            <a:avLst/>
+          </a:prstGeom>
+          <a:noFill/>
+        </p:spPr>
+        <p:txBody>
+          <a:bodyPr wrap="square" rtlCol="0">
+            <a:spAutoFit/>
+          </a:bodyPr>
+          <a:lstStyle/>
+          <a:p>
+            <a:r>
+              <a:rPr lang="fr-FR" dirty="0" smtClean="0">
+                <a:solidFill>
+                  <a:srgbClr val="FF0000"/>
+                </a:solidFill>
+              </a:rPr>
+              <a:t>D7</a:t>
+            </a:r>
+          </a:p>
+        </p:txBody>
+      </p:sp>
+      <p:sp>
+        <p:nvSpPr>
+          <p:cNvPr id="30" name="ZoneTexte 29"/>
+          <p:cNvSpPr txBox="1"/>
+          <p:nvPr/>
+        </p:nvSpPr>
+        <p:spPr>
+          <a:xfrm>
+            <a:off x="3207796" y="3375100"/>
+            <a:ext cx="557560" cy="369332"/>
+          </a:xfrm>
+          <a:prstGeom prst="rect">
+            <a:avLst/>
+          </a:prstGeom>
+          <a:noFill/>
+        </p:spPr>
+        <p:txBody>
+          <a:bodyPr wrap="square" rtlCol="0">
+            <a:spAutoFit/>
+          </a:bodyPr>
+          <a:lstStyle/>
+          <a:p>
+            <a:r>
+              <a:rPr lang="fr-FR" dirty="0" smtClean="0">
+                <a:solidFill>
+                  <a:srgbClr val="FF0000"/>
+                </a:solidFill>
+              </a:rPr>
+              <a:t>D9</a:t>
+            </a:r>
+          </a:p>
+        </p:txBody>
+      </p:sp>
+      <p:sp>
+        <p:nvSpPr>
+          <p:cNvPr id="31" name="ZoneTexte 30"/>
+          <p:cNvSpPr txBox="1"/>
+          <p:nvPr/>
+        </p:nvSpPr>
+        <p:spPr>
+          <a:xfrm>
+            <a:off x="3215231" y="3917793"/>
+            <a:ext cx="557560" cy="369332"/>
+          </a:xfrm>
+          <a:prstGeom prst="rect">
+            <a:avLst/>
+          </a:prstGeom>
+          <a:noFill/>
+        </p:spPr>
+        <p:txBody>
+          <a:bodyPr wrap="square" rtlCol="0">
+            <a:spAutoFit/>
+          </a:bodyPr>
+          <a:lstStyle/>
+          <a:p>
+            <a:r>
+              <a:rPr lang="fr-FR" dirty="0" smtClean="0">
+                <a:solidFill>
+                  <a:srgbClr val="FF0000"/>
+                </a:solidFill>
+              </a:rPr>
+              <a:t>D16</a:t>
+            </a:r>
+          </a:p>
+        </p:txBody>
+      </p:sp>
+      <p:sp>
+        <p:nvSpPr>
+          <p:cNvPr id="32" name="ZoneTexte 31"/>
+          <p:cNvSpPr txBox="1"/>
+          <p:nvPr/>
+        </p:nvSpPr>
+        <p:spPr>
+          <a:xfrm>
+            <a:off x="3192929" y="3650164"/>
+            <a:ext cx="709958" cy="369332"/>
+          </a:xfrm>
+          <a:prstGeom prst="rect">
+            <a:avLst/>
+          </a:prstGeom>
+          <a:noFill/>
+        </p:spPr>
+        <p:txBody>
+          <a:bodyPr wrap="square" rtlCol="0">
+            <a:spAutoFit/>
+          </a:bodyPr>
+          <a:lstStyle/>
+          <a:p>
+            <a:r>
+              <a:rPr lang="fr-FR" dirty="0" smtClean="0">
+                <a:solidFill>
+                  <a:srgbClr val="FF0000"/>
+                </a:solidFill>
+              </a:rPr>
+              <a:t>GND</a:t>
+            </a:r>
+          </a:p>
+        </p:txBody>
+      </p:sp>
+      <p:sp>
+        <p:nvSpPr>
+          <p:cNvPr id="33" name="ZoneTexte 32"/>
+          <p:cNvSpPr txBox="1"/>
+          <p:nvPr/>
+        </p:nvSpPr>
+        <p:spPr>
+          <a:xfrm>
+            <a:off x="7727758" y="3590691"/>
+            <a:ext cx="709958" cy="369332"/>
+          </a:xfrm>
+          <a:prstGeom prst="rect">
+            <a:avLst/>
+          </a:prstGeom>
+          <a:noFill/>
+        </p:spPr>
+        <p:txBody>
+          <a:bodyPr wrap="square" rtlCol="0">
+            <a:spAutoFit/>
+          </a:bodyPr>
+          <a:lstStyle/>
+          <a:p>
+            <a:r>
+              <a:rPr lang="fr-FR" dirty="0" smtClean="0">
+                <a:solidFill>
+                  <a:srgbClr val="FF0000"/>
+                </a:solidFill>
+              </a:rPr>
+              <a:t>GND</a:t>
+            </a:r>
+          </a:p>
+        </p:txBody>
+      </p:sp>
+      <p:sp>
+        <p:nvSpPr>
+          <p:cNvPr id="34" name="ZoneTexte 33"/>
+          <p:cNvSpPr txBox="1"/>
+          <p:nvPr/>
+        </p:nvSpPr>
+        <p:spPr>
+          <a:xfrm>
+            <a:off x="7761212" y="3880622"/>
+            <a:ext cx="709958" cy="369332"/>
+          </a:xfrm>
+          <a:prstGeom prst="rect">
+            <a:avLst/>
+          </a:prstGeom>
+          <a:noFill/>
+        </p:spPr>
+        <p:txBody>
+          <a:bodyPr wrap="square" rtlCol="0">
+            <a:spAutoFit/>
+          </a:bodyPr>
+          <a:lstStyle/>
+          <a:p>
+            <a:r>
+              <a:rPr lang="fr-FR" dirty="0" smtClean="0">
+                <a:solidFill>
+                  <a:srgbClr val="FF0000"/>
+                </a:solidFill>
+              </a:rPr>
+              <a:t>D29</a:t>
+            </a:r>
+          </a:p>
+        </p:txBody>
+      </p:sp>
+      <p:sp>
+        <p:nvSpPr>
+          <p:cNvPr id="35" name="ZoneTexte 34"/>
+          <p:cNvSpPr txBox="1"/>
+          <p:nvPr/>
+        </p:nvSpPr>
+        <p:spPr>
+          <a:xfrm>
+            <a:off x="7768646" y="4401013"/>
+            <a:ext cx="709958" cy="369332"/>
+          </a:xfrm>
+          <a:prstGeom prst="rect">
+            <a:avLst/>
+          </a:prstGeom>
+          <a:noFill/>
+        </p:spPr>
+        <p:txBody>
+          <a:bodyPr wrap="square" rtlCol="0">
+            <a:spAutoFit/>
+          </a:bodyPr>
+          <a:lstStyle/>
+          <a:p>
+            <a:r>
+              <a:rPr lang="fr-FR" dirty="0" smtClean="0">
+                <a:solidFill>
+                  <a:srgbClr val="FF0000"/>
+                </a:solidFill>
+              </a:rPr>
+              <a:t>D28</a:t>
+            </a:r>
+          </a:p>
+        </p:txBody>
+      </p:sp>
+      <p:sp>
+        <p:nvSpPr>
+          <p:cNvPr id="36" name="ZoneTexte 35"/>
+          <p:cNvSpPr txBox="1"/>
+          <p:nvPr/>
+        </p:nvSpPr>
+        <p:spPr>
+          <a:xfrm>
+            <a:off x="7779800" y="4947422"/>
+            <a:ext cx="709958" cy="369332"/>
+          </a:xfrm>
+          <a:prstGeom prst="rect">
+            <a:avLst/>
+          </a:prstGeom>
+          <a:noFill/>
+        </p:spPr>
+        <p:txBody>
+          <a:bodyPr wrap="square" rtlCol="0">
+            <a:spAutoFit/>
+          </a:bodyPr>
+          <a:lstStyle/>
+          <a:p>
+            <a:r>
+              <a:rPr lang="fr-FR" dirty="0" smtClean="0">
+                <a:solidFill>
+                  <a:srgbClr val="FF0000"/>
+                </a:solidFill>
+              </a:rPr>
+              <a:t>D27</a:t>
+            </a:r>
+          </a:p>
+        </p:txBody>
+      </p:sp>
+      <p:sp>
+        <p:nvSpPr>
+          <p:cNvPr id="37" name="ZoneTexte 36"/>
+          <p:cNvSpPr txBox="1"/>
+          <p:nvPr/>
+        </p:nvSpPr>
+        <p:spPr>
+          <a:xfrm>
+            <a:off x="7776084" y="5545871"/>
+            <a:ext cx="709958" cy="369332"/>
+          </a:xfrm>
+          <a:prstGeom prst="rect">
+            <a:avLst/>
+          </a:prstGeom>
+          <a:noFill/>
+        </p:spPr>
+        <p:txBody>
+          <a:bodyPr wrap="square" rtlCol="0">
+            <a:spAutoFit/>
+          </a:bodyPr>
+          <a:lstStyle/>
+          <a:p>
+            <a:r>
+              <a:rPr lang="fr-FR" dirty="0" smtClean="0">
+                <a:solidFill>
+                  <a:srgbClr val="FF0000"/>
+                </a:solidFill>
+              </a:rPr>
+              <a:t>D26</a:t>
+            </a:r>
+          </a:p>
+        </p:txBody>
+      </p:sp>
+      <p:sp>
+        <p:nvSpPr>
+          <p:cNvPr id="38" name="ZoneTexte 37"/>
+          <p:cNvSpPr txBox="1"/>
+          <p:nvPr/>
+        </p:nvSpPr>
+        <p:spPr>
+          <a:xfrm>
+            <a:off x="3226383" y="6114583"/>
+            <a:ext cx="709958" cy="369332"/>
+          </a:xfrm>
+          <a:prstGeom prst="rect">
+            <a:avLst/>
+          </a:prstGeom>
+          <a:noFill/>
+        </p:spPr>
+        <p:txBody>
+          <a:bodyPr wrap="square" rtlCol="0">
+            <a:spAutoFit/>
+          </a:bodyPr>
+          <a:lstStyle/>
+          <a:p>
+            <a:r>
+              <a:rPr lang="fr-FR" dirty="0" smtClean="0">
+                <a:solidFill>
+                  <a:srgbClr val="FF0000"/>
+                </a:solidFill>
+              </a:rPr>
+              <a:t>D25</a:t>
+            </a:r>
+          </a:p>
+        </p:txBody>
+      </p:sp>
+      <p:sp>
+        <p:nvSpPr>
+          <p:cNvPr id="39" name="ZoneTexte 38"/>
+          <p:cNvSpPr txBox="1"/>
+          <p:nvPr/>
+        </p:nvSpPr>
+        <p:spPr>
+          <a:xfrm>
+            <a:off x="3233818" y="5564456"/>
+            <a:ext cx="709958" cy="369332"/>
+          </a:xfrm>
+          <a:prstGeom prst="rect">
+            <a:avLst/>
+          </a:prstGeom>
+          <a:noFill/>
+        </p:spPr>
+        <p:txBody>
+          <a:bodyPr wrap="square" rtlCol="0">
+            <a:spAutoFit/>
+          </a:bodyPr>
+          <a:lstStyle/>
+          <a:p>
+            <a:r>
+              <a:rPr lang="fr-FR" dirty="0" smtClean="0">
+                <a:solidFill>
+                  <a:srgbClr val="FF0000"/>
+                </a:solidFill>
+              </a:rPr>
+              <a:t>D24</a:t>
+            </a:r>
+          </a:p>
+        </p:txBody>
+      </p:sp>
+      <p:sp>
+        <p:nvSpPr>
+          <p:cNvPr id="40" name="ZoneTexte 39"/>
+          <p:cNvSpPr txBox="1"/>
+          <p:nvPr/>
+        </p:nvSpPr>
+        <p:spPr>
+          <a:xfrm>
+            <a:off x="3244969" y="5040348"/>
+            <a:ext cx="709958" cy="369332"/>
+          </a:xfrm>
+          <a:prstGeom prst="rect">
+            <a:avLst/>
+          </a:prstGeom>
+          <a:noFill/>
+        </p:spPr>
+        <p:txBody>
+          <a:bodyPr wrap="square" rtlCol="0">
+            <a:spAutoFit/>
+          </a:bodyPr>
+          <a:lstStyle/>
+          <a:p>
+            <a:r>
+              <a:rPr lang="fr-FR" dirty="0" smtClean="0">
+                <a:solidFill>
+                  <a:srgbClr val="FF0000"/>
+                </a:solidFill>
+              </a:rPr>
+              <a:t>D23</a:t>
+            </a:r>
+          </a:p>
+        </p:txBody>
+      </p:sp>
+      <p:sp>
+        <p:nvSpPr>
+          <p:cNvPr id="41" name="ZoneTexte 40"/>
+          <p:cNvSpPr txBox="1"/>
+          <p:nvPr/>
+        </p:nvSpPr>
+        <p:spPr>
+          <a:xfrm>
+            <a:off x="3237535" y="4508805"/>
+            <a:ext cx="709958" cy="369332"/>
+          </a:xfrm>
+          <a:prstGeom prst="rect">
+            <a:avLst/>
+          </a:prstGeom>
+          <a:noFill/>
+        </p:spPr>
+        <p:txBody>
+          <a:bodyPr wrap="square" rtlCol="0">
+            <a:spAutoFit/>
+          </a:bodyPr>
+          <a:lstStyle/>
+          <a:p>
+            <a:r>
+              <a:rPr lang="fr-FR" dirty="0" smtClean="0">
+                <a:solidFill>
+                  <a:srgbClr val="FF0000"/>
+                </a:solidFill>
+              </a:rPr>
+              <a:t>D22</a:t>
+            </a:r>
+          </a:p>
+        </p:txBody>
+      </p:sp>
+      <p:sp>
+        <p:nvSpPr>
+          <p:cNvPr id="42" name="ZoneTexte 41"/>
+          <p:cNvSpPr txBox="1"/>
+          <p:nvPr/>
+        </p:nvSpPr>
+        <p:spPr>
+          <a:xfrm>
+            <a:off x="7753779" y="4163121"/>
+            <a:ext cx="709958" cy="369332"/>
+          </a:xfrm>
+          <a:prstGeom prst="rect">
+            <a:avLst/>
+          </a:prstGeom>
+          <a:noFill/>
+        </p:spPr>
+        <p:txBody>
+          <a:bodyPr wrap="square" rtlCol="0">
+            <a:spAutoFit/>
+          </a:bodyPr>
+          <a:lstStyle/>
+          <a:p>
+            <a:r>
+              <a:rPr lang="fr-FR" dirty="0" smtClean="0">
+                <a:solidFill>
+                  <a:srgbClr val="FF0000"/>
+                </a:solidFill>
+              </a:rPr>
+              <a:t>D30</a:t>
+            </a:r>
+          </a:p>
+        </p:txBody>
+      </p:sp>
+      <p:sp>
+        <p:nvSpPr>
+          <p:cNvPr id="43" name="ZoneTexte 42"/>
+          <p:cNvSpPr txBox="1"/>
+          <p:nvPr/>
+        </p:nvSpPr>
+        <p:spPr>
+          <a:xfrm>
+            <a:off x="7772365" y="4672359"/>
+            <a:ext cx="709958" cy="369332"/>
+          </a:xfrm>
+          <a:prstGeom prst="rect">
+            <a:avLst/>
+          </a:prstGeom>
+          <a:noFill/>
+        </p:spPr>
+        <p:txBody>
+          <a:bodyPr wrap="square" rtlCol="0">
+            <a:spAutoFit/>
+          </a:bodyPr>
+          <a:lstStyle/>
+          <a:p>
+            <a:r>
+              <a:rPr lang="fr-FR" dirty="0" smtClean="0">
+                <a:solidFill>
+                  <a:srgbClr val="FF0000"/>
+                </a:solidFill>
+              </a:rPr>
+              <a:t>D31</a:t>
+            </a:r>
+          </a:p>
+        </p:txBody>
+      </p:sp>
+      <p:sp>
+        <p:nvSpPr>
+          <p:cNvPr id="44" name="ZoneTexte 43"/>
+          <p:cNvSpPr txBox="1"/>
+          <p:nvPr/>
+        </p:nvSpPr>
+        <p:spPr>
+          <a:xfrm>
+            <a:off x="7772366" y="5263374"/>
+            <a:ext cx="709958" cy="369332"/>
+          </a:xfrm>
+          <a:prstGeom prst="rect">
+            <a:avLst/>
+          </a:prstGeom>
+          <a:noFill/>
+        </p:spPr>
+        <p:txBody>
+          <a:bodyPr wrap="square" rtlCol="0">
+            <a:spAutoFit/>
+          </a:bodyPr>
+          <a:lstStyle/>
+          <a:p>
+            <a:r>
+              <a:rPr lang="fr-FR" dirty="0" smtClean="0">
+                <a:solidFill>
+                  <a:srgbClr val="FF0000"/>
+                </a:solidFill>
+              </a:rPr>
+              <a:t>D32</a:t>
+            </a:r>
+          </a:p>
+        </p:txBody>
+      </p:sp>
+      <p:sp>
+        <p:nvSpPr>
+          <p:cNvPr id="45" name="ZoneTexte 44"/>
+          <p:cNvSpPr txBox="1"/>
+          <p:nvPr/>
+        </p:nvSpPr>
+        <p:spPr>
+          <a:xfrm>
+            <a:off x="7779801" y="5817218"/>
+            <a:ext cx="709958" cy="369332"/>
+          </a:xfrm>
+          <a:prstGeom prst="rect">
+            <a:avLst/>
+          </a:prstGeom>
+          <a:noFill/>
+        </p:spPr>
+        <p:txBody>
+          <a:bodyPr wrap="square" rtlCol="0">
+            <a:spAutoFit/>
+          </a:bodyPr>
+          <a:lstStyle/>
+          <a:p>
+            <a:r>
+              <a:rPr lang="fr-FR" dirty="0" smtClean="0">
+                <a:solidFill>
+                  <a:srgbClr val="FF0000"/>
+                </a:solidFill>
+              </a:rPr>
+              <a:t>D33</a:t>
+            </a:r>
+          </a:p>
+        </p:txBody>
+      </p:sp>
+      <p:sp>
+        <p:nvSpPr>
+          <p:cNvPr id="46" name="ZoneTexte 45"/>
+          <p:cNvSpPr txBox="1"/>
+          <p:nvPr/>
+        </p:nvSpPr>
+        <p:spPr>
+          <a:xfrm>
+            <a:off x="3226386" y="5846955"/>
+            <a:ext cx="709958" cy="369332"/>
+          </a:xfrm>
+          <a:prstGeom prst="rect">
+            <a:avLst/>
+          </a:prstGeom>
+          <a:noFill/>
+        </p:spPr>
+        <p:txBody>
+          <a:bodyPr wrap="square" rtlCol="0">
+            <a:spAutoFit/>
+          </a:bodyPr>
+          <a:lstStyle/>
+          <a:p>
+            <a:r>
+              <a:rPr lang="fr-FR" dirty="0" smtClean="0">
+                <a:solidFill>
+                  <a:srgbClr val="FF0000"/>
+                </a:solidFill>
+              </a:rPr>
+              <a:t>D34</a:t>
+            </a:r>
+          </a:p>
+        </p:txBody>
+      </p:sp>
+      <p:sp>
+        <p:nvSpPr>
+          <p:cNvPr id="47" name="ZoneTexte 46"/>
+          <p:cNvSpPr txBox="1"/>
+          <p:nvPr/>
+        </p:nvSpPr>
+        <p:spPr>
+          <a:xfrm>
+            <a:off x="3244971" y="5296829"/>
+            <a:ext cx="709958" cy="369332"/>
+          </a:xfrm>
+          <a:prstGeom prst="rect">
+            <a:avLst/>
+          </a:prstGeom>
+          <a:noFill/>
+        </p:spPr>
+        <p:txBody>
+          <a:bodyPr wrap="square" rtlCol="0">
+            <a:spAutoFit/>
+          </a:bodyPr>
+          <a:lstStyle/>
+          <a:p>
+            <a:r>
+              <a:rPr lang="fr-FR" dirty="0" smtClean="0">
+                <a:solidFill>
+                  <a:srgbClr val="FF0000"/>
+                </a:solidFill>
+              </a:rPr>
+              <a:t>D35</a:t>
+            </a:r>
+          </a:p>
+        </p:txBody>
+      </p:sp>
+      <p:sp>
+        <p:nvSpPr>
+          <p:cNvPr id="48" name="ZoneTexte 47"/>
+          <p:cNvSpPr txBox="1"/>
+          <p:nvPr/>
+        </p:nvSpPr>
+        <p:spPr>
+          <a:xfrm>
+            <a:off x="3244971" y="4772721"/>
+            <a:ext cx="709958" cy="369332"/>
+          </a:xfrm>
+          <a:prstGeom prst="rect">
+            <a:avLst/>
+          </a:prstGeom>
+          <a:noFill/>
+        </p:spPr>
+        <p:txBody>
+          <a:bodyPr wrap="square" rtlCol="0">
+            <a:spAutoFit/>
+          </a:bodyPr>
+          <a:lstStyle/>
+          <a:p>
+            <a:r>
+              <a:rPr lang="fr-FR" dirty="0" smtClean="0">
+                <a:solidFill>
+                  <a:srgbClr val="FF0000"/>
+                </a:solidFill>
+              </a:rPr>
+              <a:t>D36</a:t>
+            </a:r>
+          </a:p>
+        </p:txBody>
+      </p:sp>
+      <p:sp>
+        <p:nvSpPr>
+          <p:cNvPr id="49" name="ZoneTexte 48"/>
+          <p:cNvSpPr txBox="1"/>
+          <p:nvPr/>
+        </p:nvSpPr>
+        <p:spPr>
+          <a:xfrm>
+            <a:off x="3244972" y="4226312"/>
+            <a:ext cx="709958" cy="369332"/>
+          </a:xfrm>
+          <a:prstGeom prst="rect">
+            <a:avLst/>
+          </a:prstGeom>
+          <a:noFill/>
+        </p:spPr>
+        <p:txBody>
+          <a:bodyPr wrap="square" rtlCol="0">
+            <a:spAutoFit/>
+          </a:bodyPr>
+          <a:lstStyle/>
+          <a:p>
+            <a:r>
+              <a:rPr lang="fr-FR" dirty="0" smtClean="0">
+                <a:solidFill>
+                  <a:srgbClr val="FF0000"/>
+                </a:solidFill>
+              </a:rPr>
+              <a:t>D37</a:t>
+            </a:r>
+          </a:p>
+        </p:txBody>
+      </p:sp>
+      <p:sp>
+        <p:nvSpPr>
+          <p:cNvPr id="50" name="ZoneTexte 49"/>
+          <p:cNvSpPr txBox="1"/>
+          <p:nvPr/>
+        </p:nvSpPr>
+        <p:spPr>
+          <a:xfrm>
+            <a:off x="7783513" y="6088565"/>
+            <a:ext cx="709958" cy="369332"/>
+          </a:xfrm>
+          <a:prstGeom prst="rect">
+            <a:avLst/>
+          </a:prstGeom>
+          <a:noFill/>
+        </p:spPr>
+        <p:txBody>
+          <a:bodyPr wrap="square" rtlCol="0">
+            <a:spAutoFit/>
+          </a:bodyPr>
+          <a:lstStyle/>
+          <a:p>
+            <a:r>
+              <a:rPr lang="fr-FR" dirty="0" smtClean="0">
+                <a:solidFill>
+                  <a:srgbClr val="FF0000"/>
+                </a:solidFill>
+              </a:rPr>
+              <a:t>VCC</a:t>
+            </a:r>
+          </a:p>
+        </p:txBody>
+      </p:sp>
+      <p:sp>
+        <p:nvSpPr>
+          <p:cNvPr id="51" name="Rectangle 50"/>
+          <p:cNvSpPr/>
+          <p:nvPr/>
+        </p:nvSpPr>
+        <p:spPr>
+          <a:xfrm rot="16200000">
+            <a:off x="1988282" y="4482119"/>
+            <a:ext cx="2120645" cy="461665"/>
+          </a:xfrm>
+          <a:prstGeom prst="rect">
+            <a:avLst/>
+          </a:prstGeom>
+        </p:spPr>
+        <p:txBody>
+          <a:bodyPr wrap="none">
+            <a:spAutoFit/>
+          </a:bodyPr>
+          <a:lstStyle/>
+          <a:p>
+            <a:r>
+              <a:rPr lang="fr-FR" sz="2400" b="1" dirty="0" smtClean="0">
+                <a:solidFill>
+                  <a:srgbClr val="FF0000"/>
+                </a:solidFill>
+              </a:rPr>
+              <a:t>Mega2560 Pins</a:t>
+            </a:r>
+            <a:endParaRPr lang="fr-FR" sz="2400" dirty="0">
+              <a:solidFill>
+                <a:srgbClr val="FF0000"/>
+              </a:solidFill>
+            </a:endParaRPr>
+          </a:p>
+        </p:txBody>
+      </p:sp>
+      <p:sp>
+        <p:nvSpPr>
+          <p:cNvPr id="52" name="Rectangle 51"/>
+          <p:cNvSpPr/>
+          <p:nvPr/>
+        </p:nvSpPr>
+        <p:spPr>
+          <a:xfrm rot="5400000">
+            <a:off x="7415209" y="1935923"/>
+            <a:ext cx="2120645" cy="461665"/>
+          </a:xfrm>
+          <a:prstGeom prst="rect">
+            <a:avLst/>
+          </a:prstGeom>
+        </p:spPr>
+        <p:txBody>
+          <a:bodyPr wrap="none">
+            <a:spAutoFit/>
+          </a:bodyPr>
+          <a:lstStyle/>
+          <a:p>
+            <a:r>
+              <a:rPr lang="fr-FR" sz="2400" b="1" dirty="0" smtClean="0">
+                <a:solidFill>
+                  <a:srgbClr val="FF0000"/>
+                </a:solidFill>
+              </a:rPr>
+              <a:t>Mega2560 Pins</a:t>
+            </a:r>
+            <a:endParaRPr lang="fr-FR" sz="2400" dirty="0">
+              <a:solidFill>
+                <a:srgbClr val="FF0000"/>
+              </a:solidFill>
+            </a:endParaRPr>
+          </a:p>
+        </p:txBody>
+      </p:sp>
     </p:spTree>
-    <p:extLst>
-      <p:ext uri="{BB962C8B-B14F-4D97-AF65-F5344CB8AC3E}">
-        <p14:creationId xmlns="" xmlns:p14="http://schemas.microsoft.com/office/powerpoint/2010/main" val="3452558061"/>
-      </p:ext>
-    </p:extLst>
   </p:cSld>
   <p:clrMapOvr>
     <a:masterClrMapping/>
   </p:clrMapOvr>
+  <p:timing>
+    <p:tnLst>
+      <p:par>
+        <p:cTn id="1" dur="indefinite" restart="never" nodeType="tmRoot"/>
+      </p:par>
+    </p:tnLst>
+  </p:timing>
 </p:sld>
 </file>
 
@@ -8952,83 +6425,240 @@
       </p:grpSpPr>
       <p:pic>
         <p:nvPicPr>
-          <p:cNvPr id="7" name="Image 6"/>
+          <p:cNvPr id="1026" name="Picture 2"/>
           <p:cNvPicPr>
-            <a:picLocks noChangeAspect="1"/>
+            <a:picLocks noChangeAspect="1" noChangeArrowheads="1"/>
           </p:cNvPicPr>
           <p:nvPr/>
         </p:nvPicPr>
         <p:blipFill>
           <a:blip r:embed="rId2" cstate="print"/>
+          <a:srcRect/>
           <a:stretch>
             <a:fillRect/>
           </a:stretch>
         </p:blipFill>
-        <p:spPr>
-          <a:xfrm>
-            <a:off x="801824" y="383593"/>
-            <a:ext cx="3175309" cy="5915645"/>
-          </a:xfrm>
-          <a:prstGeom prst="rect">
-            <a:avLst/>
-          </a:prstGeom>
+        <p:spPr bwMode="auto">
+          <a:xfrm>
+            <a:off x="3930687" y="227207"/>
+            <a:ext cx="3812704" cy="6452374"/>
+          </a:xfrm>
+          <a:prstGeom prst="rect">
+            <a:avLst/>
+          </a:prstGeom>
+          <a:noFill/>
+          <a:ln w="9525">
+            <a:noFill/>
+            <a:miter lim="800000"/>
+            <a:headEnd/>
+            <a:tailEnd/>
+          </a:ln>
+          <a:effectLst/>
         </p:spPr>
       </p:pic>
-      <p:pic>
-        <p:nvPicPr>
-          <p:cNvPr id="8" name="Image 7"/>
-          <p:cNvPicPr>
-            <a:picLocks noChangeAspect="1"/>
-          </p:cNvPicPr>
-          <p:nvPr/>
-        </p:nvPicPr>
-        <p:blipFill>
-          <a:blip r:embed="rId3" cstate="print"/>
-          <a:stretch>
-            <a:fillRect/>
-          </a:stretch>
-        </p:blipFill>
-        <p:spPr>
-          <a:xfrm>
-            <a:off x="4246899" y="451929"/>
-            <a:ext cx="7945101" cy="5810596"/>
-          </a:xfrm>
-          <a:prstGeom prst="rect">
-            <a:avLst/>
-          </a:prstGeom>
-        </p:spPr>
-      </p:pic>
-      <p:sp>
-        <p:nvSpPr>
-          <p:cNvPr id="4" name="ZoneTexte 3"/>
-          <p:cNvSpPr txBox="1"/>
-          <p:nvPr/>
-        </p:nvSpPr>
-        <p:spPr>
-          <a:xfrm>
-            <a:off x="0" y="3315396"/>
-            <a:ext cx="1048215" cy="276999"/>
-          </a:xfrm>
-          <a:prstGeom prst="rect">
-            <a:avLst/>
-          </a:prstGeom>
-          <a:noFill/>
-        </p:spPr>
-        <p:txBody>
-          <a:bodyPr wrap="square" rtlCol="0">
-            <a:spAutoFit/>
-          </a:bodyPr>
-          <a:lstStyle/>
-          <a:p>
-            <a:r>
-              <a:rPr lang="fr-FR" sz="1200" dirty="0" smtClean="0">
-                <a:solidFill>
-                  <a:srgbClr val="FF0000"/>
-                </a:solidFill>
-              </a:rPr>
-              <a:t>GND on PCB</a:t>
-            </a:r>
-            <a:endParaRPr lang="fr-FR" sz="1200" dirty="0">
+      <p:sp>
+        <p:nvSpPr>
+          <p:cNvPr id="2" name="Rectangle 1"/>
+          <p:cNvSpPr/>
+          <p:nvPr/>
+        </p:nvSpPr>
+        <p:spPr>
+          <a:xfrm rot="16200000">
+            <a:off x="3795715" y="3100388"/>
+            <a:ext cx="3705225" cy="628650"/>
+          </a:xfrm>
+          <a:prstGeom prst="rect">
+            <a:avLst/>
+          </a:prstGeom>
+          <a:solidFill>
+            <a:schemeClr val="bg1"/>
+          </a:solidFill>
+          <a:ln>
+            <a:solidFill>
+              <a:schemeClr val="bg1"/>
+            </a:solidFill>
+          </a:ln>
+        </p:spPr>
+        <p:style>
+          <a:lnRef idx="2">
+            <a:schemeClr val="accent1">
+              <a:shade val="50000"/>
+            </a:schemeClr>
+          </a:lnRef>
+          <a:fillRef idx="1">
+            <a:schemeClr val="accent1"/>
+          </a:fillRef>
+          <a:effectRef idx="0">
+            <a:schemeClr val="accent1"/>
+          </a:effectRef>
+          <a:fontRef idx="minor">
+            <a:schemeClr val="lt1"/>
+          </a:fontRef>
+        </p:style>
+        <p:txBody>
+          <a:bodyPr rtlCol="0" anchor="ctr"/>
+          <a:lstStyle/>
+          <a:p>
+            <a:pPr algn="ctr"/>
+            <a:r>
+              <a:rPr lang="fr-FR" sz="3600" dirty="0" smtClean="0">
+                <a:solidFill>
+                  <a:schemeClr val="tx1"/>
+                </a:solidFill>
+              </a:rPr>
+              <a:t>PSOP </a:t>
+            </a:r>
+            <a:r>
+              <a:rPr lang="fr-FR" sz="3600" dirty="0" smtClean="0">
+                <a:solidFill>
+                  <a:schemeClr val="tx1"/>
+                </a:solidFill>
+              </a:rPr>
+              <a:t>44 adapter</a:t>
+            </a:r>
+            <a:endParaRPr lang="fr-FR" sz="3600" dirty="0">
+              <a:solidFill>
+                <a:schemeClr val="tx1"/>
+              </a:solidFill>
+            </a:endParaRPr>
+          </a:p>
+        </p:txBody>
+      </p:sp>
+      <p:sp>
+        <p:nvSpPr>
+          <p:cNvPr id="53" name="Rectangle 52"/>
+          <p:cNvSpPr/>
+          <p:nvPr/>
+        </p:nvSpPr>
+        <p:spPr>
+          <a:xfrm rot="16200000">
+            <a:off x="1143000" y="3143250"/>
+            <a:ext cx="6134100" cy="571500"/>
+          </a:xfrm>
+          <a:prstGeom prst="rect">
+            <a:avLst/>
+          </a:prstGeom>
+          <a:solidFill>
+            <a:schemeClr val="bg1"/>
+          </a:solidFill>
+          <a:ln>
+            <a:solidFill>
+              <a:schemeClr val="bg1"/>
+            </a:solidFill>
+          </a:ln>
+        </p:spPr>
+        <p:style>
+          <a:lnRef idx="2">
+            <a:schemeClr val="accent1">
+              <a:shade val="50000"/>
+            </a:schemeClr>
+          </a:lnRef>
+          <a:fillRef idx="1">
+            <a:schemeClr val="accent1"/>
+          </a:fillRef>
+          <a:effectRef idx="0">
+            <a:schemeClr val="accent1"/>
+          </a:effectRef>
+          <a:fontRef idx="minor">
+            <a:schemeClr val="lt1"/>
+          </a:fontRef>
+        </p:style>
+        <p:txBody>
+          <a:bodyPr rtlCol="0" anchor="ctr"/>
+          <a:lstStyle/>
+          <a:p>
+            <a:pPr algn="ctr"/>
+            <a:endParaRPr lang="fr-FR" sz="3600" dirty="0">
+              <a:solidFill>
+                <a:schemeClr val="tx1"/>
+              </a:solidFill>
+            </a:endParaRPr>
+          </a:p>
+        </p:txBody>
+      </p:sp>
+      <p:sp>
+        <p:nvSpPr>
+          <p:cNvPr id="54" name="Rectangle 53"/>
+          <p:cNvSpPr/>
+          <p:nvPr/>
+        </p:nvSpPr>
+        <p:spPr>
+          <a:xfrm rot="16200000">
+            <a:off x="4210050" y="3048000"/>
+            <a:ext cx="6134100" cy="762000"/>
+          </a:xfrm>
+          <a:prstGeom prst="rect">
+            <a:avLst/>
+          </a:prstGeom>
+          <a:solidFill>
+            <a:schemeClr val="bg1"/>
+          </a:solidFill>
+          <a:ln>
+            <a:solidFill>
+              <a:schemeClr val="bg1"/>
+            </a:solidFill>
+          </a:ln>
+        </p:spPr>
+        <p:style>
+          <a:lnRef idx="2">
+            <a:schemeClr val="accent1">
+              <a:shade val="50000"/>
+            </a:schemeClr>
+          </a:lnRef>
+          <a:fillRef idx="1">
+            <a:schemeClr val="accent1"/>
+          </a:fillRef>
+          <a:effectRef idx="0">
+            <a:schemeClr val="accent1"/>
+          </a:effectRef>
+          <a:fontRef idx="minor">
+            <a:schemeClr val="lt1"/>
+          </a:fontRef>
+        </p:style>
+        <p:txBody>
+          <a:bodyPr rtlCol="0" anchor="ctr"/>
+          <a:lstStyle/>
+          <a:p>
+            <a:pPr algn="ctr"/>
+            <a:endParaRPr lang="fr-FR" sz="3600" dirty="0">
+              <a:solidFill>
+                <a:schemeClr val="tx1"/>
+              </a:solidFill>
+            </a:endParaRPr>
+          </a:p>
+        </p:txBody>
+      </p:sp>
+      <p:sp>
+        <p:nvSpPr>
+          <p:cNvPr id="14" name="ZoneTexte 13"/>
+          <p:cNvSpPr txBox="1"/>
+          <p:nvPr/>
+        </p:nvSpPr>
+        <p:spPr>
+          <a:xfrm>
+            <a:off x="6879094" y="868632"/>
+            <a:ext cx="546410" cy="369332"/>
+          </a:xfrm>
+          <a:prstGeom prst="rect">
+            <a:avLst/>
+          </a:prstGeom>
+          <a:noFill/>
+        </p:spPr>
+        <p:txBody>
+          <a:bodyPr wrap="square" rtlCol="0">
+            <a:spAutoFit/>
+          </a:bodyPr>
+          <a:lstStyle/>
+          <a:p>
+            <a:r>
+              <a:rPr lang="fr-FR" dirty="0" smtClean="0">
+                <a:solidFill>
+                  <a:srgbClr val="FF0000"/>
+                </a:solidFill>
+              </a:rPr>
+              <a:t>A8</a:t>
+            </a:r>
+            <a:endParaRPr lang="fr-FR" dirty="0">
               <a:solidFill>
                 <a:srgbClr val="FF0000"/>
               </a:solidFill>
@@ -9038,35 +6668,35 @@
       </p:sp>
       <p:sp>
         <p:nvSpPr>
-          <p:cNvPr id="5" name="ZoneTexte 4"/>
-          <p:cNvSpPr txBox="1"/>
-          <p:nvPr/>
-        </p:nvSpPr>
-        <p:spPr>
-          <a:xfrm>
-            <a:off x="3746346" y="3309124"/>
-            <a:ext cx="814503" cy="276999"/>
-          </a:xfrm>
-          <a:prstGeom prst="rect">
-            <a:avLst/>
-          </a:prstGeom>
-          <a:noFill/>
-        </p:spPr>
-        <p:txBody>
-          <a:bodyPr wrap="square" rtlCol="0">
-            <a:spAutoFit/>
-          </a:bodyPr>
-          <a:lstStyle/>
-          <a:p>
-            <a:r>
-              <a:rPr lang="fr-FR" sz="1200" dirty="0" smtClean="0">
-                <a:solidFill>
-                  <a:srgbClr val="FF0000"/>
-                </a:solidFill>
-              </a:rPr>
-              <a:t>To 3.3V</a:t>
-            </a:r>
-            <a:endParaRPr lang="fr-FR" sz="1200" baseline="-25000" dirty="0">
+          <p:cNvPr id="16" name="ZoneTexte 15"/>
+          <p:cNvSpPr txBox="1"/>
+          <p:nvPr/>
+        </p:nvSpPr>
+        <p:spPr>
+          <a:xfrm>
+            <a:off x="6886531" y="1143697"/>
+            <a:ext cx="546410" cy="369332"/>
+          </a:xfrm>
+          <a:prstGeom prst="rect">
+            <a:avLst/>
+          </a:prstGeom>
+          <a:noFill/>
+        </p:spPr>
+        <p:txBody>
+          <a:bodyPr wrap="square" rtlCol="0">
+            <a:spAutoFit/>
+          </a:bodyPr>
+          <a:lstStyle/>
+          <a:p>
+            <a:r>
+              <a:rPr lang="fr-FR" dirty="0" smtClean="0">
+                <a:solidFill>
+                  <a:srgbClr val="FF0000"/>
+                </a:solidFill>
+              </a:rPr>
+              <a:t>A9</a:t>
+            </a:r>
+            <a:endParaRPr lang="fr-FR" dirty="0">
               <a:solidFill>
                 <a:srgbClr val="FF0000"/>
               </a:solidFill>
@@ -9074,16 +6704,1505 @@
           </a:p>
         </p:txBody>
       </p:sp>
+      <p:sp>
+        <p:nvSpPr>
+          <p:cNvPr id="17" name="ZoneTexte 16"/>
+          <p:cNvSpPr txBox="1"/>
+          <p:nvPr/>
+        </p:nvSpPr>
+        <p:spPr>
+          <a:xfrm>
+            <a:off x="6875378" y="1422477"/>
+            <a:ext cx="747130" cy="369332"/>
+          </a:xfrm>
+          <a:prstGeom prst="rect">
+            <a:avLst/>
+          </a:prstGeom>
+          <a:noFill/>
+        </p:spPr>
+        <p:txBody>
+          <a:bodyPr wrap="square" rtlCol="0">
+            <a:spAutoFit/>
+          </a:bodyPr>
+          <a:lstStyle/>
+          <a:p>
+            <a:r>
+              <a:rPr lang="fr-FR" dirty="0" smtClean="0">
+                <a:solidFill>
+                  <a:srgbClr val="FF0000"/>
+                </a:solidFill>
+              </a:rPr>
+              <a:t>A10</a:t>
+            </a:r>
+          </a:p>
+        </p:txBody>
+      </p:sp>
+      <p:sp>
+        <p:nvSpPr>
+          <p:cNvPr id="18" name="ZoneTexte 17"/>
+          <p:cNvSpPr txBox="1"/>
+          <p:nvPr/>
+        </p:nvSpPr>
+        <p:spPr>
+          <a:xfrm>
+            <a:off x="6871660" y="1708690"/>
+            <a:ext cx="747130" cy="369332"/>
+          </a:xfrm>
+          <a:prstGeom prst="rect">
+            <a:avLst/>
+          </a:prstGeom>
+          <a:noFill/>
+        </p:spPr>
+        <p:txBody>
+          <a:bodyPr wrap="square" rtlCol="0">
+            <a:spAutoFit/>
+          </a:bodyPr>
+          <a:lstStyle/>
+          <a:p>
+            <a:r>
+              <a:rPr lang="fr-FR" dirty="0" smtClean="0">
+                <a:solidFill>
+                  <a:srgbClr val="FF0000"/>
+                </a:solidFill>
+              </a:rPr>
+              <a:t>A11</a:t>
+            </a:r>
+          </a:p>
+        </p:txBody>
+      </p:sp>
+      <p:sp>
+        <p:nvSpPr>
+          <p:cNvPr id="19" name="ZoneTexte 18"/>
+          <p:cNvSpPr txBox="1"/>
+          <p:nvPr/>
+        </p:nvSpPr>
+        <p:spPr>
+          <a:xfrm>
+            <a:off x="6871661" y="1987470"/>
+            <a:ext cx="747130" cy="369332"/>
+          </a:xfrm>
+          <a:prstGeom prst="rect">
+            <a:avLst/>
+          </a:prstGeom>
+          <a:noFill/>
+        </p:spPr>
+        <p:txBody>
+          <a:bodyPr wrap="square" rtlCol="0">
+            <a:spAutoFit/>
+          </a:bodyPr>
+          <a:lstStyle/>
+          <a:p>
+            <a:r>
+              <a:rPr lang="fr-FR" dirty="0" smtClean="0">
+                <a:solidFill>
+                  <a:srgbClr val="FF0000"/>
+                </a:solidFill>
+              </a:rPr>
+              <a:t>A12</a:t>
+            </a:r>
+          </a:p>
+        </p:txBody>
+      </p:sp>
+      <p:sp>
+        <p:nvSpPr>
+          <p:cNvPr id="20" name="ZoneTexte 19"/>
+          <p:cNvSpPr txBox="1"/>
+          <p:nvPr/>
+        </p:nvSpPr>
+        <p:spPr>
+          <a:xfrm>
+            <a:off x="6860510" y="2243950"/>
+            <a:ext cx="747130" cy="369332"/>
+          </a:xfrm>
+          <a:prstGeom prst="rect">
+            <a:avLst/>
+          </a:prstGeom>
+          <a:noFill/>
+        </p:spPr>
+        <p:txBody>
+          <a:bodyPr wrap="square" rtlCol="0">
+            <a:spAutoFit/>
+          </a:bodyPr>
+          <a:lstStyle/>
+          <a:p>
+            <a:r>
+              <a:rPr lang="fr-FR" dirty="0" smtClean="0">
+                <a:solidFill>
+                  <a:srgbClr val="FF0000"/>
+                </a:solidFill>
+              </a:rPr>
+              <a:t>A13</a:t>
+            </a:r>
+          </a:p>
+        </p:txBody>
+      </p:sp>
+      <p:sp>
+        <p:nvSpPr>
+          <p:cNvPr id="21" name="ZoneTexte 20"/>
+          <p:cNvSpPr txBox="1"/>
+          <p:nvPr/>
+        </p:nvSpPr>
+        <p:spPr>
+          <a:xfrm>
+            <a:off x="6860508" y="2545032"/>
+            <a:ext cx="747130" cy="369332"/>
+          </a:xfrm>
+          <a:prstGeom prst="rect">
+            <a:avLst/>
+          </a:prstGeom>
+          <a:noFill/>
+        </p:spPr>
+        <p:txBody>
+          <a:bodyPr wrap="square" rtlCol="0">
+            <a:spAutoFit/>
+          </a:bodyPr>
+          <a:lstStyle/>
+          <a:p>
+            <a:r>
+              <a:rPr lang="fr-FR" dirty="0" smtClean="0">
+                <a:solidFill>
+                  <a:srgbClr val="FF0000"/>
+                </a:solidFill>
+              </a:rPr>
+              <a:t>A14</a:t>
+            </a:r>
+          </a:p>
+        </p:txBody>
+      </p:sp>
+      <p:sp>
+        <p:nvSpPr>
+          <p:cNvPr id="22" name="ZoneTexte 21"/>
+          <p:cNvSpPr txBox="1"/>
+          <p:nvPr/>
+        </p:nvSpPr>
+        <p:spPr>
+          <a:xfrm>
+            <a:off x="6860510" y="2801510"/>
+            <a:ext cx="747130" cy="369332"/>
+          </a:xfrm>
+          <a:prstGeom prst="rect">
+            <a:avLst/>
+          </a:prstGeom>
+          <a:noFill/>
+        </p:spPr>
+        <p:txBody>
+          <a:bodyPr wrap="square" rtlCol="0">
+            <a:spAutoFit/>
+          </a:bodyPr>
+          <a:lstStyle/>
+          <a:p>
+            <a:r>
+              <a:rPr lang="fr-FR" dirty="0" smtClean="0">
+                <a:solidFill>
+                  <a:srgbClr val="FF0000"/>
+                </a:solidFill>
+              </a:rPr>
+              <a:t>A15</a:t>
+            </a:r>
+          </a:p>
+        </p:txBody>
+      </p:sp>
+      <p:sp>
+        <p:nvSpPr>
+          <p:cNvPr id="23" name="ZoneTexte 22"/>
+          <p:cNvSpPr txBox="1"/>
+          <p:nvPr/>
+        </p:nvSpPr>
+        <p:spPr>
+          <a:xfrm>
+            <a:off x="6864693" y="3076573"/>
+            <a:ext cx="747130" cy="369332"/>
+          </a:xfrm>
+          <a:prstGeom prst="rect">
+            <a:avLst/>
+          </a:prstGeom>
+          <a:noFill/>
+        </p:spPr>
+        <p:txBody>
+          <a:bodyPr wrap="square" rtlCol="0">
+            <a:spAutoFit/>
+          </a:bodyPr>
+          <a:lstStyle/>
+          <a:p>
+            <a:r>
+              <a:rPr lang="fr-FR" dirty="0" smtClean="0">
+                <a:solidFill>
+                  <a:srgbClr val="FF0000"/>
+                </a:solidFill>
+              </a:rPr>
+              <a:t>D49</a:t>
+            </a:r>
+          </a:p>
+        </p:txBody>
+      </p:sp>
+      <p:sp>
+        <p:nvSpPr>
+          <p:cNvPr id="26" name="ZoneTexte 25"/>
+          <p:cNvSpPr txBox="1"/>
+          <p:nvPr/>
+        </p:nvSpPr>
+        <p:spPr>
+          <a:xfrm>
+            <a:off x="6867946" y="601001"/>
+            <a:ext cx="669076" cy="369332"/>
+          </a:xfrm>
+          <a:prstGeom prst="rect">
+            <a:avLst/>
+          </a:prstGeom>
+          <a:noFill/>
+        </p:spPr>
+        <p:txBody>
+          <a:bodyPr wrap="square" rtlCol="0">
+            <a:spAutoFit/>
+          </a:bodyPr>
+          <a:lstStyle/>
+          <a:p>
+            <a:r>
+              <a:rPr lang="fr-FR" dirty="0" smtClean="0">
+                <a:solidFill>
+                  <a:srgbClr val="FF0000"/>
+                </a:solidFill>
+              </a:rPr>
+              <a:t>D46</a:t>
+            </a:r>
+          </a:p>
+        </p:txBody>
+      </p:sp>
+      <p:sp>
+        <p:nvSpPr>
+          <p:cNvPr id="27" name="ZoneTexte 26"/>
+          <p:cNvSpPr txBox="1"/>
+          <p:nvPr/>
+        </p:nvSpPr>
+        <p:spPr>
+          <a:xfrm>
+            <a:off x="6875381" y="329655"/>
+            <a:ext cx="669076" cy="369332"/>
+          </a:xfrm>
+          <a:prstGeom prst="rect">
+            <a:avLst/>
+          </a:prstGeom>
+          <a:noFill/>
+        </p:spPr>
+        <p:txBody>
+          <a:bodyPr wrap="square" rtlCol="0">
+            <a:spAutoFit/>
+          </a:bodyPr>
+          <a:lstStyle/>
+          <a:p>
+            <a:r>
+              <a:rPr lang="fr-FR" dirty="0" smtClean="0">
+                <a:solidFill>
+                  <a:srgbClr val="FF0000"/>
+                </a:solidFill>
+              </a:rPr>
+              <a:t>D45</a:t>
+            </a:r>
+          </a:p>
+        </p:txBody>
+      </p:sp>
+      <p:sp>
+        <p:nvSpPr>
+          <p:cNvPr id="28" name="ZoneTexte 27"/>
+          <p:cNvSpPr txBox="1"/>
+          <p:nvPr/>
+        </p:nvSpPr>
+        <p:spPr>
+          <a:xfrm>
+            <a:off x="6864697" y="3355353"/>
+            <a:ext cx="1055648" cy="369332"/>
+          </a:xfrm>
+          <a:prstGeom prst="rect">
+            <a:avLst/>
+          </a:prstGeom>
+          <a:noFill/>
+        </p:spPr>
+        <p:txBody>
+          <a:bodyPr wrap="square" rtlCol="0">
+            <a:spAutoFit/>
+          </a:bodyPr>
+          <a:lstStyle/>
+          <a:p>
+            <a:r>
+              <a:rPr lang="fr-FR" dirty="0" smtClean="0">
+                <a:solidFill>
+                  <a:srgbClr val="FF0000"/>
+                </a:solidFill>
+              </a:rPr>
+              <a:t>D6</a:t>
+            </a:r>
+          </a:p>
+        </p:txBody>
+      </p:sp>
+      <p:sp>
+        <p:nvSpPr>
+          <p:cNvPr id="33" name="ZoneTexte 32"/>
+          <p:cNvSpPr txBox="1"/>
+          <p:nvPr/>
+        </p:nvSpPr>
+        <p:spPr>
+          <a:xfrm>
+            <a:off x="6860983" y="3619266"/>
+            <a:ext cx="709958" cy="369332"/>
+          </a:xfrm>
+          <a:prstGeom prst="rect">
+            <a:avLst/>
+          </a:prstGeom>
+          <a:noFill/>
+        </p:spPr>
+        <p:txBody>
+          <a:bodyPr wrap="square" rtlCol="0">
+            <a:spAutoFit/>
+          </a:bodyPr>
+          <a:lstStyle/>
+          <a:p>
+            <a:r>
+              <a:rPr lang="fr-FR" dirty="0" smtClean="0">
+                <a:solidFill>
+                  <a:srgbClr val="FF0000"/>
+                </a:solidFill>
+              </a:rPr>
+              <a:t>GND</a:t>
+            </a:r>
+          </a:p>
+        </p:txBody>
+      </p:sp>
+      <p:sp>
+        <p:nvSpPr>
+          <p:cNvPr id="34" name="ZoneTexte 33"/>
+          <p:cNvSpPr txBox="1"/>
+          <p:nvPr/>
+        </p:nvSpPr>
+        <p:spPr>
+          <a:xfrm>
+            <a:off x="6875387" y="3909197"/>
+            <a:ext cx="709958" cy="369332"/>
+          </a:xfrm>
+          <a:prstGeom prst="rect">
+            <a:avLst/>
+          </a:prstGeom>
+          <a:noFill/>
+        </p:spPr>
+        <p:txBody>
+          <a:bodyPr wrap="square" rtlCol="0">
+            <a:spAutoFit/>
+          </a:bodyPr>
+          <a:lstStyle/>
+          <a:p>
+            <a:r>
+              <a:rPr lang="fr-FR" dirty="0" smtClean="0">
+                <a:solidFill>
+                  <a:srgbClr val="FF0000"/>
+                </a:solidFill>
+              </a:rPr>
+              <a:t>D29</a:t>
+            </a:r>
+          </a:p>
+        </p:txBody>
+      </p:sp>
+      <p:sp>
+        <p:nvSpPr>
+          <p:cNvPr id="35" name="ZoneTexte 34"/>
+          <p:cNvSpPr txBox="1"/>
+          <p:nvPr/>
+        </p:nvSpPr>
+        <p:spPr>
+          <a:xfrm>
+            <a:off x="6882821" y="4429588"/>
+            <a:ext cx="709958" cy="369332"/>
+          </a:xfrm>
+          <a:prstGeom prst="rect">
+            <a:avLst/>
+          </a:prstGeom>
+          <a:noFill/>
+        </p:spPr>
+        <p:txBody>
+          <a:bodyPr wrap="square" rtlCol="0">
+            <a:spAutoFit/>
+          </a:bodyPr>
+          <a:lstStyle/>
+          <a:p>
+            <a:r>
+              <a:rPr lang="fr-FR" dirty="0" smtClean="0">
+                <a:solidFill>
+                  <a:srgbClr val="FF0000"/>
+                </a:solidFill>
+              </a:rPr>
+              <a:t>D28</a:t>
+            </a:r>
+          </a:p>
+        </p:txBody>
+      </p:sp>
+      <p:sp>
+        <p:nvSpPr>
+          <p:cNvPr id="36" name="ZoneTexte 35"/>
+          <p:cNvSpPr txBox="1"/>
+          <p:nvPr/>
+        </p:nvSpPr>
+        <p:spPr>
+          <a:xfrm>
+            <a:off x="6893975" y="4975997"/>
+            <a:ext cx="709958" cy="369332"/>
+          </a:xfrm>
+          <a:prstGeom prst="rect">
+            <a:avLst/>
+          </a:prstGeom>
+          <a:noFill/>
+        </p:spPr>
+        <p:txBody>
+          <a:bodyPr wrap="square" rtlCol="0">
+            <a:spAutoFit/>
+          </a:bodyPr>
+          <a:lstStyle/>
+          <a:p>
+            <a:r>
+              <a:rPr lang="fr-FR" dirty="0" smtClean="0">
+                <a:solidFill>
+                  <a:srgbClr val="FF0000"/>
+                </a:solidFill>
+              </a:rPr>
+              <a:t>D27</a:t>
+            </a:r>
+          </a:p>
+        </p:txBody>
+      </p:sp>
+      <p:sp>
+        <p:nvSpPr>
+          <p:cNvPr id="37" name="ZoneTexte 36"/>
+          <p:cNvSpPr txBox="1"/>
+          <p:nvPr/>
+        </p:nvSpPr>
+        <p:spPr>
+          <a:xfrm>
+            <a:off x="6890259" y="5574446"/>
+            <a:ext cx="709958" cy="369332"/>
+          </a:xfrm>
+          <a:prstGeom prst="rect">
+            <a:avLst/>
+          </a:prstGeom>
+          <a:noFill/>
+        </p:spPr>
+        <p:txBody>
+          <a:bodyPr wrap="square" rtlCol="0">
+            <a:spAutoFit/>
+          </a:bodyPr>
+          <a:lstStyle/>
+          <a:p>
+            <a:r>
+              <a:rPr lang="fr-FR" dirty="0" smtClean="0">
+                <a:solidFill>
+                  <a:srgbClr val="FF0000"/>
+                </a:solidFill>
+              </a:rPr>
+              <a:t>D26</a:t>
+            </a:r>
+          </a:p>
+        </p:txBody>
+      </p:sp>
+      <p:sp>
+        <p:nvSpPr>
+          <p:cNvPr id="42" name="ZoneTexte 41"/>
+          <p:cNvSpPr txBox="1"/>
+          <p:nvPr/>
+        </p:nvSpPr>
+        <p:spPr>
+          <a:xfrm>
+            <a:off x="6867954" y="4191696"/>
+            <a:ext cx="709958" cy="369332"/>
+          </a:xfrm>
+          <a:prstGeom prst="rect">
+            <a:avLst/>
+          </a:prstGeom>
+          <a:noFill/>
+        </p:spPr>
+        <p:txBody>
+          <a:bodyPr wrap="square" rtlCol="0">
+            <a:spAutoFit/>
+          </a:bodyPr>
+          <a:lstStyle/>
+          <a:p>
+            <a:r>
+              <a:rPr lang="fr-FR" dirty="0" smtClean="0">
+                <a:solidFill>
+                  <a:srgbClr val="FF0000"/>
+                </a:solidFill>
+              </a:rPr>
+              <a:t>D30</a:t>
+            </a:r>
+          </a:p>
+        </p:txBody>
+      </p:sp>
+      <p:sp>
+        <p:nvSpPr>
+          <p:cNvPr id="43" name="ZoneTexte 42"/>
+          <p:cNvSpPr txBox="1"/>
+          <p:nvPr/>
+        </p:nvSpPr>
+        <p:spPr>
+          <a:xfrm>
+            <a:off x="6886540" y="4700934"/>
+            <a:ext cx="709958" cy="369332"/>
+          </a:xfrm>
+          <a:prstGeom prst="rect">
+            <a:avLst/>
+          </a:prstGeom>
+          <a:noFill/>
+        </p:spPr>
+        <p:txBody>
+          <a:bodyPr wrap="square" rtlCol="0">
+            <a:spAutoFit/>
+          </a:bodyPr>
+          <a:lstStyle/>
+          <a:p>
+            <a:r>
+              <a:rPr lang="fr-FR" dirty="0" smtClean="0">
+                <a:solidFill>
+                  <a:srgbClr val="FF0000"/>
+                </a:solidFill>
+              </a:rPr>
+              <a:t>D31</a:t>
+            </a:r>
+          </a:p>
+        </p:txBody>
+      </p:sp>
+      <p:sp>
+        <p:nvSpPr>
+          <p:cNvPr id="44" name="ZoneTexte 43"/>
+          <p:cNvSpPr txBox="1"/>
+          <p:nvPr/>
+        </p:nvSpPr>
+        <p:spPr>
+          <a:xfrm>
+            <a:off x="6886541" y="5291949"/>
+            <a:ext cx="709958" cy="369332"/>
+          </a:xfrm>
+          <a:prstGeom prst="rect">
+            <a:avLst/>
+          </a:prstGeom>
+          <a:noFill/>
+        </p:spPr>
+        <p:txBody>
+          <a:bodyPr wrap="square" rtlCol="0">
+            <a:spAutoFit/>
+          </a:bodyPr>
+          <a:lstStyle/>
+          <a:p>
+            <a:r>
+              <a:rPr lang="fr-FR" dirty="0" smtClean="0">
+                <a:solidFill>
+                  <a:srgbClr val="FF0000"/>
+                </a:solidFill>
+              </a:rPr>
+              <a:t>D32</a:t>
+            </a:r>
+          </a:p>
+        </p:txBody>
+      </p:sp>
+      <p:sp>
+        <p:nvSpPr>
+          <p:cNvPr id="45" name="ZoneTexte 44"/>
+          <p:cNvSpPr txBox="1"/>
+          <p:nvPr/>
+        </p:nvSpPr>
+        <p:spPr>
+          <a:xfrm>
+            <a:off x="6893976" y="5845793"/>
+            <a:ext cx="709958" cy="369332"/>
+          </a:xfrm>
+          <a:prstGeom prst="rect">
+            <a:avLst/>
+          </a:prstGeom>
+          <a:noFill/>
+        </p:spPr>
+        <p:txBody>
+          <a:bodyPr wrap="square" rtlCol="0">
+            <a:spAutoFit/>
+          </a:bodyPr>
+          <a:lstStyle/>
+          <a:p>
+            <a:r>
+              <a:rPr lang="fr-FR" dirty="0" smtClean="0">
+                <a:solidFill>
+                  <a:srgbClr val="FF0000"/>
+                </a:solidFill>
+              </a:rPr>
+              <a:t>D33</a:t>
+            </a:r>
+          </a:p>
+        </p:txBody>
+      </p:sp>
+      <p:sp>
+        <p:nvSpPr>
+          <p:cNvPr id="50" name="ZoneTexte 49"/>
+          <p:cNvSpPr txBox="1"/>
+          <p:nvPr/>
+        </p:nvSpPr>
+        <p:spPr>
+          <a:xfrm>
+            <a:off x="6897688" y="6117140"/>
+            <a:ext cx="709958" cy="369332"/>
+          </a:xfrm>
+          <a:prstGeom prst="rect">
+            <a:avLst/>
+          </a:prstGeom>
+          <a:noFill/>
+        </p:spPr>
+        <p:txBody>
+          <a:bodyPr wrap="square" rtlCol="0">
+            <a:spAutoFit/>
+          </a:bodyPr>
+          <a:lstStyle/>
+          <a:p>
+            <a:r>
+              <a:rPr lang="fr-FR" dirty="0" smtClean="0">
+                <a:solidFill>
+                  <a:srgbClr val="FF0000"/>
+                </a:solidFill>
+              </a:rPr>
+              <a:t>VCC</a:t>
+            </a:r>
+          </a:p>
+        </p:txBody>
+      </p:sp>
+      <p:sp>
+        <p:nvSpPr>
+          <p:cNvPr id="38" name="ZoneTexte 37"/>
+          <p:cNvSpPr txBox="1"/>
+          <p:nvPr/>
+        </p:nvSpPr>
+        <p:spPr>
+          <a:xfrm>
+            <a:off x="3931233" y="6105058"/>
+            <a:ext cx="709958" cy="369332"/>
+          </a:xfrm>
+          <a:prstGeom prst="rect">
+            <a:avLst/>
+          </a:prstGeom>
+          <a:noFill/>
+        </p:spPr>
+        <p:txBody>
+          <a:bodyPr wrap="square" rtlCol="0">
+            <a:spAutoFit/>
+          </a:bodyPr>
+          <a:lstStyle/>
+          <a:p>
+            <a:r>
+              <a:rPr lang="fr-FR" dirty="0" smtClean="0">
+                <a:solidFill>
+                  <a:srgbClr val="FF0000"/>
+                </a:solidFill>
+              </a:rPr>
+              <a:t>D25</a:t>
+            </a:r>
+          </a:p>
+        </p:txBody>
+      </p:sp>
+      <p:sp>
+        <p:nvSpPr>
+          <p:cNvPr id="39" name="ZoneTexte 38"/>
+          <p:cNvSpPr txBox="1"/>
+          <p:nvPr/>
+        </p:nvSpPr>
+        <p:spPr>
+          <a:xfrm>
+            <a:off x="3929143" y="5554931"/>
+            <a:ext cx="709958" cy="369332"/>
+          </a:xfrm>
+          <a:prstGeom prst="rect">
+            <a:avLst/>
+          </a:prstGeom>
+          <a:noFill/>
+        </p:spPr>
+        <p:txBody>
+          <a:bodyPr wrap="square" rtlCol="0">
+            <a:spAutoFit/>
+          </a:bodyPr>
+          <a:lstStyle/>
+          <a:p>
+            <a:r>
+              <a:rPr lang="fr-FR" dirty="0" smtClean="0">
+                <a:solidFill>
+                  <a:srgbClr val="FF0000"/>
+                </a:solidFill>
+              </a:rPr>
+              <a:t>D24</a:t>
+            </a:r>
+          </a:p>
+        </p:txBody>
+      </p:sp>
+      <p:sp>
+        <p:nvSpPr>
+          <p:cNvPr id="40" name="ZoneTexte 39"/>
+          <p:cNvSpPr txBox="1"/>
+          <p:nvPr/>
+        </p:nvSpPr>
+        <p:spPr>
+          <a:xfrm>
+            <a:off x="3930769" y="5030823"/>
+            <a:ext cx="709958" cy="369332"/>
+          </a:xfrm>
+          <a:prstGeom prst="rect">
+            <a:avLst/>
+          </a:prstGeom>
+          <a:noFill/>
+        </p:spPr>
+        <p:txBody>
+          <a:bodyPr wrap="square" rtlCol="0">
+            <a:spAutoFit/>
+          </a:bodyPr>
+          <a:lstStyle/>
+          <a:p>
+            <a:r>
+              <a:rPr lang="fr-FR" dirty="0" smtClean="0">
+                <a:solidFill>
+                  <a:srgbClr val="FF0000"/>
+                </a:solidFill>
+              </a:rPr>
+              <a:t>D23</a:t>
+            </a:r>
+          </a:p>
+        </p:txBody>
+      </p:sp>
+      <p:sp>
+        <p:nvSpPr>
+          <p:cNvPr id="41" name="ZoneTexte 40"/>
+          <p:cNvSpPr txBox="1"/>
+          <p:nvPr/>
+        </p:nvSpPr>
+        <p:spPr>
+          <a:xfrm>
+            <a:off x="3932860" y="4499280"/>
+            <a:ext cx="709958" cy="369332"/>
+          </a:xfrm>
+          <a:prstGeom prst="rect">
+            <a:avLst/>
+          </a:prstGeom>
+          <a:noFill/>
+        </p:spPr>
+        <p:txBody>
+          <a:bodyPr wrap="square" rtlCol="0">
+            <a:spAutoFit/>
+          </a:bodyPr>
+          <a:lstStyle/>
+          <a:p>
+            <a:r>
+              <a:rPr lang="fr-FR" dirty="0" smtClean="0">
+                <a:solidFill>
+                  <a:srgbClr val="FF0000"/>
+                </a:solidFill>
+              </a:rPr>
+              <a:t>D22</a:t>
+            </a:r>
+          </a:p>
+        </p:txBody>
+      </p:sp>
+      <p:sp>
+        <p:nvSpPr>
+          <p:cNvPr id="46" name="ZoneTexte 45"/>
+          <p:cNvSpPr txBox="1"/>
+          <p:nvPr/>
+        </p:nvSpPr>
+        <p:spPr>
+          <a:xfrm>
+            <a:off x="3931236" y="5837430"/>
+            <a:ext cx="709958" cy="369332"/>
+          </a:xfrm>
+          <a:prstGeom prst="rect">
+            <a:avLst/>
+          </a:prstGeom>
+          <a:noFill/>
+        </p:spPr>
+        <p:txBody>
+          <a:bodyPr wrap="square" rtlCol="0">
+            <a:spAutoFit/>
+          </a:bodyPr>
+          <a:lstStyle/>
+          <a:p>
+            <a:r>
+              <a:rPr lang="fr-FR" dirty="0" smtClean="0">
+                <a:solidFill>
+                  <a:srgbClr val="FF0000"/>
+                </a:solidFill>
+              </a:rPr>
+              <a:t>D34</a:t>
+            </a:r>
+          </a:p>
+        </p:txBody>
+      </p:sp>
+      <p:sp>
+        <p:nvSpPr>
+          <p:cNvPr id="47" name="ZoneTexte 46"/>
+          <p:cNvSpPr txBox="1"/>
+          <p:nvPr/>
+        </p:nvSpPr>
+        <p:spPr>
+          <a:xfrm>
+            <a:off x="3930771" y="5287304"/>
+            <a:ext cx="709958" cy="369332"/>
+          </a:xfrm>
+          <a:prstGeom prst="rect">
+            <a:avLst/>
+          </a:prstGeom>
+          <a:noFill/>
+        </p:spPr>
+        <p:txBody>
+          <a:bodyPr wrap="square" rtlCol="0">
+            <a:spAutoFit/>
+          </a:bodyPr>
+          <a:lstStyle/>
+          <a:p>
+            <a:r>
+              <a:rPr lang="fr-FR" dirty="0" smtClean="0">
+                <a:solidFill>
+                  <a:srgbClr val="FF0000"/>
+                </a:solidFill>
+              </a:rPr>
+              <a:t>D35</a:t>
+            </a:r>
+          </a:p>
+        </p:txBody>
+      </p:sp>
+      <p:sp>
+        <p:nvSpPr>
+          <p:cNvPr id="48" name="ZoneTexte 47"/>
+          <p:cNvSpPr txBox="1"/>
+          <p:nvPr/>
+        </p:nvSpPr>
+        <p:spPr>
+          <a:xfrm>
+            <a:off x="3930771" y="4763196"/>
+            <a:ext cx="709958" cy="369332"/>
+          </a:xfrm>
+          <a:prstGeom prst="rect">
+            <a:avLst/>
+          </a:prstGeom>
+          <a:noFill/>
+        </p:spPr>
+        <p:txBody>
+          <a:bodyPr wrap="square" rtlCol="0">
+            <a:spAutoFit/>
+          </a:bodyPr>
+          <a:lstStyle/>
+          <a:p>
+            <a:r>
+              <a:rPr lang="fr-FR" dirty="0" smtClean="0">
+                <a:solidFill>
+                  <a:srgbClr val="FF0000"/>
+                </a:solidFill>
+              </a:rPr>
+              <a:t>D36</a:t>
+            </a:r>
+          </a:p>
+        </p:txBody>
+      </p:sp>
+      <p:sp>
+        <p:nvSpPr>
+          <p:cNvPr id="49" name="ZoneTexte 48"/>
+          <p:cNvSpPr txBox="1"/>
+          <p:nvPr/>
+        </p:nvSpPr>
+        <p:spPr>
+          <a:xfrm>
+            <a:off x="3940297" y="4216787"/>
+            <a:ext cx="709958" cy="369332"/>
+          </a:xfrm>
+          <a:prstGeom prst="rect">
+            <a:avLst/>
+          </a:prstGeom>
+          <a:noFill/>
+        </p:spPr>
+        <p:txBody>
+          <a:bodyPr wrap="square" rtlCol="0">
+            <a:spAutoFit/>
+          </a:bodyPr>
+          <a:lstStyle/>
+          <a:p>
+            <a:r>
+              <a:rPr lang="fr-FR" dirty="0" smtClean="0">
+                <a:solidFill>
+                  <a:srgbClr val="FF0000"/>
+                </a:solidFill>
+              </a:rPr>
+              <a:t>D37</a:t>
+            </a:r>
+          </a:p>
+        </p:txBody>
+      </p:sp>
+      <p:sp>
+        <p:nvSpPr>
+          <p:cNvPr id="6" name="ZoneTexte 5"/>
+          <p:cNvSpPr txBox="1"/>
+          <p:nvPr/>
+        </p:nvSpPr>
+        <p:spPr>
+          <a:xfrm>
+            <a:off x="3937042" y="3101665"/>
+            <a:ext cx="546410" cy="369332"/>
+          </a:xfrm>
+          <a:prstGeom prst="rect">
+            <a:avLst/>
+          </a:prstGeom>
+          <a:noFill/>
+        </p:spPr>
+        <p:txBody>
+          <a:bodyPr wrap="square" rtlCol="0">
+            <a:spAutoFit/>
+          </a:bodyPr>
+          <a:lstStyle/>
+          <a:p>
+            <a:r>
+              <a:rPr lang="fr-FR" dirty="0" smtClean="0">
+                <a:solidFill>
+                  <a:srgbClr val="FF0000"/>
+                </a:solidFill>
+              </a:rPr>
+              <a:t>A0</a:t>
+            </a:r>
+            <a:endParaRPr lang="fr-FR" dirty="0">
+              <a:solidFill>
+                <a:srgbClr val="FF0000"/>
+              </a:solidFill>
+            </a:endParaRPr>
+          </a:p>
+        </p:txBody>
+      </p:sp>
+      <p:sp>
+        <p:nvSpPr>
+          <p:cNvPr id="7" name="ZoneTexte 6"/>
+          <p:cNvSpPr txBox="1"/>
+          <p:nvPr/>
+        </p:nvSpPr>
+        <p:spPr>
+          <a:xfrm>
+            <a:off x="3944478" y="2819168"/>
+            <a:ext cx="546410" cy="369332"/>
+          </a:xfrm>
+          <a:prstGeom prst="rect">
+            <a:avLst/>
+          </a:prstGeom>
+          <a:noFill/>
+        </p:spPr>
+        <p:txBody>
+          <a:bodyPr wrap="square" rtlCol="0">
+            <a:spAutoFit/>
+          </a:bodyPr>
+          <a:lstStyle/>
+          <a:p>
+            <a:r>
+              <a:rPr lang="fr-FR" dirty="0" smtClean="0">
+                <a:solidFill>
+                  <a:srgbClr val="FF0000"/>
+                </a:solidFill>
+              </a:rPr>
+              <a:t>A1</a:t>
+            </a:r>
+            <a:endParaRPr lang="fr-FR" dirty="0">
+              <a:solidFill>
+                <a:srgbClr val="FF0000"/>
+              </a:solidFill>
+            </a:endParaRPr>
+          </a:p>
+        </p:txBody>
+      </p:sp>
+      <p:sp>
+        <p:nvSpPr>
+          <p:cNvPr id="8" name="ZoneTexte 7"/>
+          <p:cNvSpPr txBox="1"/>
+          <p:nvPr/>
+        </p:nvSpPr>
+        <p:spPr>
+          <a:xfrm>
+            <a:off x="3934952" y="2538762"/>
+            <a:ext cx="546410" cy="369332"/>
+          </a:xfrm>
+          <a:prstGeom prst="rect">
+            <a:avLst/>
+          </a:prstGeom>
+          <a:noFill/>
+        </p:spPr>
+        <p:txBody>
+          <a:bodyPr wrap="square" rtlCol="0">
+            <a:spAutoFit/>
+          </a:bodyPr>
+          <a:lstStyle/>
+          <a:p>
+            <a:r>
+              <a:rPr lang="fr-FR" dirty="0" smtClean="0">
+                <a:solidFill>
+                  <a:srgbClr val="FF0000"/>
+                </a:solidFill>
+              </a:rPr>
+              <a:t>A2</a:t>
+            </a:r>
+          </a:p>
+        </p:txBody>
+      </p:sp>
+      <p:sp>
+        <p:nvSpPr>
+          <p:cNvPr id="9" name="ZoneTexte 8"/>
+          <p:cNvSpPr txBox="1"/>
+          <p:nvPr/>
+        </p:nvSpPr>
+        <p:spPr>
+          <a:xfrm>
+            <a:off x="3934952" y="2245809"/>
+            <a:ext cx="546410" cy="369332"/>
+          </a:xfrm>
+          <a:prstGeom prst="rect">
+            <a:avLst/>
+          </a:prstGeom>
+          <a:noFill/>
+        </p:spPr>
+        <p:txBody>
+          <a:bodyPr wrap="square" rtlCol="0">
+            <a:spAutoFit/>
+          </a:bodyPr>
+          <a:lstStyle/>
+          <a:p>
+            <a:r>
+              <a:rPr lang="fr-FR" dirty="0" smtClean="0">
+                <a:solidFill>
+                  <a:srgbClr val="FF0000"/>
+                </a:solidFill>
+              </a:rPr>
+              <a:t>A3</a:t>
+            </a:r>
+            <a:endParaRPr lang="fr-FR" dirty="0">
+              <a:solidFill>
+                <a:srgbClr val="FF0000"/>
+              </a:solidFill>
+            </a:endParaRPr>
+          </a:p>
+        </p:txBody>
+      </p:sp>
+      <p:sp>
+        <p:nvSpPr>
+          <p:cNvPr id="10" name="ZoneTexte 9"/>
+          <p:cNvSpPr txBox="1"/>
+          <p:nvPr/>
+        </p:nvSpPr>
+        <p:spPr>
+          <a:xfrm>
+            <a:off x="3934950" y="1992351"/>
+            <a:ext cx="546410" cy="369332"/>
+          </a:xfrm>
+          <a:prstGeom prst="rect">
+            <a:avLst/>
+          </a:prstGeom>
+          <a:noFill/>
+        </p:spPr>
+        <p:txBody>
+          <a:bodyPr wrap="square" rtlCol="0">
+            <a:spAutoFit/>
+          </a:bodyPr>
+          <a:lstStyle/>
+          <a:p>
+            <a:r>
+              <a:rPr lang="fr-FR" dirty="0" smtClean="0">
+                <a:solidFill>
+                  <a:srgbClr val="FF0000"/>
+                </a:solidFill>
+              </a:rPr>
+              <a:t>A4</a:t>
+            </a:r>
+            <a:endParaRPr lang="fr-FR" dirty="0">
+              <a:solidFill>
+                <a:srgbClr val="FF0000"/>
+              </a:solidFill>
+            </a:endParaRPr>
+          </a:p>
+        </p:txBody>
+      </p:sp>
+      <p:sp>
+        <p:nvSpPr>
+          <p:cNvPr id="11" name="ZoneTexte 10"/>
+          <p:cNvSpPr txBox="1"/>
+          <p:nvPr/>
+        </p:nvSpPr>
+        <p:spPr>
+          <a:xfrm>
+            <a:off x="3934951" y="1715196"/>
+            <a:ext cx="546410" cy="369332"/>
+          </a:xfrm>
+          <a:prstGeom prst="rect">
+            <a:avLst/>
+          </a:prstGeom>
+          <a:noFill/>
+        </p:spPr>
+        <p:txBody>
+          <a:bodyPr wrap="square" rtlCol="0">
+            <a:spAutoFit/>
+          </a:bodyPr>
+          <a:lstStyle/>
+          <a:p>
+            <a:r>
+              <a:rPr lang="fr-FR" dirty="0" smtClean="0">
+                <a:solidFill>
+                  <a:srgbClr val="FF0000"/>
+                </a:solidFill>
+              </a:rPr>
+              <a:t>A5</a:t>
+            </a:r>
+            <a:endParaRPr lang="fr-FR" dirty="0">
+              <a:solidFill>
+                <a:srgbClr val="FF0000"/>
+              </a:solidFill>
+            </a:endParaRPr>
+          </a:p>
+        </p:txBody>
+      </p:sp>
+      <p:sp>
+        <p:nvSpPr>
+          <p:cNvPr id="12" name="ZoneTexte 11"/>
+          <p:cNvSpPr txBox="1"/>
+          <p:nvPr/>
+        </p:nvSpPr>
+        <p:spPr>
+          <a:xfrm>
+            <a:off x="3931234" y="1435950"/>
+            <a:ext cx="546410" cy="369332"/>
+          </a:xfrm>
+          <a:prstGeom prst="rect">
+            <a:avLst/>
+          </a:prstGeom>
+          <a:noFill/>
+        </p:spPr>
+        <p:txBody>
+          <a:bodyPr wrap="square" rtlCol="0">
+            <a:spAutoFit/>
+          </a:bodyPr>
+          <a:lstStyle/>
+          <a:p>
+            <a:r>
+              <a:rPr lang="fr-FR" dirty="0" smtClean="0">
+                <a:solidFill>
+                  <a:srgbClr val="FF0000"/>
+                </a:solidFill>
+              </a:rPr>
+              <a:t>A6</a:t>
+            </a:r>
+            <a:endParaRPr lang="fr-FR" dirty="0">
+              <a:solidFill>
+                <a:srgbClr val="FF0000"/>
+              </a:solidFill>
+            </a:endParaRPr>
+          </a:p>
+        </p:txBody>
+      </p:sp>
+      <p:sp>
+        <p:nvSpPr>
+          <p:cNvPr id="13" name="ZoneTexte 12"/>
+          <p:cNvSpPr txBox="1"/>
+          <p:nvPr/>
+        </p:nvSpPr>
+        <p:spPr>
+          <a:xfrm>
+            <a:off x="3942386" y="1187373"/>
+            <a:ext cx="546410" cy="369332"/>
+          </a:xfrm>
+          <a:prstGeom prst="rect">
+            <a:avLst/>
+          </a:prstGeom>
+          <a:noFill/>
+        </p:spPr>
+        <p:txBody>
+          <a:bodyPr wrap="square" rtlCol="0">
+            <a:spAutoFit/>
+          </a:bodyPr>
+          <a:lstStyle/>
+          <a:p>
+            <a:r>
+              <a:rPr lang="fr-FR" dirty="0" smtClean="0">
+                <a:solidFill>
+                  <a:srgbClr val="FF0000"/>
+                </a:solidFill>
+              </a:rPr>
+              <a:t>A7</a:t>
+            </a:r>
+            <a:endParaRPr lang="fr-FR" dirty="0">
+              <a:solidFill>
+                <a:srgbClr val="FF0000"/>
+              </a:solidFill>
+            </a:endParaRPr>
+          </a:p>
+        </p:txBody>
+      </p:sp>
+      <p:sp>
+        <p:nvSpPr>
+          <p:cNvPr id="24" name="ZoneTexte 23"/>
+          <p:cNvSpPr txBox="1"/>
+          <p:nvPr/>
+        </p:nvSpPr>
+        <p:spPr>
+          <a:xfrm>
+            <a:off x="3929139" y="906498"/>
+            <a:ext cx="669076" cy="369332"/>
+          </a:xfrm>
+          <a:prstGeom prst="rect">
+            <a:avLst/>
+          </a:prstGeom>
+          <a:noFill/>
+        </p:spPr>
+        <p:txBody>
+          <a:bodyPr wrap="square" rtlCol="0">
+            <a:spAutoFit/>
+          </a:bodyPr>
+          <a:lstStyle/>
+          <a:p>
+            <a:r>
+              <a:rPr lang="fr-FR" dirty="0" smtClean="0">
+                <a:solidFill>
+                  <a:srgbClr val="FF0000"/>
+                </a:solidFill>
+              </a:rPr>
+              <a:t>D48</a:t>
+            </a:r>
+          </a:p>
+        </p:txBody>
+      </p:sp>
+      <p:sp>
+        <p:nvSpPr>
+          <p:cNvPr id="25" name="ZoneTexte 24"/>
+          <p:cNvSpPr txBox="1"/>
+          <p:nvPr/>
+        </p:nvSpPr>
+        <p:spPr>
+          <a:xfrm>
+            <a:off x="3927048" y="611224"/>
+            <a:ext cx="669076" cy="369332"/>
+          </a:xfrm>
+          <a:prstGeom prst="rect">
+            <a:avLst/>
+          </a:prstGeom>
+          <a:noFill/>
+        </p:spPr>
+        <p:txBody>
+          <a:bodyPr wrap="square" rtlCol="0">
+            <a:spAutoFit/>
+          </a:bodyPr>
+          <a:lstStyle/>
+          <a:p>
+            <a:r>
+              <a:rPr lang="fr-FR" dirty="0" smtClean="0">
+                <a:solidFill>
+                  <a:srgbClr val="FF0000"/>
+                </a:solidFill>
+              </a:rPr>
+              <a:t>D47</a:t>
+            </a:r>
+          </a:p>
+        </p:txBody>
+      </p:sp>
+      <p:sp>
+        <p:nvSpPr>
+          <p:cNvPr id="29" name="ZoneTexte 28"/>
+          <p:cNvSpPr txBox="1"/>
+          <p:nvPr/>
+        </p:nvSpPr>
+        <p:spPr>
+          <a:xfrm>
+            <a:off x="3932392" y="313857"/>
+            <a:ext cx="557560" cy="369332"/>
+          </a:xfrm>
+          <a:prstGeom prst="rect">
+            <a:avLst/>
+          </a:prstGeom>
+          <a:noFill/>
+        </p:spPr>
+        <p:txBody>
+          <a:bodyPr wrap="square" rtlCol="0">
+            <a:spAutoFit/>
+          </a:bodyPr>
+          <a:lstStyle/>
+          <a:p>
+            <a:r>
+              <a:rPr lang="fr-FR" dirty="0" smtClean="0">
+                <a:solidFill>
+                  <a:srgbClr val="FF0000"/>
+                </a:solidFill>
+              </a:rPr>
+              <a:t>D7</a:t>
+            </a:r>
+          </a:p>
+        </p:txBody>
+      </p:sp>
+      <p:sp>
+        <p:nvSpPr>
+          <p:cNvPr id="30" name="ZoneTexte 29"/>
+          <p:cNvSpPr txBox="1"/>
+          <p:nvPr/>
+        </p:nvSpPr>
+        <p:spPr>
+          <a:xfrm>
+            <a:off x="3931696" y="3365575"/>
+            <a:ext cx="557560" cy="369332"/>
+          </a:xfrm>
+          <a:prstGeom prst="rect">
+            <a:avLst/>
+          </a:prstGeom>
+          <a:noFill/>
+        </p:spPr>
+        <p:txBody>
+          <a:bodyPr wrap="square" rtlCol="0">
+            <a:spAutoFit/>
+          </a:bodyPr>
+          <a:lstStyle/>
+          <a:p>
+            <a:r>
+              <a:rPr lang="fr-FR" dirty="0" smtClean="0">
+                <a:solidFill>
+                  <a:srgbClr val="FF0000"/>
+                </a:solidFill>
+              </a:rPr>
+              <a:t>D9</a:t>
+            </a:r>
+          </a:p>
+        </p:txBody>
+      </p:sp>
+      <p:sp>
+        <p:nvSpPr>
+          <p:cNvPr id="31" name="ZoneTexte 30"/>
+          <p:cNvSpPr txBox="1"/>
+          <p:nvPr/>
+        </p:nvSpPr>
+        <p:spPr>
+          <a:xfrm>
+            <a:off x="3939131" y="3908268"/>
+            <a:ext cx="557560" cy="369332"/>
+          </a:xfrm>
+          <a:prstGeom prst="rect">
+            <a:avLst/>
+          </a:prstGeom>
+          <a:noFill/>
+        </p:spPr>
+        <p:txBody>
+          <a:bodyPr wrap="square" rtlCol="0">
+            <a:spAutoFit/>
+          </a:bodyPr>
+          <a:lstStyle/>
+          <a:p>
+            <a:r>
+              <a:rPr lang="fr-FR" dirty="0" smtClean="0">
+                <a:solidFill>
+                  <a:srgbClr val="FF0000"/>
+                </a:solidFill>
+              </a:rPr>
+              <a:t>D16</a:t>
+            </a:r>
+          </a:p>
+        </p:txBody>
+      </p:sp>
+      <p:sp>
+        <p:nvSpPr>
+          <p:cNvPr id="32" name="ZoneTexte 31"/>
+          <p:cNvSpPr txBox="1"/>
+          <p:nvPr/>
+        </p:nvSpPr>
+        <p:spPr>
+          <a:xfrm>
+            <a:off x="3926354" y="3640639"/>
+            <a:ext cx="709958" cy="369332"/>
+          </a:xfrm>
+          <a:prstGeom prst="rect">
+            <a:avLst/>
+          </a:prstGeom>
+          <a:noFill/>
+        </p:spPr>
+        <p:txBody>
+          <a:bodyPr wrap="square" rtlCol="0">
+            <a:spAutoFit/>
+          </a:bodyPr>
+          <a:lstStyle/>
+          <a:p>
+            <a:r>
+              <a:rPr lang="fr-FR" dirty="0" smtClean="0">
+                <a:solidFill>
+                  <a:srgbClr val="FF0000"/>
+                </a:solidFill>
+              </a:rPr>
+              <a:t>GND</a:t>
+            </a:r>
+          </a:p>
+        </p:txBody>
+      </p:sp>
+      <p:sp>
+        <p:nvSpPr>
+          <p:cNvPr id="51" name="Rectangle 50"/>
+          <p:cNvSpPr/>
+          <p:nvPr/>
+        </p:nvSpPr>
+        <p:spPr>
+          <a:xfrm rot="16200000">
+            <a:off x="2053582" y="3053369"/>
+            <a:ext cx="3285451" cy="461665"/>
+          </a:xfrm>
+          <a:prstGeom prst="rect">
+            <a:avLst/>
+          </a:prstGeom>
+        </p:spPr>
+        <p:txBody>
+          <a:bodyPr wrap="none">
+            <a:spAutoFit/>
+          </a:bodyPr>
+          <a:lstStyle/>
+          <a:p>
+            <a:r>
+              <a:rPr lang="fr-FR" sz="2400" b="1" dirty="0" err="1" smtClean="0">
+                <a:solidFill>
+                  <a:srgbClr val="FF0000"/>
+                </a:solidFill>
+              </a:rPr>
+              <a:t>Arduino</a:t>
+            </a:r>
+            <a:r>
+              <a:rPr lang="fr-FR" sz="2400" b="1" dirty="0" smtClean="0">
+                <a:solidFill>
+                  <a:srgbClr val="FF0000"/>
+                </a:solidFill>
+              </a:rPr>
+              <a:t> </a:t>
+            </a:r>
+            <a:r>
+              <a:rPr lang="fr-FR" sz="2400" b="1" dirty="0" err="1" smtClean="0">
+                <a:solidFill>
+                  <a:srgbClr val="FF0000"/>
+                </a:solidFill>
+              </a:rPr>
+              <a:t>Mega</a:t>
+            </a:r>
+            <a:r>
+              <a:rPr lang="fr-FR" sz="2400" b="1" dirty="0" smtClean="0">
+                <a:solidFill>
+                  <a:srgbClr val="FF0000"/>
+                </a:solidFill>
+              </a:rPr>
+              <a:t> 2560 Pins</a:t>
+            </a:r>
+            <a:endParaRPr lang="fr-FR" sz="2400" dirty="0">
+              <a:solidFill>
+                <a:srgbClr val="FF0000"/>
+              </a:solidFill>
+            </a:endParaRPr>
+          </a:p>
+        </p:txBody>
+      </p:sp>
     </p:spTree>
     <p:extLst>
       <p:ext uri="{BB962C8B-B14F-4D97-AF65-F5344CB8AC3E}">
-        <p14:creationId xmlns="" xmlns:p14="http://schemas.microsoft.com/office/powerpoint/2010/main" val="141957672"/>
+        <p14:creationId xmlns:p14="http://schemas.microsoft.com/office/powerpoint/2010/main" val="3182372557"/>
       </p:ext>
     </p:extLst>
   </p:cSld>
   <p:clrMapOvr>
     <a:masterClrMapping/>
   </p:clrMapOvr>
+  <p:timing>
+    <p:tnLst>
+      <p:par>
+        <p:cTn id="1" dur="indefinite" restart="never" nodeType="tmRoot"/>
+      </p:par>
+    </p:tnLst>
+  </p:timing>
 </p:sld>
 </file>
 
@@ -9106,38 +8225,14 @@
       </p:grpSpPr>
       <p:pic>
         <p:nvPicPr>
-          <p:cNvPr id="7" name="Image 6"/>
+          <p:cNvPr id="1026" name="Picture 2" descr="C:\Users\BOICHOT\Downloads\Neo-Geo-Sengoku-2-Red-Blood-main\MVS_bootleg_convert\Detail_on_C1_C2.jpg"/>
           <p:cNvPicPr>
-            <a:picLocks noChangeAspect="1"/>
+            <a:picLocks noChangeAspect="1" noChangeArrowheads="1"/>
           </p:cNvPicPr>
           <p:nvPr/>
         </p:nvPicPr>
         <p:blipFill>
           <a:blip r:embed="rId2" cstate="print"/>
-          <a:stretch>
-            <a:fillRect/>
-          </a:stretch>
-        </p:blipFill>
-        <p:spPr>
-          <a:xfrm>
-            <a:off x="868731" y="446512"/>
-            <a:ext cx="3112253" cy="5798171"/>
-          </a:xfrm>
-          <a:prstGeom prst="rect">
-            <a:avLst/>
-          </a:prstGeom>
-        </p:spPr>
-      </p:pic>
-      <p:pic>
-        <p:nvPicPr>
-          <p:cNvPr id="1026" name="Picture 2"/>
-          <p:cNvPicPr>
-            <a:picLocks noChangeAspect="1" noChangeArrowheads="1"/>
-          </p:cNvPicPr>
-          <p:nvPr/>
-        </p:nvPicPr>
-        <p:blipFill>
-          <a:blip r:embed="rId3" cstate="print"/>
           <a:srcRect/>
           <a:stretch>
             <a:fillRect/>
@@ -9145,230 +8240,311 @@
         </p:blipFill>
         <p:spPr bwMode="auto">
           <a:xfrm>
-            <a:off x="4984594" y="400399"/>
-            <a:ext cx="7207405" cy="5978099"/>
-          </a:xfrm>
-          <a:prstGeom prst="rect">
-            <a:avLst/>
-          </a:prstGeom>
-          <a:noFill/>
-          <a:ln w="9525">
-            <a:noFill/>
-            <a:miter lim="800000"/>
-            <a:headEnd/>
-            <a:tailEnd/>
-          </a:ln>
-          <a:effectLst/>
+            <a:off x="1059366" y="0"/>
+            <a:ext cx="10275944" cy="6858000"/>
+          </a:xfrm>
+          <a:prstGeom prst="rect">
+            <a:avLst/>
+          </a:prstGeom>
+          <a:noFill/>
         </p:spPr>
       </p:pic>
       <p:sp>
         <p:nvSpPr>
-          <p:cNvPr id="11" name="ZoneTexte 10"/>
-          <p:cNvSpPr txBox="1"/>
-          <p:nvPr/>
-        </p:nvSpPr>
-        <p:spPr>
-          <a:xfrm>
-            <a:off x="0" y="3579309"/>
-            <a:ext cx="952500" cy="276999"/>
-          </a:xfrm>
-          <a:prstGeom prst="rect">
-            <a:avLst/>
-          </a:prstGeom>
-          <a:noFill/>
-        </p:spPr>
-        <p:txBody>
-          <a:bodyPr wrap="square" rtlCol="0">
-            <a:spAutoFit/>
-          </a:bodyPr>
-          <a:lstStyle/>
-          <a:p>
-            <a:r>
-              <a:rPr lang="fr-FR" sz="1200" dirty="0" smtClean="0">
-                <a:solidFill>
-                  <a:srgbClr val="FF0000"/>
-                </a:solidFill>
-              </a:rPr>
-              <a:t>GND on PCB</a:t>
-            </a:r>
-            <a:endParaRPr lang="fr-FR" sz="1200" dirty="0">
+          <p:cNvPr id="5" name="ZoneTexte 4"/>
+          <p:cNvSpPr txBox="1"/>
+          <p:nvPr/>
+        </p:nvSpPr>
+        <p:spPr>
+          <a:xfrm>
+            <a:off x="7326352" y="5686220"/>
+            <a:ext cx="3523785" cy="646331"/>
+          </a:xfrm>
+          <a:prstGeom prst="rect">
+            <a:avLst/>
+          </a:prstGeom>
+          <a:noFill/>
+        </p:spPr>
+        <p:txBody>
+          <a:bodyPr wrap="square" rtlCol="0">
+            <a:spAutoFit/>
+          </a:bodyPr>
+          <a:lstStyle/>
+          <a:p>
+            <a:r>
+              <a:rPr lang="fr-FR" sz="3600" b="1" dirty="0" err="1" smtClean="0">
+                <a:solidFill>
+                  <a:srgbClr val="FFC000"/>
+                </a:solidFill>
+              </a:rPr>
+              <a:t>Cut</a:t>
+            </a:r>
+            <a:r>
+              <a:rPr lang="fr-FR" sz="3600" b="1" dirty="0" smtClean="0">
+                <a:solidFill>
+                  <a:srgbClr val="FFC000"/>
+                </a:solidFill>
+              </a:rPr>
+              <a:t> trace to A21</a:t>
+            </a:r>
+            <a:endParaRPr lang="fr-FR" sz="3600" b="1" dirty="0">
               <a:solidFill>
-                <a:srgbClr val="FF0000"/>
+                <a:srgbClr val="FFC000"/>
               </a:solidFill>
             </a:endParaRPr>
           </a:p>
         </p:txBody>
       </p:sp>
-      <p:sp>
-        <p:nvSpPr>
-          <p:cNvPr id="12" name="ZoneTexte 11"/>
-          <p:cNvSpPr txBox="1"/>
-          <p:nvPr/>
-        </p:nvSpPr>
-        <p:spPr>
-          <a:xfrm>
-            <a:off x="3837181" y="3525179"/>
-            <a:ext cx="1209675" cy="276999"/>
-          </a:xfrm>
-          <a:prstGeom prst="rect">
-            <a:avLst/>
-          </a:prstGeom>
-          <a:noFill/>
-        </p:spPr>
-        <p:txBody>
-          <a:bodyPr wrap="square" rtlCol="0">
-            <a:spAutoFit/>
-          </a:bodyPr>
-          <a:lstStyle/>
-          <a:p>
-            <a:r>
-              <a:rPr lang="fr-FR" sz="1200" dirty="0" smtClean="0">
-                <a:solidFill>
-                  <a:srgbClr val="FF0000"/>
-                </a:solidFill>
-              </a:rPr>
-              <a:t>GND on PCB</a:t>
-            </a:r>
-            <a:endParaRPr lang="fr-FR" sz="1200" dirty="0">
+      <p:cxnSp>
+        <p:nvCxnSpPr>
+          <p:cNvPr id="7" name="Connecteur droit avec flèche 6"/>
+          <p:cNvCxnSpPr/>
+          <p:nvPr/>
+        </p:nvCxnSpPr>
+        <p:spPr>
+          <a:xfrm flipH="1" flipV="1">
+            <a:off x="6768790" y="5620215"/>
+            <a:ext cx="591015" cy="356839"/>
+          </a:xfrm>
+          <a:prstGeom prst="straightConnector1">
+            <a:avLst/>
+          </a:prstGeom>
+          <a:ln w="53975">
+            <a:solidFill>
+              <a:srgbClr val="FFC000"/>
+            </a:solidFill>
+            <a:tailEnd type="arrow"/>
+          </a:ln>
+        </p:spPr>
+        <p:style>
+          <a:lnRef idx="1">
+            <a:schemeClr val="accent1"/>
+          </a:lnRef>
+          <a:fillRef idx="0">
+            <a:schemeClr val="accent1"/>
+          </a:fillRef>
+          <a:effectRef idx="0">
+            <a:schemeClr val="accent1"/>
+          </a:effectRef>
+          <a:fontRef idx="minor">
+            <a:schemeClr val="tx1"/>
+          </a:fontRef>
+        </p:style>
+      </p:cxnSp>
+      <p:sp>
+        <p:nvSpPr>
+          <p:cNvPr id="8" name="ZoneTexte 7"/>
+          <p:cNvSpPr txBox="1"/>
+          <p:nvPr/>
+        </p:nvSpPr>
+        <p:spPr>
+          <a:xfrm>
+            <a:off x="1390187" y="184951"/>
+            <a:ext cx="4676077" cy="646331"/>
+          </a:xfrm>
+          <a:prstGeom prst="rect">
+            <a:avLst/>
+          </a:prstGeom>
+          <a:noFill/>
+        </p:spPr>
+        <p:txBody>
+          <a:bodyPr wrap="square" rtlCol="0">
+            <a:spAutoFit/>
+          </a:bodyPr>
+          <a:lstStyle/>
+          <a:p>
+            <a:r>
+              <a:rPr lang="fr-FR" sz="3600" b="1" dirty="0" err="1" smtClean="0">
+                <a:solidFill>
+                  <a:srgbClr val="FFC000"/>
+                </a:solidFill>
+              </a:rPr>
+              <a:t>Connect</a:t>
+            </a:r>
+            <a:r>
+              <a:rPr lang="fr-FR" sz="3600" b="1" dirty="0" smtClean="0">
+                <a:solidFill>
+                  <a:srgbClr val="FFC000"/>
+                </a:solidFill>
+              </a:rPr>
+              <a:t> A21 to VCC</a:t>
+            </a:r>
+            <a:endParaRPr lang="fr-FR" sz="3600" b="1" dirty="0">
               <a:solidFill>
-                <a:srgbClr val="FF0000"/>
+                <a:srgbClr val="FFC000"/>
               </a:solidFill>
             </a:endParaRPr>
           </a:p>
         </p:txBody>
       </p:sp>
-      <p:sp>
-        <p:nvSpPr>
-          <p:cNvPr id="13" name="ZoneTexte 12"/>
-          <p:cNvSpPr txBox="1"/>
-          <p:nvPr/>
-        </p:nvSpPr>
-        <p:spPr>
-          <a:xfrm>
-            <a:off x="9525" y="3360002"/>
-            <a:ext cx="952500" cy="276999"/>
-          </a:xfrm>
-          <a:prstGeom prst="rect">
-            <a:avLst/>
-          </a:prstGeom>
-          <a:noFill/>
-        </p:spPr>
-        <p:txBody>
-          <a:bodyPr wrap="square" rtlCol="0">
-            <a:spAutoFit/>
-          </a:bodyPr>
-          <a:lstStyle/>
-          <a:p>
-            <a:r>
-              <a:rPr lang="fr-FR" sz="1200" dirty="0" smtClean="0">
-                <a:solidFill>
-                  <a:srgbClr val="FF0000"/>
-                </a:solidFill>
-              </a:rPr>
-              <a:t>GND on PCB</a:t>
-            </a:r>
-            <a:endParaRPr lang="fr-FR" sz="1200" dirty="0">
+      <p:cxnSp>
+        <p:nvCxnSpPr>
+          <p:cNvPr id="9" name="Connecteur droit avec flèche 8"/>
+          <p:cNvCxnSpPr/>
+          <p:nvPr/>
+        </p:nvCxnSpPr>
+        <p:spPr>
+          <a:xfrm flipH="1">
+            <a:off x="2252546" y="769434"/>
+            <a:ext cx="446049" cy="624468"/>
+          </a:xfrm>
+          <a:prstGeom prst="straightConnector1">
+            <a:avLst/>
+          </a:prstGeom>
+          <a:ln w="53975">
+            <a:solidFill>
+              <a:srgbClr val="FFC000"/>
+            </a:solidFill>
+            <a:tailEnd type="arrow"/>
+          </a:ln>
+        </p:spPr>
+        <p:style>
+          <a:lnRef idx="1">
+            <a:schemeClr val="accent1"/>
+          </a:lnRef>
+          <a:fillRef idx="0">
+            <a:schemeClr val="accent1"/>
+          </a:fillRef>
+          <a:effectRef idx="0">
+            <a:schemeClr val="accent1"/>
+          </a:effectRef>
+          <a:fontRef idx="minor">
+            <a:schemeClr val="tx1"/>
+          </a:fontRef>
+        </p:style>
+      </p:cxnSp>
+      <p:sp>
+        <p:nvSpPr>
+          <p:cNvPr id="12" name="ZoneTexte 11"/>
+          <p:cNvSpPr txBox="1"/>
+          <p:nvPr/>
+        </p:nvSpPr>
+        <p:spPr>
+          <a:xfrm rot="4319509">
+            <a:off x="2456987" y="2277662"/>
+            <a:ext cx="1367882" cy="646331"/>
+          </a:xfrm>
+          <a:prstGeom prst="rect">
+            <a:avLst/>
+          </a:prstGeom>
+          <a:noFill/>
+        </p:spPr>
+        <p:txBody>
+          <a:bodyPr wrap="square" rtlCol="0">
+            <a:spAutoFit/>
+          </a:bodyPr>
+          <a:lstStyle/>
+          <a:p>
+            <a:r>
+              <a:rPr lang="fr-FR" sz="3600" b="1" dirty="0" smtClean="0">
+                <a:solidFill>
+                  <a:srgbClr val="FFC000"/>
+                </a:solidFill>
+              </a:rPr>
+              <a:t>6.8k</a:t>
+            </a:r>
+            <a:r>
+              <a:rPr lang="el-GR" sz="3600" b="1" dirty="0" smtClean="0">
+                <a:solidFill>
+                  <a:srgbClr val="FFC000"/>
+                </a:solidFill>
+              </a:rPr>
+              <a:t>Ω</a:t>
+            </a:r>
+            <a:endParaRPr lang="fr-FR" sz="3600" b="1" dirty="0">
               <a:solidFill>
-                <a:srgbClr val="FF0000"/>
+                <a:srgbClr val="FFC000"/>
               </a:solidFill>
             </a:endParaRPr>
           </a:p>
         </p:txBody>
       </p:sp>
-      <p:sp>
-        <p:nvSpPr>
-          <p:cNvPr id="14" name="ZoneTexte 13"/>
-          <p:cNvSpPr txBox="1"/>
-          <p:nvPr/>
-        </p:nvSpPr>
-        <p:spPr>
-          <a:xfrm>
-            <a:off x="0" y="3765163"/>
-            <a:ext cx="993388" cy="276999"/>
-          </a:xfrm>
-          <a:prstGeom prst="rect">
-            <a:avLst/>
-          </a:prstGeom>
-          <a:noFill/>
-        </p:spPr>
-        <p:txBody>
-          <a:bodyPr wrap="square" rtlCol="0">
-            <a:spAutoFit/>
-          </a:bodyPr>
-          <a:lstStyle/>
-          <a:p>
-            <a:r>
-              <a:rPr lang="fr-FR" sz="1200" dirty="0" smtClean="0">
-                <a:solidFill>
-                  <a:srgbClr val="FF0000"/>
-                </a:solidFill>
-              </a:rPr>
-              <a:t>To LS139 O</a:t>
-            </a:r>
-            <a:r>
-              <a:rPr lang="fr-FR" sz="1200" baseline="-25000" dirty="0" smtClean="0">
-                <a:solidFill>
-                  <a:srgbClr val="FF0000"/>
-                </a:solidFill>
-              </a:rPr>
-              <a:t>0a</a:t>
-            </a:r>
-            <a:endParaRPr lang="fr-FR" sz="1200" baseline="-25000" dirty="0">
+      <p:cxnSp>
+        <p:nvCxnSpPr>
+          <p:cNvPr id="13" name="Connecteur droit avec flèche 12"/>
+          <p:cNvCxnSpPr/>
+          <p:nvPr/>
+        </p:nvCxnSpPr>
+        <p:spPr>
+          <a:xfrm flipH="1" flipV="1">
+            <a:off x="3854606" y="4624039"/>
+            <a:ext cx="427462" cy="561278"/>
+          </a:xfrm>
+          <a:prstGeom prst="straightConnector1">
+            <a:avLst/>
+          </a:prstGeom>
+          <a:ln w="53975">
+            <a:solidFill>
+              <a:srgbClr val="FFC000"/>
+            </a:solidFill>
+            <a:tailEnd type="arrow"/>
+          </a:ln>
+        </p:spPr>
+        <p:style>
+          <a:lnRef idx="1">
+            <a:schemeClr val="accent1"/>
+          </a:lnRef>
+          <a:fillRef idx="0">
+            <a:schemeClr val="accent1"/>
+          </a:fillRef>
+          <a:effectRef idx="0">
+            <a:schemeClr val="accent1"/>
+          </a:effectRef>
+          <a:fontRef idx="minor">
+            <a:schemeClr val="tx1"/>
+          </a:fontRef>
+        </p:style>
+      </p:cxnSp>
+      <p:sp>
+        <p:nvSpPr>
+          <p:cNvPr id="15" name="ZoneTexte 14"/>
+          <p:cNvSpPr txBox="1"/>
+          <p:nvPr/>
+        </p:nvSpPr>
+        <p:spPr>
+          <a:xfrm>
+            <a:off x="4018159" y="5121225"/>
+            <a:ext cx="1323276" cy="646331"/>
+          </a:xfrm>
+          <a:prstGeom prst="rect">
+            <a:avLst/>
+          </a:prstGeom>
+          <a:noFill/>
+        </p:spPr>
+        <p:txBody>
+          <a:bodyPr wrap="square" rtlCol="0">
+            <a:spAutoFit/>
+          </a:bodyPr>
+          <a:lstStyle/>
+          <a:p>
+            <a:r>
+              <a:rPr lang="fr-FR" sz="3600" b="1" dirty="0" smtClean="0">
+                <a:solidFill>
+                  <a:srgbClr val="FFC000"/>
+                </a:solidFill>
+              </a:rPr>
+              <a:t>VCC</a:t>
+            </a:r>
+            <a:endParaRPr lang="fr-FR" sz="3600" b="1" dirty="0">
               <a:solidFill>
-                <a:srgbClr val="FF0000"/>
+                <a:srgbClr val="FFC000"/>
               </a:solidFill>
             </a:endParaRPr>
           </a:p>
         </p:txBody>
       </p:sp>
-      <p:sp>
-        <p:nvSpPr>
-          <p:cNvPr id="15" name="ZoneTexte 14"/>
-          <p:cNvSpPr txBox="1"/>
-          <p:nvPr/>
-        </p:nvSpPr>
-        <p:spPr>
-          <a:xfrm>
-            <a:off x="3846707" y="3297973"/>
-            <a:ext cx="1047750" cy="276999"/>
-          </a:xfrm>
-          <a:prstGeom prst="rect">
-            <a:avLst/>
-          </a:prstGeom>
-          <a:noFill/>
-        </p:spPr>
-        <p:txBody>
-          <a:bodyPr wrap="square" rtlCol="0">
-            <a:spAutoFit/>
-          </a:bodyPr>
-          <a:lstStyle/>
-          <a:p>
-            <a:r>
-              <a:rPr lang="fr-FR" sz="1200" dirty="0" smtClean="0">
-                <a:solidFill>
-                  <a:srgbClr val="FF0000"/>
-                </a:solidFill>
-              </a:rPr>
-              <a:t>To 3.3V</a:t>
-            </a:r>
-            <a:endParaRPr lang="fr-FR" sz="1200" baseline="-25000" dirty="0">
-              <a:solidFill>
-                <a:srgbClr val="FF0000"/>
-              </a:solidFill>
-            </a:endParaRPr>
-          </a:p>
-        </p:txBody>
-      </p:sp>
     </p:spTree>
-    <p:extLst>
-      <p:ext uri="{BB962C8B-B14F-4D97-AF65-F5344CB8AC3E}">
-        <p14:creationId xmlns="" xmlns:p14="http://schemas.microsoft.com/office/powerpoint/2010/main" val="141957672"/>
-      </p:ext>
-    </p:extLst>
   </p:cSld>
   <p:clrMapOvr>
     <a:masterClrMapping/>
   </p:clrMapOvr>
+  <p:timing>
+    <p:tnLst>
+      <p:par>
+        <p:cTn id="1" dur="indefinite" restart="never" nodeType="tmRoot"/>
+      </p:par>
+    </p:tnLst>
+  </p:timing>
 </p:sld>
 </file>
 
@@ -9391,7 +8567,7 @@
       </p:grpSpPr>
       <p:pic>
         <p:nvPicPr>
-          <p:cNvPr id="1026" name="Picture 2"/>
+          <p:cNvPr id="2050" name="Picture 2" descr="C:\Users\BOICHOT\Downloads\Neo-Geo-Sengoku-2-Red-Blood-main\MVS_bootleg_convert\Detail_on_P1.jpg"/>
           <p:cNvPicPr>
             <a:picLocks noChangeAspect="1" noChangeArrowheads="1"/>
           </p:cNvPicPr>
@@ -9406,60 +8582,65 @@
         </p:blipFill>
         <p:spPr bwMode="auto">
           <a:xfrm>
-            <a:off x="281182" y="423901"/>
-            <a:ext cx="8078788" cy="6030913"/>
-          </a:xfrm>
-          <a:prstGeom prst="rect">
-            <a:avLst/>
-          </a:prstGeom>
-          <a:noFill/>
-          <a:ln w="9525">
-            <a:noFill/>
-            <a:miter lim="800000"/>
-            <a:headEnd/>
-            <a:tailEnd/>
-          </a:ln>
-          <a:effectLst/>
+            <a:off x="847492" y="0"/>
+            <a:ext cx="10275945" cy="6858000"/>
+          </a:xfrm>
+          <a:prstGeom prst="rect">
+            <a:avLst/>
+          </a:prstGeom>
+          <a:noFill/>
         </p:spPr>
       </p:pic>
-      <p:pic>
-        <p:nvPicPr>
-          <p:cNvPr id="1027" name="Picture 3"/>
-          <p:cNvPicPr>
-            <a:picLocks noChangeAspect="1" noChangeArrowheads="1"/>
-          </p:cNvPicPr>
-          <p:nvPr/>
-        </p:nvPicPr>
-        <p:blipFill>
-          <a:blip r:embed="rId3" cstate="print"/>
-          <a:srcRect/>
-          <a:stretch>
-            <a:fillRect/>
-          </a:stretch>
-        </p:blipFill>
-        <p:spPr bwMode="auto">
-          <a:xfrm>
-            <a:off x="8528165" y="82280"/>
-            <a:ext cx="3429000" cy="6697663"/>
-          </a:xfrm>
-          <a:prstGeom prst="rect">
-            <a:avLst/>
-          </a:prstGeom>
-          <a:noFill/>
-          <a:ln w="9525">
-            <a:noFill/>
-            <a:miter lim="800000"/>
-            <a:headEnd/>
-            <a:tailEnd/>
-          </a:ln>
-          <a:effectLst/>
-        </p:spPr>
-      </p:pic>
+      <p:sp>
+        <p:nvSpPr>
+          <p:cNvPr id="5" name="ZoneTexte 4"/>
+          <p:cNvSpPr txBox="1"/>
+          <p:nvPr/>
+        </p:nvSpPr>
+        <p:spPr>
+          <a:xfrm>
+            <a:off x="3668752" y="4248615"/>
+            <a:ext cx="6579219" cy="1015663"/>
+          </a:xfrm>
+          <a:prstGeom prst="rect">
+            <a:avLst/>
+          </a:prstGeom>
+          <a:noFill/>
+        </p:spPr>
+        <p:txBody>
+          <a:bodyPr wrap="square" rtlCol="0">
+            <a:spAutoFit/>
+          </a:bodyPr>
+          <a:lstStyle/>
+          <a:p>
+            <a:r>
+              <a:rPr lang="fr-FR" sz="6000" b="1" dirty="0" smtClean="0">
+                <a:solidFill>
+                  <a:srgbClr val="FFC000"/>
+                </a:solidFill>
+              </a:rPr>
+              <a:t>Mount P1 on socket</a:t>
+            </a:r>
+            <a:endParaRPr lang="fr-FR" sz="6000" b="1" dirty="0">
+              <a:solidFill>
+                <a:srgbClr val="FFC000"/>
+              </a:solidFill>
+            </a:endParaRPr>
+          </a:p>
+        </p:txBody>
+      </p:sp>
     </p:spTree>
   </p:cSld>
   <p:clrMapOvr>
     <a:masterClrMapping/>
   </p:clrMapOvr>
+  <p:timing>
+    <p:tnLst>
+      <p:par>
+        <p:cTn id="1" dur="indefinite" restart="never" nodeType="tmRoot"/>
+      </p:par>
+    </p:tnLst>
+  </p:timing>
 </p:sld>
 </file>
 
@@ -9482,7 +8663,7 @@
       </p:grpSpPr>
       <p:pic>
         <p:nvPicPr>
-          <p:cNvPr id="2050" name="Picture 2"/>
+          <p:cNvPr id="1026" name="Picture 2" descr="C:\Users\BOICHOT\Downloads\Neo-Geo-Sengoku-2-Red-Blood-main\MVS_bootleg_convert\Harware_necessary.jpg"/>
           <p:cNvPicPr>
             <a:picLocks noChangeAspect="1" noChangeArrowheads="1"/>
           </p:cNvPicPr>
@@ -9497,93 +8678,135 @@
         </p:blipFill>
         <p:spPr bwMode="auto">
           <a:xfrm>
-            <a:off x="4354351" y="0"/>
-            <a:ext cx="3563007" cy="6857455"/>
-          </a:xfrm>
-          <a:prstGeom prst="rect">
-            <a:avLst/>
-          </a:prstGeom>
-          <a:noFill/>
-          <a:ln w="9525">
-            <a:noFill/>
-            <a:miter lim="800000"/>
-            <a:headEnd/>
-            <a:tailEnd/>
-          </a:ln>
-          <a:effectLst/>
+            <a:off x="0" y="278780"/>
+            <a:ext cx="12160588" cy="6266985"/>
+          </a:xfrm>
+          <a:prstGeom prst="rect">
+            <a:avLst/>
+          </a:prstGeom>
+          <a:noFill/>
         </p:spPr>
       </p:pic>
-      <p:pic>
-        <p:nvPicPr>
-          <p:cNvPr id="5" name="Picture 3"/>
-          <p:cNvPicPr>
-            <a:picLocks noChangeAspect="1" noChangeArrowheads="1"/>
-          </p:cNvPicPr>
-          <p:nvPr/>
-        </p:nvPicPr>
-        <p:blipFill>
-          <a:blip r:embed="rId3" cstate="print"/>
-          <a:srcRect/>
-          <a:stretch>
-            <a:fillRect/>
-          </a:stretch>
-        </p:blipFill>
-        <p:spPr bwMode="auto">
-          <a:xfrm>
-            <a:off x="822663" y="82280"/>
-            <a:ext cx="3429000" cy="6697663"/>
-          </a:xfrm>
-          <a:prstGeom prst="rect">
-            <a:avLst/>
-          </a:prstGeom>
-          <a:noFill/>
-          <a:ln w="9525">
-            <a:noFill/>
-            <a:miter lim="800000"/>
-            <a:headEnd/>
-            <a:tailEnd/>
-          </a:ln>
-          <a:effectLst/>
-        </p:spPr>
-      </p:pic>
-      <p:pic>
-        <p:nvPicPr>
-          <p:cNvPr id="2051" name="Picture 3"/>
-          <p:cNvPicPr>
-            <a:picLocks noChangeAspect="1" noChangeArrowheads="1"/>
-          </p:cNvPicPr>
-          <p:nvPr/>
-        </p:nvPicPr>
-        <p:blipFill>
-          <a:blip r:embed="rId4" cstate="print"/>
-          <a:srcRect/>
-          <a:stretch>
-            <a:fillRect/>
-          </a:stretch>
-        </p:blipFill>
-        <p:spPr bwMode="auto">
-          <a:xfrm>
-            <a:off x="7940049" y="33453"/>
-            <a:ext cx="3411885" cy="6775692"/>
-          </a:xfrm>
-          <a:prstGeom prst="rect">
-            <a:avLst/>
-          </a:prstGeom>
-          <a:noFill/>
-          <a:ln w="9525">
-            <a:noFill/>
-            <a:miter lim="800000"/>
-            <a:headEnd/>
-            <a:tailEnd/>
-          </a:ln>
-          <a:effectLst/>
-        </p:spPr>
-      </p:pic>
+      <p:sp>
+        <p:nvSpPr>
+          <p:cNvPr id="5" name="ZoneTexte 4"/>
+          <p:cNvSpPr txBox="1"/>
+          <p:nvPr/>
+        </p:nvSpPr>
+        <p:spPr>
+          <a:xfrm>
+            <a:off x="802887" y="5586761"/>
+            <a:ext cx="7738945" cy="707886"/>
+          </a:xfrm>
+          <a:prstGeom prst="rect">
+            <a:avLst/>
+          </a:prstGeom>
+          <a:noFill/>
+        </p:spPr>
+        <p:txBody>
+          <a:bodyPr wrap="square" rtlCol="0">
+            <a:spAutoFit/>
+          </a:bodyPr>
+          <a:lstStyle/>
+          <a:p>
+            <a:r>
+              <a:rPr lang="fr-FR" sz="4000" b="1" dirty="0" smtClean="0">
+                <a:solidFill>
+                  <a:srgbClr val="FFFF00"/>
+                </a:solidFill>
+              </a:rPr>
+              <a:t>GQ 4x4 </a:t>
+            </a:r>
+            <a:r>
+              <a:rPr lang="fr-FR" sz="4000" b="1" dirty="0" err="1" smtClean="0">
+                <a:solidFill>
+                  <a:srgbClr val="FFFF00"/>
+                </a:solidFill>
+              </a:rPr>
+              <a:t>with</a:t>
+            </a:r>
+            <a:r>
+              <a:rPr lang="fr-FR" sz="4000" b="1" dirty="0" smtClean="0">
+                <a:solidFill>
+                  <a:srgbClr val="FFFF00"/>
+                </a:solidFill>
+              </a:rPr>
+              <a:t> ADP-054 </a:t>
+            </a:r>
+            <a:r>
+              <a:rPr lang="fr-FR" sz="4000" b="1" dirty="0" err="1" smtClean="0">
+                <a:solidFill>
+                  <a:srgbClr val="FFFF00"/>
+                </a:solidFill>
+              </a:rPr>
+              <a:t>adapater</a:t>
+            </a:r>
+            <a:endParaRPr lang="fr-FR" sz="4000" b="1" dirty="0">
+              <a:solidFill>
+                <a:srgbClr val="FFFF00"/>
+              </a:solidFill>
+            </a:endParaRPr>
+          </a:p>
+        </p:txBody>
+      </p:sp>
+      <p:sp>
+        <p:nvSpPr>
+          <p:cNvPr id="6" name="ZoneTexte 5"/>
+          <p:cNvSpPr txBox="1"/>
+          <p:nvPr/>
+        </p:nvSpPr>
+        <p:spPr>
+          <a:xfrm>
+            <a:off x="8987883" y="1059366"/>
+            <a:ext cx="3204117" cy="707886"/>
+          </a:xfrm>
+          <a:prstGeom prst="rect">
+            <a:avLst/>
+          </a:prstGeom>
+          <a:noFill/>
+        </p:spPr>
+        <p:txBody>
+          <a:bodyPr wrap="square" rtlCol="0">
+            <a:spAutoFit/>
+          </a:bodyPr>
+          <a:lstStyle/>
+          <a:p>
+            <a:r>
+              <a:rPr lang="fr-FR" sz="4000" b="1" dirty="0" err="1" smtClean="0">
+                <a:solidFill>
+                  <a:srgbClr val="FFFF00"/>
+                </a:solidFill>
+              </a:rPr>
+              <a:t>Mega</a:t>
+            </a:r>
+            <a:r>
+              <a:rPr lang="fr-FR" sz="4000" b="1" dirty="0" smtClean="0">
+                <a:solidFill>
+                  <a:srgbClr val="FFFF00"/>
+                </a:solidFill>
+              </a:rPr>
+              <a:t> Burner</a:t>
+            </a:r>
+            <a:endParaRPr lang="fr-FR" sz="4000" b="1" dirty="0">
+              <a:solidFill>
+                <a:srgbClr val="FFFF00"/>
+              </a:solidFill>
+            </a:endParaRPr>
+          </a:p>
+        </p:txBody>
+      </p:sp>
     </p:spTree>
   </p:cSld>
   <p:clrMapOvr>
     <a:masterClrMapping/>
   </p:clrMapOvr>
+  <p:timing>
+    <p:tnLst>
+      <p:par>
+        <p:cTn id="1" dur="indefinite" restart="never" nodeType="tmRoot"/>
+      </p:par>
+    </p:tnLst>
+  </p:timing>
 </p:sld>
 </file>
 
@@ -9842,7 +9065,7 @@
   <a:extraClrSchemeLst/>
   <a:extLst>
     <a:ext uri="{05A4C25C-085E-4340-85A3-A5531E510DB2}">
-      <thm15:themeFamily xmlns="" xmlns:thm15="http://schemas.microsoft.com/office/thememl/2012/main" name="Office Theme" id="{62F939B6-93AF-4DB8-9C6B-D6C7DFDC589F}" vid="{4A3C46E8-61CC-4603-A589-7422A47A8E4A}"/>
+      <thm15:themeFamily xmlns:thm15="http://schemas.microsoft.com/office/thememl/2012/main" name="Office Theme" id="{62F939B6-93AF-4DB8-9C6B-D6C7DFDC589F}" vid="{4A3C46E8-61CC-4603-A589-7422A47A8E4A}"/>
     </a:ext>
   </a:extLst>
 </a:theme>

--- a/MVS_bootleg_convert/Chip_Analysis_and_schemes.pptx
+++ b/MVS_bootleg_convert/Chip_Analysis_and_schemes.pptx
@@ -6506,15 +6506,7 @@
                   <a:schemeClr val="tx1"/>
                 </a:solidFill>
               </a:rPr>
-              <a:t>PSOP </a:t>
-            </a:r>
-            <a:r>
-              <a:rPr lang="fr-FR" sz="3600" dirty="0" smtClean="0">
-                <a:solidFill>
-                  <a:schemeClr val="tx1"/>
-                </a:solidFill>
-              </a:rPr>
-              <a:t>44 adapter</a:t>
+              <a:t>PSOP 44 adapter</a:t>
             </a:r>
             <a:endParaRPr lang="fr-FR" sz="3600" dirty="0">
               <a:solidFill>
@@ -8339,7 +8331,7 @@
         </p:nvSpPr>
         <p:spPr>
           <a:xfrm>
-            <a:off x="1390187" y="184951"/>
+            <a:off x="1399712" y="0"/>
             <a:ext cx="4676077" cy="646331"/>
           </a:xfrm>
           <a:prstGeom prst="rect">
@@ -8384,9 +8376,9 @@
           <p:nvPr/>
         </p:nvCxnSpPr>
         <p:spPr>
-          <a:xfrm flipH="1">
-            <a:off x="2252546" y="769434"/>
-            <a:ext cx="446049" cy="624468"/>
+          <a:xfrm>
+            <a:off x="1828800" y="571500"/>
+            <a:ext cx="423747" cy="822402"/>
           </a:xfrm>
           <a:prstGeom prst="straightConnector1">
             <a:avLst/>
@@ -8524,6 +8516,44 @@
                 </a:solidFill>
               </a:rPr>
               <a:t>VCC</a:t>
+            </a:r>
+            <a:endParaRPr lang="fr-FR" sz="3600" b="1" dirty="0">
+              <a:solidFill>
+                <a:srgbClr val="FFC000"/>
+              </a:solidFill>
+            </a:endParaRPr>
+          </a:p>
+        </p:txBody>
+      </p:sp>
+      <p:sp>
+        <p:nvSpPr>
+          <p:cNvPr id="10" name="ZoneTexte 9"/>
+          <p:cNvSpPr txBox="1"/>
+          <p:nvPr/>
+        </p:nvSpPr>
+        <p:spPr>
+          <a:xfrm>
+            <a:off x="3457575" y="623101"/>
+            <a:ext cx="6571089" cy="646331"/>
+          </a:xfrm>
+          <a:prstGeom prst="rect">
+            <a:avLst/>
+          </a:prstGeom>
+          <a:noFill/>
+        </p:spPr>
+        <p:txBody>
+          <a:bodyPr wrap="square" rtlCol="0">
+            <a:spAutoFit/>
+          </a:bodyPr>
+          <a:lstStyle/>
+          <a:p>
+            <a:r>
+              <a:rPr lang="fr-FR" sz="3600" b="1" dirty="0" smtClean="0">
+                <a:solidFill>
+                  <a:srgbClr val="FFC000"/>
+                </a:solidFill>
+              </a:rPr>
+              <a:t>2xMX29LV320 or MX29L3211</a:t>
             </a:r>
             <a:endParaRPr lang="fr-FR" sz="3600" b="1" dirty="0">
               <a:solidFill>
